--- a/public/materials/database/supabase-crud.pptx
+++ b/public/materials/database/supabase-crud.pptx
@@ -2,20 +2,27 @@
 <file path=ppt/presentation.xml><?xml version="1.0" encoding="utf-8"?>
 <p:presentation xmlns:p="http://schemas.openxmlformats.org/presentationml/2006/main">
   <p:sldMasterIdLst>
-    <p:sldMasterId xmlns:r="http://schemas.openxmlformats.org/officeDocument/2006/relationships" id="2147483648" r:id="R990a2a18f5454724"/>
+    <p:sldMasterId xmlns:r="http://schemas.openxmlformats.org/officeDocument/2006/relationships" id="2147483648" r:id="Re292c52d2bbe48e8"/>
   </p:sldMasterIdLst>
   <p:notesMasterIdLst>
-    <p:notesMasterId xmlns:r="http://schemas.openxmlformats.org/officeDocument/2006/relationships" r:id="Ref25f86890874e09"/>
+    <p:notesMasterId xmlns:r="http://schemas.openxmlformats.org/officeDocument/2006/relationships" r:id="R557ddfa60ea24d8d"/>
   </p:notesMasterIdLst>
   <p:sldIdLst>
-    <p:sldId xmlns:r="http://schemas.openxmlformats.org/officeDocument/2006/relationships" id="256" r:id="Rd66cb36adbb64daf"/>
-    <p:sldId xmlns:r="http://schemas.openxmlformats.org/officeDocument/2006/relationships" id="257" r:id="Re147d6547a814f0c"/>
-    <p:sldId xmlns:r="http://schemas.openxmlformats.org/officeDocument/2006/relationships" id="258" r:id="R116636652d61440f"/>
-    <p:sldId xmlns:r="http://schemas.openxmlformats.org/officeDocument/2006/relationships" id="259" r:id="R632c558f06ad491e"/>
-    <p:sldId xmlns:r="http://schemas.openxmlformats.org/officeDocument/2006/relationships" id="260" r:id="R318b4aa444fe43c6"/>
-    <p:sldId xmlns:r="http://schemas.openxmlformats.org/officeDocument/2006/relationships" id="261" r:id="Re1ced4830dd741a9"/>
-    <p:sldId xmlns:r="http://schemas.openxmlformats.org/officeDocument/2006/relationships" id="262" r:id="R7766d5cf626b4301"/>
-    <p:sldId xmlns:r="http://schemas.openxmlformats.org/officeDocument/2006/relationships" id="263" r:id="Rbdfae39949984b66"/>
+    <p:sldId xmlns:r="http://schemas.openxmlformats.org/officeDocument/2006/relationships" id="256" r:id="R8d09b25487b149ed"/>
+    <p:sldId xmlns:r="http://schemas.openxmlformats.org/officeDocument/2006/relationships" id="257" r:id="Rd6ecc591567c4500"/>
+    <p:sldId xmlns:r="http://schemas.openxmlformats.org/officeDocument/2006/relationships" id="258" r:id="R36508dac01854e66"/>
+    <p:sldId xmlns:r="http://schemas.openxmlformats.org/officeDocument/2006/relationships" id="259" r:id="R3aa28ecc83ba4e7a"/>
+    <p:sldId xmlns:r="http://schemas.openxmlformats.org/officeDocument/2006/relationships" id="260" r:id="R73dcec08d9e44b28"/>
+    <p:sldId xmlns:r="http://schemas.openxmlformats.org/officeDocument/2006/relationships" id="261" r:id="R385605cf4a154450"/>
+    <p:sldId xmlns:r="http://schemas.openxmlformats.org/officeDocument/2006/relationships" id="262" r:id="Rbfa829aec2544eee"/>
+    <p:sldId xmlns:r="http://schemas.openxmlformats.org/officeDocument/2006/relationships" id="263" r:id="R4424b270c1094b12"/>
+    <p:sldId xmlns:r="http://schemas.openxmlformats.org/officeDocument/2006/relationships" id="264" r:id="Ref80a8e6d0504ee7"/>
+    <p:sldId xmlns:r="http://schemas.openxmlformats.org/officeDocument/2006/relationships" id="265" r:id="Rfce797fc14f84e36"/>
+    <p:sldId xmlns:r="http://schemas.openxmlformats.org/officeDocument/2006/relationships" id="266" r:id="R094a881a34604f65"/>
+    <p:sldId xmlns:r="http://schemas.openxmlformats.org/officeDocument/2006/relationships" id="267" r:id="Re990e00afa234103"/>
+    <p:sldId xmlns:r="http://schemas.openxmlformats.org/officeDocument/2006/relationships" id="268" r:id="Re4cfa52bac4e4c71"/>
+    <p:sldId xmlns:r="http://schemas.openxmlformats.org/officeDocument/2006/relationships" id="269" r:id="R0096f3fe2e8d47d7"/>
+    <p:sldId xmlns:r="http://schemas.openxmlformats.org/officeDocument/2006/relationships" id="270" r:id="R686364883f654ea4"/>
   </p:sldIdLst>
   <p:sldSz cx="12192000" cy="6858000"/>
   <p:notesSz cx="6858000" cy="9144000"/>
@@ -475,6 +482,402 @@
 </p:notes>
 </file>
 
+<file path=ppt/notesSlides/notesSlide10.xml><?xml version="1.0" encoding="utf-8"?>
+<p:notes xmlns:p="http://schemas.openxmlformats.org/presentationml/2006/main">
+  <p:cSld>
+    <p:spTree>
+      <p:nvGrpSpPr>
+        <p:cNvPr id="1" name=""/>
+        <p:cNvGrpSpPr/>
+        <p:nvPr/>
+      </p:nvGrpSpPr>
+      <p:grpSpPr>
+        <a:xfrm xmlns:a="http://schemas.openxmlformats.org/drawingml/2006/main"/>
+      </p:grpSpPr>
+      <p:sp>
+        <p:nvSpPr>
+          <p:cNvPr id="2" name="Slide Image Placeholder 1"/>
+          <p:cNvSpPr>
+            <a:spLocks xmlns:a="http://schemas.openxmlformats.org/drawingml/2006/main" noGrp="1"/>
+          </p:cNvSpPr>
+          <p:nvPr>
+            <p:ph type="sldImg" idx="0"/>
+          </p:nvPr>
+        </p:nvSpPr>
+        <p:spPr/>
+      </p:sp>
+      <p:sp>
+        <p:nvSpPr>
+          <p:cNvPr id="3" name="Notes Placeholder 2"/>
+          <p:cNvSpPr>
+            <a:spLocks xmlns:a="http://schemas.openxmlformats.org/drawingml/2006/main" noGrp="1"/>
+          </p:cNvSpPr>
+          <p:nvPr>
+            <p:ph type="body" idx="1"/>
+          </p:nvPr>
+        </p:nvSpPr>
+        <p:spPr/>
+        <p:txBody>
+          <a:bodyPr xmlns:a="http://schemas.openxmlformats.org/drawingml/2006/main"/>
+          <a:lstStyle xmlns:a="http://schemas.openxmlformats.org/drawingml/2006/main"/>
+          <a:p xmlns:a="http://schemas.openxmlformats.org/drawingml/2006/main"/>
+        </p:txBody>
+      </p:sp>
+      <p:sp>
+        <p:nvSpPr>
+          <p:cNvPr id="4" name="Slide Number Placeholder 3"/>
+          <p:cNvSpPr>
+            <a:spLocks xmlns:a="http://schemas.openxmlformats.org/drawingml/2006/main" noGrp="1"/>
+          </p:cNvSpPr>
+          <p:nvPr>
+            <p:ph type="sldNum" idx="5"/>
+          </p:nvPr>
+        </p:nvSpPr>
+        <p:spPr/>
+        <p:txBody>
+          <a:bodyPr xmlns:a="http://schemas.openxmlformats.org/drawingml/2006/main"/>
+          <a:lstStyle xmlns:a="http://schemas.openxmlformats.org/drawingml/2006/main"/>
+          <a:p xmlns:a="http://schemas.openxmlformats.org/drawingml/2006/main"/>
+        </p:txBody>
+      </p:sp>
+    </p:spTree>
+  </p:cSld>
+  <p:clrMapOvr>
+    <a:masterClrMapping xmlns:a="http://schemas.openxmlformats.org/drawingml/2006/main"/>
+  </p:clrMapOvr>
+</p:notes>
+</file>
+
+<file path=ppt/notesSlides/notesSlide11.xml><?xml version="1.0" encoding="utf-8"?>
+<p:notes xmlns:p="http://schemas.openxmlformats.org/presentationml/2006/main">
+  <p:cSld>
+    <p:spTree>
+      <p:nvGrpSpPr>
+        <p:cNvPr id="1" name=""/>
+        <p:cNvGrpSpPr/>
+        <p:nvPr/>
+      </p:nvGrpSpPr>
+      <p:grpSpPr>
+        <a:xfrm xmlns:a="http://schemas.openxmlformats.org/drawingml/2006/main"/>
+      </p:grpSpPr>
+      <p:sp>
+        <p:nvSpPr>
+          <p:cNvPr id="2" name="Slide Image Placeholder 1"/>
+          <p:cNvSpPr>
+            <a:spLocks xmlns:a="http://schemas.openxmlformats.org/drawingml/2006/main" noGrp="1"/>
+          </p:cNvSpPr>
+          <p:nvPr>
+            <p:ph type="sldImg" idx="0"/>
+          </p:nvPr>
+        </p:nvSpPr>
+        <p:spPr/>
+      </p:sp>
+      <p:sp>
+        <p:nvSpPr>
+          <p:cNvPr id="3" name="Notes Placeholder 2"/>
+          <p:cNvSpPr>
+            <a:spLocks xmlns:a="http://schemas.openxmlformats.org/drawingml/2006/main" noGrp="1"/>
+          </p:cNvSpPr>
+          <p:nvPr>
+            <p:ph type="body" idx="1"/>
+          </p:nvPr>
+        </p:nvSpPr>
+        <p:spPr/>
+        <p:txBody>
+          <a:bodyPr xmlns:a="http://schemas.openxmlformats.org/drawingml/2006/main"/>
+          <a:lstStyle xmlns:a="http://schemas.openxmlformats.org/drawingml/2006/main"/>
+          <a:p xmlns:a="http://schemas.openxmlformats.org/drawingml/2006/main"/>
+        </p:txBody>
+      </p:sp>
+      <p:sp>
+        <p:nvSpPr>
+          <p:cNvPr id="4" name="Slide Number Placeholder 3"/>
+          <p:cNvSpPr>
+            <a:spLocks xmlns:a="http://schemas.openxmlformats.org/drawingml/2006/main" noGrp="1"/>
+          </p:cNvSpPr>
+          <p:nvPr>
+            <p:ph type="sldNum" idx="5"/>
+          </p:nvPr>
+        </p:nvSpPr>
+        <p:spPr/>
+        <p:txBody>
+          <a:bodyPr xmlns:a="http://schemas.openxmlformats.org/drawingml/2006/main"/>
+          <a:lstStyle xmlns:a="http://schemas.openxmlformats.org/drawingml/2006/main"/>
+          <a:p xmlns:a="http://schemas.openxmlformats.org/drawingml/2006/main"/>
+        </p:txBody>
+      </p:sp>
+    </p:spTree>
+  </p:cSld>
+  <p:clrMapOvr>
+    <a:masterClrMapping xmlns:a="http://schemas.openxmlformats.org/drawingml/2006/main"/>
+  </p:clrMapOvr>
+</p:notes>
+</file>
+
+<file path=ppt/notesSlides/notesSlide12.xml><?xml version="1.0" encoding="utf-8"?>
+<p:notes xmlns:p="http://schemas.openxmlformats.org/presentationml/2006/main">
+  <p:cSld>
+    <p:spTree>
+      <p:nvGrpSpPr>
+        <p:cNvPr id="1" name=""/>
+        <p:cNvGrpSpPr/>
+        <p:nvPr/>
+      </p:nvGrpSpPr>
+      <p:grpSpPr>
+        <a:xfrm xmlns:a="http://schemas.openxmlformats.org/drawingml/2006/main"/>
+      </p:grpSpPr>
+      <p:sp>
+        <p:nvSpPr>
+          <p:cNvPr id="2" name="Slide Image Placeholder 1"/>
+          <p:cNvSpPr>
+            <a:spLocks xmlns:a="http://schemas.openxmlformats.org/drawingml/2006/main" noGrp="1"/>
+          </p:cNvSpPr>
+          <p:nvPr>
+            <p:ph type="sldImg" idx="0"/>
+          </p:nvPr>
+        </p:nvSpPr>
+        <p:spPr/>
+      </p:sp>
+      <p:sp>
+        <p:nvSpPr>
+          <p:cNvPr id="3" name="Notes Placeholder 2"/>
+          <p:cNvSpPr>
+            <a:spLocks xmlns:a="http://schemas.openxmlformats.org/drawingml/2006/main" noGrp="1"/>
+          </p:cNvSpPr>
+          <p:nvPr>
+            <p:ph type="body" idx="1"/>
+          </p:nvPr>
+        </p:nvSpPr>
+        <p:spPr/>
+        <p:txBody>
+          <a:bodyPr xmlns:a="http://schemas.openxmlformats.org/drawingml/2006/main"/>
+          <a:lstStyle xmlns:a="http://schemas.openxmlformats.org/drawingml/2006/main"/>
+          <a:p xmlns:a="http://schemas.openxmlformats.org/drawingml/2006/main"/>
+        </p:txBody>
+      </p:sp>
+      <p:sp>
+        <p:nvSpPr>
+          <p:cNvPr id="4" name="Slide Number Placeholder 3"/>
+          <p:cNvSpPr>
+            <a:spLocks xmlns:a="http://schemas.openxmlformats.org/drawingml/2006/main" noGrp="1"/>
+          </p:cNvSpPr>
+          <p:nvPr>
+            <p:ph type="sldNum" idx="5"/>
+          </p:nvPr>
+        </p:nvSpPr>
+        <p:spPr/>
+        <p:txBody>
+          <a:bodyPr xmlns:a="http://schemas.openxmlformats.org/drawingml/2006/main"/>
+          <a:lstStyle xmlns:a="http://schemas.openxmlformats.org/drawingml/2006/main"/>
+          <a:p xmlns:a="http://schemas.openxmlformats.org/drawingml/2006/main"/>
+        </p:txBody>
+      </p:sp>
+    </p:spTree>
+  </p:cSld>
+  <p:clrMapOvr>
+    <a:masterClrMapping xmlns:a="http://schemas.openxmlformats.org/drawingml/2006/main"/>
+  </p:clrMapOvr>
+</p:notes>
+</file>
+
+<file path=ppt/notesSlides/notesSlide13.xml><?xml version="1.0" encoding="utf-8"?>
+<p:notes xmlns:p="http://schemas.openxmlformats.org/presentationml/2006/main">
+  <p:cSld>
+    <p:spTree>
+      <p:nvGrpSpPr>
+        <p:cNvPr id="1" name=""/>
+        <p:cNvGrpSpPr/>
+        <p:nvPr/>
+      </p:nvGrpSpPr>
+      <p:grpSpPr>
+        <a:xfrm xmlns:a="http://schemas.openxmlformats.org/drawingml/2006/main"/>
+      </p:grpSpPr>
+      <p:sp>
+        <p:nvSpPr>
+          <p:cNvPr id="2" name="Slide Image Placeholder 1"/>
+          <p:cNvSpPr>
+            <a:spLocks xmlns:a="http://schemas.openxmlformats.org/drawingml/2006/main" noGrp="1"/>
+          </p:cNvSpPr>
+          <p:nvPr>
+            <p:ph type="sldImg" idx="0"/>
+          </p:nvPr>
+        </p:nvSpPr>
+        <p:spPr/>
+      </p:sp>
+      <p:sp>
+        <p:nvSpPr>
+          <p:cNvPr id="3" name="Notes Placeholder 2"/>
+          <p:cNvSpPr>
+            <a:spLocks xmlns:a="http://schemas.openxmlformats.org/drawingml/2006/main" noGrp="1"/>
+          </p:cNvSpPr>
+          <p:nvPr>
+            <p:ph type="body" idx="1"/>
+          </p:nvPr>
+        </p:nvSpPr>
+        <p:spPr/>
+        <p:txBody>
+          <a:bodyPr xmlns:a="http://schemas.openxmlformats.org/drawingml/2006/main"/>
+          <a:lstStyle xmlns:a="http://schemas.openxmlformats.org/drawingml/2006/main"/>
+          <a:p xmlns:a="http://schemas.openxmlformats.org/drawingml/2006/main"/>
+        </p:txBody>
+      </p:sp>
+      <p:sp>
+        <p:nvSpPr>
+          <p:cNvPr id="4" name="Slide Number Placeholder 3"/>
+          <p:cNvSpPr>
+            <a:spLocks xmlns:a="http://schemas.openxmlformats.org/drawingml/2006/main" noGrp="1"/>
+          </p:cNvSpPr>
+          <p:nvPr>
+            <p:ph type="sldNum" idx="5"/>
+          </p:nvPr>
+        </p:nvSpPr>
+        <p:spPr/>
+        <p:txBody>
+          <a:bodyPr xmlns:a="http://schemas.openxmlformats.org/drawingml/2006/main"/>
+          <a:lstStyle xmlns:a="http://schemas.openxmlformats.org/drawingml/2006/main"/>
+          <a:p xmlns:a="http://schemas.openxmlformats.org/drawingml/2006/main"/>
+        </p:txBody>
+      </p:sp>
+    </p:spTree>
+  </p:cSld>
+  <p:clrMapOvr>
+    <a:masterClrMapping xmlns:a="http://schemas.openxmlformats.org/drawingml/2006/main"/>
+  </p:clrMapOvr>
+</p:notes>
+</file>
+
+<file path=ppt/notesSlides/notesSlide14.xml><?xml version="1.0" encoding="utf-8"?>
+<p:notes xmlns:p="http://schemas.openxmlformats.org/presentationml/2006/main">
+  <p:cSld>
+    <p:spTree>
+      <p:nvGrpSpPr>
+        <p:cNvPr id="1" name=""/>
+        <p:cNvGrpSpPr/>
+        <p:nvPr/>
+      </p:nvGrpSpPr>
+      <p:grpSpPr>
+        <a:xfrm xmlns:a="http://schemas.openxmlformats.org/drawingml/2006/main"/>
+      </p:grpSpPr>
+      <p:sp>
+        <p:nvSpPr>
+          <p:cNvPr id="2" name="Slide Image Placeholder 1"/>
+          <p:cNvSpPr>
+            <a:spLocks xmlns:a="http://schemas.openxmlformats.org/drawingml/2006/main" noGrp="1"/>
+          </p:cNvSpPr>
+          <p:nvPr>
+            <p:ph type="sldImg" idx="0"/>
+          </p:nvPr>
+        </p:nvSpPr>
+        <p:spPr/>
+      </p:sp>
+      <p:sp>
+        <p:nvSpPr>
+          <p:cNvPr id="3" name="Notes Placeholder 2"/>
+          <p:cNvSpPr>
+            <a:spLocks xmlns:a="http://schemas.openxmlformats.org/drawingml/2006/main" noGrp="1"/>
+          </p:cNvSpPr>
+          <p:nvPr>
+            <p:ph type="body" idx="1"/>
+          </p:nvPr>
+        </p:nvSpPr>
+        <p:spPr/>
+        <p:txBody>
+          <a:bodyPr xmlns:a="http://schemas.openxmlformats.org/drawingml/2006/main"/>
+          <a:lstStyle xmlns:a="http://schemas.openxmlformats.org/drawingml/2006/main"/>
+          <a:p xmlns:a="http://schemas.openxmlformats.org/drawingml/2006/main"/>
+        </p:txBody>
+      </p:sp>
+      <p:sp>
+        <p:nvSpPr>
+          <p:cNvPr id="4" name="Slide Number Placeholder 3"/>
+          <p:cNvSpPr>
+            <a:spLocks xmlns:a="http://schemas.openxmlformats.org/drawingml/2006/main" noGrp="1"/>
+          </p:cNvSpPr>
+          <p:nvPr>
+            <p:ph type="sldNum" idx="5"/>
+          </p:nvPr>
+        </p:nvSpPr>
+        <p:spPr/>
+        <p:txBody>
+          <a:bodyPr xmlns:a="http://schemas.openxmlformats.org/drawingml/2006/main"/>
+          <a:lstStyle xmlns:a="http://schemas.openxmlformats.org/drawingml/2006/main"/>
+          <a:p xmlns:a="http://schemas.openxmlformats.org/drawingml/2006/main"/>
+        </p:txBody>
+      </p:sp>
+    </p:spTree>
+  </p:cSld>
+  <p:clrMapOvr>
+    <a:masterClrMapping xmlns:a="http://schemas.openxmlformats.org/drawingml/2006/main"/>
+  </p:clrMapOvr>
+</p:notes>
+</file>
+
+<file path=ppt/notesSlides/notesSlide15.xml><?xml version="1.0" encoding="utf-8"?>
+<p:notes xmlns:p="http://schemas.openxmlformats.org/presentationml/2006/main">
+  <p:cSld>
+    <p:spTree>
+      <p:nvGrpSpPr>
+        <p:cNvPr id="1" name=""/>
+        <p:cNvGrpSpPr/>
+        <p:nvPr/>
+      </p:nvGrpSpPr>
+      <p:grpSpPr>
+        <a:xfrm xmlns:a="http://schemas.openxmlformats.org/drawingml/2006/main"/>
+      </p:grpSpPr>
+      <p:sp>
+        <p:nvSpPr>
+          <p:cNvPr id="2" name="Slide Image Placeholder 1"/>
+          <p:cNvSpPr>
+            <a:spLocks xmlns:a="http://schemas.openxmlformats.org/drawingml/2006/main" noGrp="1"/>
+          </p:cNvSpPr>
+          <p:nvPr>
+            <p:ph type="sldImg" idx="0"/>
+          </p:nvPr>
+        </p:nvSpPr>
+        <p:spPr/>
+      </p:sp>
+      <p:sp>
+        <p:nvSpPr>
+          <p:cNvPr id="3" name="Notes Placeholder 2"/>
+          <p:cNvSpPr>
+            <a:spLocks xmlns:a="http://schemas.openxmlformats.org/drawingml/2006/main" noGrp="1"/>
+          </p:cNvSpPr>
+          <p:nvPr>
+            <p:ph type="body" idx="1"/>
+          </p:nvPr>
+        </p:nvSpPr>
+        <p:spPr/>
+        <p:txBody>
+          <a:bodyPr xmlns:a="http://schemas.openxmlformats.org/drawingml/2006/main"/>
+          <a:lstStyle xmlns:a="http://schemas.openxmlformats.org/drawingml/2006/main"/>
+          <a:p xmlns:a="http://schemas.openxmlformats.org/drawingml/2006/main"/>
+        </p:txBody>
+      </p:sp>
+      <p:sp>
+        <p:nvSpPr>
+          <p:cNvPr id="4" name="Slide Number Placeholder 3"/>
+          <p:cNvSpPr>
+            <a:spLocks xmlns:a="http://schemas.openxmlformats.org/drawingml/2006/main" noGrp="1"/>
+          </p:cNvSpPr>
+          <p:nvPr>
+            <p:ph type="sldNum" idx="5"/>
+          </p:nvPr>
+        </p:nvSpPr>
+        <p:spPr/>
+        <p:txBody>
+          <a:bodyPr xmlns:a="http://schemas.openxmlformats.org/drawingml/2006/main"/>
+          <a:lstStyle xmlns:a="http://schemas.openxmlformats.org/drawingml/2006/main"/>
+          <a:p xmlns:a="http://schemas.openxmlformats.org/drawingml/2006/main"/>
+        </p:txBody>
+      </p:sp>
+    </p:spTree>
+  </p:cSld>
+  <p:clrMapOvr>
+    <a:masterClrMapping xmlns:a="http://schemas.openxmlformats.org/drawingml/2006/main"/>
+  </p:clrMapOvr>
+</p:notes>
+</file>
+
 <file path=ppt/notesSlides/notesSlide2.xml><?xml version="1.0" encoding="utf-8"?>
 <p:notes xmlns:p="http://schemas.openxmlformats.org/presentationml/2006/main">
   <p:cSld>
@@ -872,6 +1275,72 @@
 </file>
 
 <file path=ppt/notesSlides/notesSlide8.xml><?xml version="1.0" encoding="utf-8"?>
+<p:notes xmlns:p="http://schemas.openxmlformats.org/presentationml/2006/main">
+  <p:cSld>
+    <p:spTree>
+      <p:nvGrpSpPr>
+        <p:cNvPr id="1" name=""/>
+        <p:cNvGrpSpPr/>
+        <p:nvPr/>
+      </p:nvGrpSpPr>
+      <p:grpSpPr>
+        <a:xfrm xmlns:a="http://schemas.openxmlformats.org/drawingml/2006/main"/>
+      </p:grpSpPr>
+      <p:sp>
+        <p:nvSpPr>
+          <p:cNvPr id="2" name="Slide Image Placeholder 1"/>
+          <p:cNvSpPr>
+            <a:spLocks xmlns:a="http://schemas.openxmlformats.org/drawingml/2006/main" noGrp="1"/>
+          </p:cNvSpPr>
+          <p:nvPr>
+            <p:ph type="sldImg" idx="0"/>
+          </p:nvPr>
+        </p:nvSpPr>
+        <p:spPr/>
+      </p:sp>
+      <p:sp>
+        <p:nvSpPr>
+          <p:cNvPr id="3" name="Notes Placeholder 2"/>
+          <p:cNvSpPr>
+            <a:spLocks xmlns:a="http://schemas.openxmlformats.org/drawingml/2006/main" noGrp="1"/>
+          </p:cNvSpPr>
+          <p:nvPr>
+            <p:ph type="body" idx="1"/>
+          </p:nvPr>
+        </p:nvSpPr>
+        <p:spPr/>
+        <p:txBody>
+          <a:bodyPr xmlns:a="http://schemas.openxmlformats.org/drawingml/2006/main"/>
+          <a:lstStyle xmlns:a="http://schemas.openxmlformats.org/drawingml/2006/main"/>
+          <a:p xmlns:a="http://schemas.openxmlformats.org/drawingml/2006/main"/>
+        </p:txBody>
+      </p:sp>
+      <p:sp>
+        <p:nvSpPr>
+          <p:cNvPr id="4" name="Slide Number Placeholder 3"/>
+          <p:cNvSpPr>
+            <a:spLocks xmlns:a="http://schemas.openxmlformats.org/drawingml/2006/main" noGrp="1"/>
+          </p:cNvSpPr>
+          <p:nvPr>
+            <p:ph type="sldNum" idx="5"/>
+          </p:nvPr>
+        </p:nvSpPr>
+        <p:spPr/>
+        <p:txBody>
+          <a:bodyPr xmlns:a="http://schemas.openxmlformats.org/drawingml/2006/main"/>
+          <a:lstStyle xmlns:a="http://schemas.openxmlformats.org/drawingml/2006/main"/>
+          <a:p xmlns:a="http://schemas.openxmlformats.org/drawingml/2006/main"/>
+        </p:txBody>
+      </p:sp>
+    </p:spTree>
+  </p:cSld>
+  <p:clrMapOvr>
+    <a:masterClrMapping xmlns:a="http://schemas.openxmlformats.org/drawingml/2006/main"/>
+  </p:clrMapOvr>
+</p:notes>
+</file>
+
+<file path=ppt/notesSlides/notesSlide9.xml><?xml version="1.0" encoding="utf-8"?>
 <p:notes xmlns:p="http://schemas.openxmlformats.org/presentationml/2006/main">
   <p:cSld>
     <p:spTree>
@@ -975,7 +1444,7 @@
   </p:cSld>
   <p:clrMap bg1="lt1" tx1="dk1" bg2="lt2" tx2="dk2" accent1="accent1" accent2="accent2" accent3="accent3" accent4="accent4" accent5="accent5" accent6="accent6" hlink="hlink" folHlink="folHlink"/>
   <p:sldLayoutIdLst>
-    <p:sldLayoutId xmlns:r="http://schemas.openxmlformats.org/officeDocument/2006/relationships" id="2147483649" r:id="Ra5326095f5f049ce"/>
+    <p:sldLayoutId xmlns:r="http://schemas.openxmlformats.org/officeDocument/2006/relationships" id="2147483649" r:id="Rcbde2c41bc4645cd"/>
   </p:sldLayoutIdLst>
   <p:txStyles>
     <p:titleStyle>
@@ -1526,7 +1995,7 @@
           <p:cNvPr id="9" name="">
             <a:extLst xmlns:a="http://schemas.openxmlformats.org/drawingml/2006/main">
               <a:ext uri="{FF2B5EF4-FFF2-40B4-BE49-F238E27FC236}">
-                <a16:creationId xmlns:a16="http://schemas.microsoft.com/office/drawing/2014/main" id="{BC7D44A2-C69C-40CE-A171-C9B6D83D6B6E}"/>
+                <a16:creationId xmlns:a16="http://schemas.microsoft.com/office/drawing/2014/main" id="{1CBDBD98-FEF4-4215-B079-C77111FB5CFE}"/>
               </a:ext>
             </a:extLst>
           </p:cNvPr>
@@ -1557,7 +2026,7 @@
           <p:cNvPr id="2" name="">
             <a:extLst xmlns:a="http://schemas.openxmlformats.org/drawingml/2006/main">
               <a:ext uri="{FF2B5EF4-FFF2-40B4-BE49-F238E27FC236}">
-                <a16:creationId xmlns:a16="http://schemas.microsoft.com/office/drawing/2014/main" id="{759E1935-7ED4-4C2C-B64F-7915938219BB}"/>
+                <a16:creationId xmlns:a16="http://schemas.microsoft.com/office/drawing/2014/main" id="{469EFCC6-DE95-4F2A-AC17-803D3CA62CCE}"/>
               </a:ext>
             </a:extLst>
           </p:cNvPr>
@@ -1607,7 +2076,7 @@
           <p:cNvPr id="3" name="">
             <a:extLst xmlns:a="http://schemas.openxmlformats.org/drawingml/2006/main">
               <a:ext uri="{FF2B5EF4-FFF2-40B4-BE49-F238E27FC236}">
-                <a16:creationId xmlns:a16="http://schemas.microsoft.com/office/drawing/2014/main" id="{11AD6BA0-F6D5-4C4E-8CCB-22CC008BA1D0}"/>
+                <a16:creationId xmlns:a16="http://schemas.microsoft.com/office/drawing/2014/main" id="{87B7D896-E332-4B69-ACAE-967A9E5ACE60}"/>
               </a:ext>
             </a:extLst>
           </p:cNvPr>
@@ -1657,7 +2126,7 @@
           <p:cNvPr id="4" name="">
             <a:extLst xmlns:a="http://schemas.openxmlformats.org/drawingml/2006/main">
               <a:ext uri="{FF2B5EF4-FFF2-40B4-BE49-F238E27FC236}">
-                <a16:creationId xmlns:a16="http://schemas.microsoft.com/office/drawing/2014/main" id="{4556BB54-C01C-4C87-9187-192B7198C94F}"/>
+                <a16:creationId xmlns:a16="http://schemas.microsoft.com/office/drawing/2014/main" id="{E318ACCB-B659-4438-88A6-494C69DC1590}"/>
               </a:ext>
             </a:extLst>
           </p:cNvPr>
@@ -1707,7 +2176,7 @@
           <p:cNvPr id="5" name="">
             <a:extLst xmlns:a="http://schemas.openxmlformats.org/drawingml/2006/main">
               <a:ext uri="{FF2B5EF4-FFF2-40B4-BE49-F238E27FC236}">
-                <a16:creationId xmlns:a16="http://schemas.microsoft.com/office/drawing/2014/main" id="{61FF0B50-E3AD-4B44-A5DE-FF219D70CFEC}"/>
+                <a16:creationId xmlns:a16="http://schemas.microsoft.com/office/drawing/2014/main" id="{ACDD8BCF-22E9-4999-AB35-44BC41F306E6}"/>
               </a:ext>
             </a:extLst>
           </p:cNvPr>
@@ -1740,7 +2209,7 @@
           <p:cNvPr id="6" name="">
             <a:extLst xmlns:a="http://schemas.openxmlformats.org/drawingml/2006/main">
               <a:ext uri="{FF2B5EF4-FFF2-40B4-BE49-F238E27FC236}">
-                <a16:creationId xmlns:a16="http://schemas.microsoft.com/office/drawing/2014/main" id="{045D3964-839F-4E36-9B73-B95524201030}"/>
+                <a16:creationId xmlns:a16="http://schemas.microsoft.com/office/drawing/2014/main" id="{8EC3713D-B74A-4FAA-8531-2D9499D86054}"/>
               </a:ext>
             </a:extLst>
           </p:cNvPr>
@@ -1794,7 +2263,7 @@
           <p:nvPr/>
         </p:nvPicPr>
         <p:blipFill>
-          <a:blip xmlns:r="http://schemas.openxmlformats.org/officeDocument/2006/relationships" xmlns:a="http://schemas.openxmlformats.org/drawingml/2006/main" r:embed="R62bcbdb2d2864a3a"/>
+          <a:blip xmlns:r="http://schemas.openxmlformats.org/officeDocument/2006/relationships" xmlns:a="http://schemas.openxmlformats.org/drawingml/2006/main" r:embed="R9f900d093e284170"/>
           <a:srcRect xmlns:a="http://schemas.openxmlformats.org/drawingml/2006/main" l="17949" t="0" r="17949" b="0"/>
           <a:stretch xmlns:a="http://schemas.openxmlformats.org/drawingml/2006/main">
             <a:fillRect l="0" t="0" r="0" b="0"/>
@@ -1817,7 +2286,7 @@
           <p:cNvPr id="8" name="">
             <a:extLst xmlns:a="http://schemas.openxmlformats.org/drawingml/2006/main">
               <a:ext uri="{FF2B5EF4-FFF2-40B4-BE49-F238E27FC236}">
-                <a16:creationId xmlns:a16="http://schemas.microsoft.com/office/drawing/2014/main" id="{B3B37F17-052A-4E28-B048-D0DE5F3348C0}"/>
+                <a16:creationId xmlns:a16="http://schemas.microsoft.com/office/drawing/2014/main" id="{CA3497B8-2899-421B-9804-1DDC84B7A95B}"/>
               </a:ext>
             </a:extLst>
           </p:cNvPr>
@@ -1865,7 +2334,3130 @@
     </p:spTree>
     <p:extLst>
       <p:ext uri="{BB962C8B-B14F-4D97-AF65-F5344CB8AC3E}">
-        <p14:creationId xmlns:p14="http://schemas.microsoft.com/office/powerpoint/2010/main" val="2098531502"/>
+        <p14:creationId xmlns:p14="http://schemas.microsoft.com/office/powerpoint/2010/main" val="1487948426"/>
+      </p:ext>
+    </p:extLst>
+  </p:cSld>
+</p:sld>
+</file>
+
+<file path=ppt/slides/slide10.xml><?xml version="1.0" encoding="utf-8"?>
+<p:sld xmlns:p="http://schemas.openxmlformats.org/presentationml/2006/main">
+  <p:cSld>
+    <p:bg>
+      <p:bgPr>
+        <a:solidFill xmlns:a="http://schemas.openxmlformats.org/drawingml/2006/main">
+          <a:srgbClr val="FFFCF8"/>
+        </a:solidFill>
+      </p:bgPr>
+    </p:bg>
+    <p:spTree>
+      <p:nvGrpSpPr>
+        <p:cNvPr id="1" name=""/>
+        <p:cNvGrpSpPr/>
+        <p:nvPr/>
+      </p:nvGrpSpPr>
+      <p:grpSpPr>
+        <a:xfrm xmlns:a="http://schemas.openxmlformats.org/drawingml/2006/main"/>
+      </p:grpSpPr>
+      <p:sp>
+        <p:nvSpPr>
+          <p:cNvPr id="16" name="">
+            <a:extLst xmlns:a="http://schemas.openxmlformats.org/drawingml/2006/main">
+              <a:ext uri="{FF2B5EF4-FFF2-40B4-BE49-F238E27FC236}">
+                <a16:creationId xmlns:a16="http://schemas.microsoft.com/office/drawing/2014/main" id="{213EA65E-F45B-4036-9C49-04CEA3DCC44C}"/>
+              </a:ext>
+            </a:extLst>
+          </p:cNvPr>
+          <p:cNvSpPr>
+            <a:spLocks xmlns:a="http://schemas.openxmlformats.org/drawingml/2006/main" noGrp="1"/>
+          </p:cNvSpPr>
+          <p:nvPr/>
+        </p:nvSpPr>
+        <p:spPr>
+          <a:xfrm xmlns:a="http://schemas.openxmlformats.org/drawingml/2006/main">
+            <a:off x="0" y="0"/>
+            <a:ext cx="171450" cy="6858000"/>
+          </a:xfrm>
+          <a:prstGeom xmlns:a="http://schemas.openxmlformats.org/drawingml/2006/main" prst="rect">
+            <a:avLst/>
+          </a:prstGeom>
+          <a:solidFill xmlns:a="http://schemas.openxmlformats.org/drawingml/2006/main">
+            <a:srgbClr val="6657E8"/>
+          </a:solidFill>
+          <a:ln xmlns:a="http://schemas.openxmlformats.org/drawingml/2006/main" w="0">
+            <a:noFill/>
+            <a:prstDash val="solid"/>
+          </a:ln>
+        </p:spPr>
+      </p:sp>
+      <p:sp>
+        <p:nvSpPr>
+          <p:cNvPr id="2" name="">
+            <a:extLst xmlns:a="http://schemas.openxmlformats.org/drawingml/2006/main">
+              <a:ext uri="{FF2B5EF4-FFF2-40B4-BE49-F238E27FC236}">
+                <a16:creationId xmlns:a16="http://schemas.microsoft.com/office/drawing/2014/main" id="{E18A374C-07DC-41C2-A46D-208087ADA577}"/>
+              </a:ext>
+            </a:extLst>
+          </p:cNvPr>
+          <p:cNvSpPr>
+            <a:spLocks xmlns:a="http://schemas.openxmlformats.org/drawingml/2006/main" noGrp="1"/>
+          </p:cNvSpPr>
+          <p:nvPr/>
+        </p:nvSpPr>
+        <p:spPr>
+          <a:xfrm xmlns:a="http://schemas.openxmlformats.org/drawingml/2006/main">
+            <a:off x="647700" y="457200"/>
+            <a:ext cx="10096500" cy="552450"/>
+          </a:xfrm>
+          <a:prstGeom xmlns:a="http://schemas.openxmlformats.org/drawingml/2006/main" prst="rect">
+            <a:avLst/>
+          </a:prstGeom>
+          <a:noFill xmlns:a="http://schemas.openxmlformats.org/drawingml/2006/main"/>
+          <a:ln xmlns:a="http://schemas.openxmlformats.org/drawingml/2006/main" w="0">
+            <a:noFill/>
+            <a:prstDash val="solid"/>
+          </a:ln>
+        </p:spPr>
+        <p:txBody>
+          <a:bodyPr xmlns:a="http://schemas.openxmlformats.org/drawingml/2006/main"/>
+          <a:lstStyle xmlns:a="http://schemas.openxmlformats.org/drawingml/2006/main"/>
+          <a:p xmlns:a="http://schemas.openxmlformats.org/drawingml/2006/main">
+            <a:pPr>
+              <a:defRPr sz="2700" b="1">
+                <a:solidFill>
+                  <a:srgbClr val="182235"/>
+                </a:solidFill>
+              </a:defRPr>
+            </a:pPr>
+            <a:r>
+              <a:rPr sz="2700" b="1">
+                <a:solidFill>
+                  <a:srgbClr val="182235"/>
+                </a:solidFill>
+              </a:rPr>
+              <a:t>준비가 끝나면 실습이 훨씬 편해집니다</a:t>
+            </a:r>
+          </a:p>
+        </p:txBody>
+      </p:sp>
+      <p:sp>
+        <p:nvSpPr>
+          <p:cNvPr id="3" name="">
+            <a:extLst xmlns:a="http://schemas.openxmlformats.org/drawingml/2006/main">
+              <a:ext uri="{FF2B5EF4-FFF2-40B4-BE49-F238E27FC236}">
+                <a16:creationId xmlns:a16="http://schemas.microsoft.com/office/drawing/2014/main" id="{135607D7-D0BB-4873-8DEE-777371E6E0C3}"/>
+              </a:ext>
+            </a:extLst>
+          </p:cNvPr>
+          <p:cNvSpPr>
+            <a:spLocks xmlns:a="http://schemas.openxmlformats.org/drawingml/2006/main" noGrp="1"/>
+          </p:cNvSpPr>
+          <p:nvPr/>
+        </p:nvSpPr>
+        <p:spPr>
+          <a:xfrm xmlns:a="http://schemas.openxmlformats.org/drawingml/2006/main">
+            <a:off x="666750" y="6419850"/>
+            <a:ext cx="10096500" cy="209550"/>
+          </a:xfrm>
+          <a:prstGeom xmlns:a="http://schemas.openxmlformats.org/drawingml/2006/main" prst="rect">
+            <a:avLst/>
+          </a:prstGeom>
+          <a:noFill xmlns:a="http://schemas.openxmlformats.org/drawingml/2006/main"/>
+          <a:ln xmlns:a="http://schemas.openxmlformats.org/drawingml/2006/main" w="0">
+            <a:noFill/>
+            <a:prstDash val="solid"/>
+          </a:ln>
+        </p:spPr>
+        <p:txBody>
+          <a:bodyPr xmlns:a="http://schemas.openxmlformats.org/drawingml/2006/main"/>
+          <a:lstStyle xmlns:a="http://schemas.openxmlformats.org/drawingml/2006/main"/>
+          <a:p xmlns:a="http://schemas.openxmlformats.org/drawingml/2006/main">
+            <a:pPr>
+              <a:defRPr sz="975">
+                <a:solidFill>
+                  <a:srgbClr val="657083"/>
+                </a:solidFill>
+              </a:defRPr>
+            </a:pPr>
+            <a:r>
+              <a:rPr sz="975">
+                <a:solidFill>
+                  <a:srgbClr val="657083"/>
+                </a:solidFill>
+              </a:rPr>
+              <a:t>EDU 웹개발 교육 플랫폼  ·  10</a:t>
+            </a:r>
+          </a:p>
+        </p:txBody>
+      </p:sp>
+      <p:sp>
+        <p:nvSpPr>
+          <p:cNvPr id="4" name="">
+            <a:extLst xmlns:a="http://schemas.openxmlformats.org/drawingml/2006/main">
+              <a:ext uri="{FF2B5EF4-FFF2-40B4-BE49-F238E27FC236}">
+                <a16:creationId xmlns:a16="http://schemas.microsoft.com/office/drawing/2014/main" id="{D2A360DC-3EE2-4EA1-AC25-926132DE7821}"/>
+              </a:ext>
+            </a:extLst>
+          </p:cNvPr>
+          <p:cNvSpPr>
+            <a:spLocks xmlns:a="http://schemas.openxmlformats.org/drawingml/2006/main" noGrp="1"/>
+          </p:cNvSpPr>
+          <p:nvPr/>
+        </p:nvSpPr>
+        <p:spPr>
+          <a:xfrm xmlns:a="http://schemas.openxmlformats.org/drawingml/2006/main">
+            <a:off x="742950" y="1428750"/>
+            <a:ext cx="514350" cy="514350"/>
+          </a:xfrm>
+          <a:prstGeom xmlns:a="http://schemas.openxmlformats.org/drawingml/2006/main" prst="roundRect">
+            <a:avLst>
+              <a:gd name="adj" fmla="val 22222"/>
+            </a:avLst>
+          </a:prstGeom>
+          <a:solidFill xmlns:a="http://schemas.openxmlformats.org/drawingml/2006/main">
+            <a:srgbClr val="EEEAFE"/>
+          </a:solidFill>
+          <a:ln xmlns:a="http://schemas.openxmlformats.org/drawingml/2006/main" w="0">
+            <a:noFill/>
+            <a:prstDash val="solid"/>
+          </a:ln>
+        </p:spPr>
+      </p:sp>
+      <p:sp>
+        <p:nvSpPr>
+          <p:cNvPr id="5" name="">
+            <a:extLst xmlns:a="http://schemas.openxmlformats.org/drawingml/2006/main">
+              <a:ext uri="{FF2B5EF4-FFF2-40B4-BE49-F238E27FC236}">
+                <a16:creationId xmlns:a16="http://schemas.microsoft.com/office/drawing/2014/main" id="{CB0CFC1B-5F75-4C0B-8DB3-965A399CD126}"/>
+              </a:ext>
+            </a:extLst>
+          </p:cNvPr>
+          <p:cNvSpPr>
+            <a:spLocks xmlns:a="http://schemas.openxmlformats.org/drawingml/2006/main" noGrp="1"/>
+          </p:cNvSpPr>
+          <p:nvPr/>
+        </p:nvSpPr>
+        <p:spPr>
+          <a:xfrm xmlns:a="http://schemas.openxmlformats.org/drawingml/2006/main">
+            <a:off x="742950" y="1524000"/>
+            <a:ext cx="514350" cy="304800"/>
+          </a:xfrm>
+          <a:prstGeom xmlns:a="http://schemas.openxmlformats.org/drawingml/2006/main" prst="rect">
+            <a:avLst/>
+          </a:prstGeom>
+          <a:noFill xmlns:a="http://schemas.openxmlformats.org/drawingml/2006/main"/>
+          <a:ln xmlns:a="http://schemas.openxmlformats.org/drawingml/2006/main" w="0">
+            <a:noFill/>
+            <a:prstDash val="solid"/>
+          </a:ln>
+        </p:spPr>
+        <p:txBody>
+          <a:bodyPr xmlns:a="http://schemas.openxmlformats.org/drawingml/2006/main"/>
+          <a:lstStyle xmlns:a="http://schemas.openxmlformats.org/drawingml/2006/main"/>
+          <a:p xmlns:a="http://schemas.openxmlformats.org/drawingml/2006/main">
+            <a:pPr algn="ctr">
+              <a:defRPr sz="1500" b="1">
+                <a:solidFill>
+                  <a:srgbClr val="57C7A5"/>
+                </a:solidFill>
+              </a:defRPr>
+            </a:pPr>
+            <a:r>
+              <a:rPr sz="1500" b="1">
+                <a:solidFill>
+                  <a:srgbClr val="57C7A5"/>
+                </a:solidFill>
+              </a:rPr>
+              <a:t>1</a:t>
+            </a:r>
+          </a:p>
+        </p:txBody>
+      </p:sp>
+      <p:sp>
+        <p:nvSpPr>
+          <p:cNvPr id="6" name="">
+            <a:extLst xmlns:a="http://schemas.openxmlformats.org/drawingml/2006/main">
+              <a:ext uri="{FF2B5EF4-FFF2-40B4-BE49-F238E27FC236}">
+                <a16:creationId xmlns:a16="http://schemas.microsoft.com/office/drawing/2014/main" id="{7C9D1FB4-01DC-41C8-B38E-329307868CB2}"/>
+              </a:ext>
+            </a:extLst>
+          </p:cNvPr>
+          <p:cNvSpPr>
+            <a:spLocks xmlns:a="http://schemas.openxmlformats.org/drawingml/2006/main" noGrp="1"/>
+          </p:cNvSpPr>
+          <p:nvPr/>
+        </p:nvSpPr>
+        <p:spPr>
+          <a:xfrm xmlns:a="http://schemas.openxmlformats.org/drawingml/2006/main">
+            <a:off x="1485900" y="1466850"/>
+            <a:ext cx="9239250" cy="619125"/>
+          </a:xfrm>
+          <a:prstGeom xmlns:a="http://schemas.openxmlformats.org/drawingml/2006/main" prst="rect">
+            <a:avLst/>
+          </a:prstGeom>
+          <a:noFill xmlns:a="http://schemas.openxmlformats.org/drawingml/2006/main"/>
+          <a:ln xmlns:a="http://schemas.openxmlformats.org/drawingml/2006/main" w="0">
+            <a:noFill/>
+            <a:prstDash val="solid"/>
+          </a:ln>
+        </p:spPr>
+        <p:txBody>
+          <a:bodyPr xmlns:a="http://schemas.openxmlformats.org/drawingml/2006/main"/>
+          <a:lstStyle xmlns:a="http://schemas.openxmlformats.org/drawingml/2006/main"/>
+          <a:p xmlns:a="http://schemas.openxmlformats.org/drawingml/2006/main">
+            <a:pPr>
+              <a:defRPr sz="1800">
+                <a:solidFill>
+                  <a:srgbClr val="182235"/>
+                </a:solidFill>
+              </a:defRPr>
+            </a:pPr>
+            <a:r>
+              <a:rPr sz="1800">
+                <a:solidFill>
+                  <a:srgbClr val="182235"/>
+                </a:solidFill>
+              </a:rPr>
+              <a:t>Supabase 프로젝트</a:t>
+            </a:r>
+          </a:p>
+        </p:txBody>
+      </p:sp>
+      <p:sp>
+        <p:nvSpPr>
+          <p:cNvPr id="7" name="">
+            <a:extLst xmlns:a="http://schemas.openxmlformats.org/drawingml/2006/main">
+              <a:ext uri="{FF2B5EF4-FFF2-40B4-BE49-F238E27FC236}">
+                <a16:creationId xmlns:a16="http://schemas.microsoft.com/office/drawing/2014/main" id="{75741CE2-073A-4EF9-87FB-9F49E295889F}"/>
+              </a:ext>
+            </a:extLst>
+          </p:cNvPr>
+          <p:cNvSpPr>
+            <a:spLocks xmlns:a="http://schemas.openxmlformats.org/drawingml/2006/main" noGrp="1"/>
+          </p:cNvSpPr>
+          <p:nvPr/>
+        </p:nvSpPr>
+        <p:spPr>
+          <a:xfrm xmlns:a="http://schemas.openxmlformats.org/drawingml/2006/main">
+            <a:off x="742950" y="2400300"/>
+            <a:ext cx="514350" cy="514350"/>
+          </a:xfrm>
+          <a:prstGeom xmlns:a="http://schemas.openxmlformats.org/drawingml/2006/main" prst="roundRect">
+            <a:avLst>
+              <a:gd name="adj" fmla="val 22222"/>
+            </a:avLst>
+          </a:prstGeom>
+          <a:solidFill xmlns:a="http://schemas.openxmlformats.org/drawingml/2006/main">
+            <a:srgbClr val="EAF8F3"/>
+          </a:solidFill>
+          <a:ln xmlns:a="http://schemas.openxmlformats.org/drawingml/2006/main" w="0">
+            <a:noFill/>
+            <a:prstDash val="solid"/>
+          </a:ln>
+        </p:spPr>
+      </p:sp>
+      <p:sp>
+        <p:nvSpPr>
+          <p:cNvPr id="8" name="">
+            <a:extLst xmlns:a="http://schemas.openxmlformats.org/drawingml/2006/main">
+              <a:ext uri="{FF2B5EF4-FFF2-40B4-BE49-F238E27FC236}">
+                <a16:creationId xmlns:a16="http://schemas.microsoft.com/office/drawing/2014/main" id="{4FC4B867-877A-4F2B-B512-67E34DC26490}"/>
+              </a:ext>
+            </a:extLst>
+          </p:cNvPr>
+          <p:cNvSpPr>
+            <a:spLocks xmlns:a="http://schemas.openxmlformats.org/drawingml/2006/main" noGrp="1"/>
+          </p:cNvSpPr>
+          <p:nvPr/>
+        </p:nvSpPr>
+        <p:spPr>
+          <a:xfrm xmlns:a="http://schemas.openxmlformats.org/drawingml/2006/main">
+            <a:off x="742950" y="2495550"/>
+            <a:ext cx="514350" cy="304800"/>
+          </a:xfrm>
+          <a:prstGeom xmlns:a="http://schemas.openxmlformats.org/drawingml/2006/main" prst="rect">
+            <a:avLst/>
+          </a:prstGeom>
+          <a:noFill xmlns:a="http://schemas.openxmlformats.org/drawingml/2006/main"/>
+          <a:ln xmlns:a="http://schemas.openxmlformats.org/drawingml/2006/main" w="0">
+            <a:noFill/>
+            <a:prstDash val="solid"/>
+          </a:ln>
+        </p:spPr>
+        <p:txBody>
+          <a:bodyPr xmlns:a="http://schemas.openxmlformats.org/drawingml/2006/main"/>
+          <a:lstStyle xmlns:a="http://schemas.openxmlformats.org/drawingml/2006/main"/>
+          <a:p xmlns:a="http://schemas.openxmlformats.org/drawingml/2006/main">
+            <a:pPr algn="ctr">
+              <a:defRPr sz="1500" b="1">
+                <a:solidFill>
+                  <a:srgbClr val="57C7A5"/>
+                </a:solidFill>
+              </a:defRPr>
+            </a:pPr>
+            <a:r>
+              <a:rPr sz="1500" b="1">
+                <a:solidFill>
+                  <a:srgbClr val="57C7A5"/>
+                </a:solidFill>
+              </a:rPr>
+              <a:t>2</a:t>
+            </a:r>
+          </a:p>
+        </p:txBody>
+      </p:sp>
+      <p:sp>
+        <p:nvSpPr>
+          <p:cNvPr id="9" name="">
+            <a:extLst xmlns:a="http://schemas.openxmlformats.org/drawingml/2006/main">
+              <a:ext uri="{FF2B5EF4-FFF2-40B4-BE49-F238E27FC236}">
+                <a16:creationId xmlns:a16="http://schemas.microsoft.com/office/drawing/2014/main" id="{12CD947E-749F-4525-8255-F06778DE43AE}"/>
+              </a:ext>
+            </a:extLst>
+          </p:cNvPr>
+          <p:cNvSpPr>
+            <a:spLocks xmlns:a="http://schemas.openxmlformats.org/drawingml/2006/main" noGrp="1"/>
+          </p:cNvSpPr>
+          <p:nvPr/>
+        </p:nvSpPr>
+        <p:spPr>
+          <a:xfrm xmlns:a="http://schemas.openxmlformats.org/drawingml/2006/main">
+            <a:off x="1485900" y="2438400"/>
+            <a:ext cx="9239250" cy="619125"/>
+          </a:xfrm>
+          <a:prstGeom xmlns:a="http://schemas.openxmlformats.org/drawingml/2006/main" prst="rect">
+            <a:avLst/>
+          </a:prstGeom>
+          <a:noFill xmlns:a="http://schemas.openxmlformats.org/drawingml/2006/main"/>
+          <a:ln xmlns:a="http://schemas.openxmlformats.org/drawingml/2006/main" w="0">
+            <a:noFill/>
+            <a:prstDash val="solid"/>
+          </a:ln>
+        </p:spPr>
+        <p:txBody>
+          <a:bodyPr xmlns:a="http://schemas.openxmlformats.org/drawingml/2006/main"/>
+          <a:lstStyle xmlns:a="http://schemas.openxmlformats.org/drawingml/2006/main"/>
+          <a:p xmlns:a="http://schemas.openxmlformats.org/drawingml/2006/main">
+            <a:pPr>
+              <a:defRPr sz="1800">
+                <a:solidFill>
+                  <a:srgbClr val="182235"/>
+                </a:solidFill>
+              </a:defRPr>
+            </a:pPr>
+            <a:r>
+              <a:rPr sz="1800">
+                <a:solidFill>
+                  <a:srgbClr val="182235"/>
+                </a:solidFill>
+              </a:rPr>
+              <a:t>프로젝트 URL과 publishable key</a:t>
+            </a:r>
+          </a:p>
+        </p:txBody>
+      </p:sp>
+      <p:sp>
+        <p:nvSpPr>
+          <p:cNvPr id="10" name="">
+            <a:extLst xmlns:a="http://schemas.openxmlformats.org/drawingml/2006/main">
+              <a:ext uri="{FF2B5EF4-FFF2-40B4-BE49-F238E27FC236}">
+                <a16:creationId xmlns:a16="http://schemas.microsoft.com/office/drawing/2014/main" id="{B5DDE538-4004-4E59-91A4-1D27B711DAAD}"/>
+              </a:ext>
+            </a:extLst>
+          </p:cNvPr>
+          <p:cNvSpPr>
+            <a:spLocks xmlns:a="http://schemas.openxmlformats.org/drawingml/2006/main" noGrp="1"/>
+          </p:cNvSpPr>
+          <p:nvPr/>
+        </p:nvSpPr>
+        <p:spPr>
+          <a:xfrm xmlns:a="http://schemas.openxmlformats.org/drawingml/2006/main">
+            <a:off x="742950" y="3371850"/>
+            <a:ext cx="514350" cy="514350"/>
+          </a:xfrm>
+          <a:prstGeom xmlns:a="http://schemas.openxmlformats.org/drawingml/2006/main" prst="roundRect">
+            <a:avLst>
+              <a:gd name="adj" fmla="val 22222"/>
+            </a:avLst>
+          </a:prstGeom>
+          <a:solidFill xmlns:a="http://schemas.openxmlformats.org/drawingml/2006/main">
+            <a:srgbClr val="EEEAFE"/>
+          </a:solidFill>
+          <a:ln xmlns:a="http://schemas.openxmlformats.org/drawingml/2006/main" w="0">
+            <a:noFill/>
+            <a:prstDash val="solid"/>
+          </a:ln>
+        </p:spPr>
+      </p:sp>
+      <p:sp>
+        <p:nvSpPr>
+          <p:cNvPr id="11" name="">
+            <a:extLst xmlns:a="http://schemas.openxmlformats.org/drawingml/2006/main">
+              <a:ext uri="{FF2B5EF4-FFF2-40B4-BE49-F238E27FC236}">
+                <a16:creationId xmlns:a16="http://schemas.microsoft.com/office/drawing/2014/main" id="{42D50C76-FD8B-40E9-ABD8-1EC4AE0DCAE1}"/>
+              </a:ext>
+            </a:extLst>
+          </p:cNvPr>
+          <p:cNvSpPr>
+            <a:spLocks xmlns:a="http://schemas.openxmlformats.org/drawingml/2006/main" noGrp="1"/>
+          </p:cNvSpPr>
+          <p:nvPr/>
+        </p:nvSpPr>
+        <p:spPr>
+          <a:xfrm xmlns:a="http://schemas.openxmlformats.org/drawingml/2006/main">
+            <a:off x="742950" y="3467100"/>
+            <a:ext cx="514350" cy="304800"/>
+          </a:xfrm>
+          <a:prstGeom xmlns:a="http://schemas.openxmlformats.org/drawingml/2006/main" prst="rect">
+            <a:avLst/>
+          </a:prstGeom>
+          <a:noFill xmlns:a="http://schemas.openxmlformats.org/drawingml/2006/main"/>
+          <a:ln xmlns:a="http://schemas.openxmlformats.org/drawingml/2006/main" w="0">
+            <a:noFill/>
+            <a:prstDash val="solid"/>
+          </a:ln>
+        </p:spPr>
+        <p:txBody>
+          <a:bodyPr xmlns:a="http://schemas.openxmlformats.org/drawingml/2006/main"/>
+          <a:lstStyle xmlns:a="http://schemas.openxmlformats.org/drawingml/2006/main"/>
+          <a:p xmlns:a="http://schemas.openxmlformats.org/drawingml/2006/main">
+            <a:pPr algn="ctr">
+              <a:defRPr sz="1500" b="1">
+                <a:solidFill>
+                  <a:srgbClr val="57C7A5"/>
+                </a:solidFill>
+              </a:defRPr>
+            </a:pPr>
+            <a:r>
+              <a:rPr sz="1500" b="1">
+                <a:solidFill>
+                  <a:srgbClr val="57C7A5"/>
+                </a:solidFill>
+              </a:rPr>
+              <a:t>3</a:t>
+            </a:r>
+          </a:p>
+        </p:txBody>
+      </p:sp>
+      <p:sp>
+        <p:nvSpPr>
+          <p:cNvPr id="12" name="">
+            <a:extLst xmlns:a="http://schemas.openxmlformats.org/drawingml/2006/main">
+              <a:ext uri="{FF2B5EF4-FFF2-40B4-BE49-F238E27FC236}">
+                <a16:creationId xmlns:a16="http://schemas.microsoft.com/office/drawing/2014/main" id="{F8552794-174F-4939-9DC7-63F13AAE5BA1}"/>
+              </a:ext>
+            </a:extLst>
+          </p:cNvPr>
+          <p:cNvSpPr>
+            <a:spLocks xmlns:a="http://schemas.openxmlformats.org/drawingml/2006/main" noGrp="1"/>
+          </p:cNvSpPr>
+          <p:nvPr/>
+        </p:nvSpPr>
+        <p:spPr>
+          <a:xfrm xmlns:a="http://schemas.openxmlformats.org/drawingml/2006/main">
+            <a:off x="1485900" y="3409950"/>
+            <a:ext cx="9239250" cy="619125"/>
+          </a:xfrm>
+          <a:prstGeom xmlns:a="http://schemas.openxmlformats.org/drawingml/2006/main" prst="rect">
+            <a:avLst/>
+          </a:prstGeom>
+          <a:noFill xmlns:a="http://schemas.openxmlformats.org/drawingml/2006/main"/>
+          <a:ln xmlns:a="http://schemas.openxmlformats.org/drawingml/2006/main" w="0">
+            <a:noFill/>
+            <a:prstDash val="solid"/>
+          </a:ln>
+        </p:spPr>
+        <p:txBody>
+          <a:bodyPr xmlns:a="http://schemas.openxmlformats.org/drawingml/2006/main"/>
+          <a:lstStyle xmlns:a="http://schemas.openxmlformats.org/drawingml/2006/main"/>
+          <a:p xmlns:a="http://schemas.openxmlformats.org/drawingml/2006/main">
+            <a:pPr>
+              <a:defRPr sz="1800">
+                <a:solidFill>
+                  <a:srgbClr val="182235"/>
+                </a:solidFill>
+              </a:defRPr>
+            </a:pPr>
+            <a:r>
+              <a:rPr sz="1800">
+                <a:solidFill>
+                  <a:srgbClr val="182235"/>
+                </a:solidFill>
+              </a:rPr>
+              <a:t>edu_lessons 테이블과 RLS</a:t>
+            </a:r>
+          </a:p>
+        </p:txBody>
+      </p:sp>
+      <p:sp>
+        <p:nvSpPr>
+          <p:cNvPr id="13" name="">
+            <a:extLst xmlns:a="http://schemas.openxmlformats.org/drawingml/2006/main">
+              <a:ext uri="{FF2B5EF4-FFF2-40B4-BE49-F238E27FC236}">
+                <a16:creationId xmlns:a16="http://schemas.microsoft.com/office/drawing/2014/main" id="{B858C60E-8D46-4E10-B9DE-26595A906386}"/>
+              </a:ext>
+            </a:extLst>
+          </p:cNvPr>
+          <p:cNvSpPr>
+            <a:spLocks xmlns:a="http://schemas.openxmlformats.org/drawingml/2006/main" noGrp="1"/>
+          </p:cNvSpPr>
+          <p:nvPr/>
+        </p:nvSpPr>
+        <p:spPr>
+          <a:xfrm xmlns:a="http://schemas.openxmlformats.org/drawingml/2006/main">
+            <a:off x="742950" y="4343400"/>
+            <a:ext cx="514350" cy="514350"/>
+          </a:xfrm>
+          <a:prstGeom xmlns:a="http://schemas.openxmlformats.org/drawingml/2006/main" prst="roundRect">
+            <a:avLst>
+              <a:gd name="adj" fmla="val 22222"/>
+            </a:avLst>
+          </a:prstGeom>
+          <a:solidFill xmlns:a="http://schemas.openxmlformats.org/drawingml/2006/main">
+            <a:srgbClr val="EAF8F3"/>
+          </a:solidFill>
+          <a:ln xmlns:a="http://schemas.openxmlformats.org/drawingml/2006/main" w="0">
+            <a:noFill/>
+            <a:prstDash val="solid"/>
+          </a:ln>
+        </p:spPr>
+      </p:sp>
+      <p:sp>
+        <p:nvSpPr>
+          <p:cNvPr id="14" name="">
+            <a:extLst xmlns:a="http://schemas.openxmlformats.org/drawingml/2006/main">
+              <a:ext uri="{FF2B5EF4-FFF2-40B4-BE49-F238E27FC236}">
+                <a16:creationId xmlns:a16="http://schemas.microsoft.com/office/drawing/2014/main" id="{FDCF0650-B8E6-4BCA-811B-B321CAD420D4}"/>
+              </a:ext>
+            </a:extLst>
+          </p:cNvPr>
+          <p:cNvSpPr>
+            <a:spLocks xmlns:a="http://schemas.openxmlformats.org/drawingml/2006/main" noGrp="1"/>
+          </p:cNvSpPr>
+          <p:nvPr/>
+        </p:nvSpPr>
+        <p:spPr>
+          <a:xfrm xmlns:a="http://schemas.openxmlformats.org/drawingml/2006/main">
+            <a:off x="742950" y="4438650"/>
+            <a:ext cx="514350" cy="304800"/>
+          </a:xfrm>
+          <a:prstGeom xmlns:a="http://schemas.openxmlformats.org/drawingml/2006/main" prst="rect">
+            <a:avLst/>
+          </a:prstGeom>
+          <a:noFill xmlns:a="http://schemas.openxmlformats.org/drawingml/2006/main"/>
+          <a:ln xmlns:a="http://schemas.openxmlformats.org/drawingml/2006/main" w="0">
+            <a:noFill/>
+            <a:prstDash val="solid"/>
+          </a:ln>
+        </p:spPr>
+        <p:txBody>
+          <a:bodyPr xmlns:a="http://schemas.openxmlformats.org/drawingml/2006/main"/>
+          <a:lstStyle xmlns:a="http://schemas.openxmlformats.org/drawingml/2006/main"/>
+          <a:p xmlns:a="http://schemas.openxmlformats.org/drawingml/2006/main">
+            <a:pPr algn="ctr">
+              <a:defRPr sz="1500" b="1">
+                <a:solidFill>
+                  <a:srgbClr val="57C7A5"/>
+                </a:solidFill>
+              </a:defRPr>
+            </a:pPr>
+            <a:r>
+              <a:rPr sz="1500" b="1">
+                <a:solidFill>
+                  <a:srgbClr val="57C7A5"/>
+                </a:solidFill>
+              </a:rPr>
+              <a:t>4</a:t>
+            </a:r>
+          </a:p>
+        </p:txBody>
+      </p:sp>
+      <p:sp>
+        <p:nvSpPr>
+          <p:cNvPr id="15" name="">
+            <a:extLst xmlns:a="http://schemas.openxmlformats.org/drawingml/2006/main">
+              <a:ext uri="{FF2B5EF4-FFF2-40B4-BE49-F238E27FC236}">
+                <a16:creationId xmlns:a16="http://schemas.microsoft.com/office/drawing/2014/main" id="{564345D7-AFE1-49FA-A98E-916A96197702}"/>
+              </a:ext>
+            </a:extLst>
+          </p:cNvPr>
+          <p:cNvSpPr>
+            <a:spLocks xmlns:a="http://schemas.openxmlformats.org/drawingml/2006/main" noGrp="1"/>
+          </p:cNvSpPr>
+          <p:nvPr/>
+        </p:nvSpPr>
+        <p:spPr>
+          <a:xfrm xmlns:a="http://schemas.openxmlformats.org/drawingml/2006/main">
+            <a:off x="1485900" y="4381500"/>
+            <a:ext cx="9239250" cy="619125"/>
+          </a:xfrm>
+          <a:prstGeom xmlns:a="http://schemas.openxmlformats.org/drawingml/2006/main" prst="rect">
+            <a:avLst/>
+          </a:prstGeom>
+          <a:noFill xmlns:a="http://schemas.openxmlformats.org/drawingml/2006/main"/>
+          <a:ln xmlns:a="http://schemas.openxmlformats.org/drawingml/2006/main" w="0">
+            <a:noFill/>
+            <a:prstDash val="solid"/>
+          </a:ln>
+        </p:spPr>
+        <p:txBody>
+          <a:bodyPr xmlns:a="http://schemas.openxmlformats.org/drawingml/2006/main"/>
+          <a:lstStyle xmlns:a="http://schemas.openxmlformats.org/drawingml/2006/main"/>
+          <a:p xmlns:a="http://schemas.openxmlformats.org/drawingml/2006/main">
+            <a:pPr>
+              <a:defRPr sz="1800">
+                <a:solidFill>
+                  <a:srgbClr val="182235"/>
+                </a:solidFill>
+              </a:defRPr>
+            </a:pPr>
+            <a:r>
+              <a:rPr sz="1800">
+                <a:solidFill>
+                  <a:srgbClr val="182235"/>
+                </a:solidFill>
+              </a:rPr>
+              <a:t>React 프로젝트</a:t>
+            </a:r>
+          </a:p>
+        </p:txBody>
+      </p:sp>
+    </p:spTree>
+    <p:extLst>
+      <p:ext uri="{BB962C8B-B14F-4D97-AF65-F5344CB8AC3E}">
+        <p14:creationId xmlns:p14="http://schemas.microsoft.com/office/powerpoint/2010/main" val="1793200305"/>
+      </p:ext>
+    </p:extLst>
+  </p:cSld>
+</p:sld>
+</file>
+
+<file path=ppt/slides/slide11.xml><?xml version="1.0" encoding="utf-8"?>
+<p:sld xmlns:p="http://schemas.openxmlformats.org/presentationml/2006/main">
+  <p:cSld>
+    <p:bg>
+      <p:bgPr>
+        <a:solidFill xmlns:a="http://schemas.openxmlformats.org/drawingml/2006/main">
+          <a:srgbClr val="FFFCF8"/>
+        </a:solidFill>
+      </p:bgPr>
+    </p:bg>
+    <p:spTree>
+      <p:nvGrpSpPr>
+        <p:cNvPr id="1" name=""/>
+        <p:cNvGrpSpPr/>
+        <p:nvPr/>
+      </p:nvGrpSpPr>
+      <p:grpSpPr>
+        <a:xfrm xmlns:a="http://schemas.openxmlformats.org/drawingml/2006/main"/>
+      </p:grpSpPr>
+      <p:sp>
+        <p:nvSpPr>
+          <p:cNvPr id="12" name="">
+            <a:extLst xmlns:a="http://schemas.openxmlformats.org/drawingml/2006/main">
+              <a:ext uri="{FF2B5EF4-FFF2-40B4-BE49-F238E27FC236}">
+                <a16:creationId xmlns:a16="http://schemas.microsoft.com/office/drawing/2014/main" id="{3CB616C7-A456-4232-9D9B-C8E107EFAEB1}"/>
+              </a:ext>
+            </a:extLst>
+          </p:cNvPr>
+          <p:cNvSpPr>
+            <a:spLocks xmlns:a="http://schemas.openxmlformats.org/drawingml/2006/main" noGrp="1"/>
+          </p:cNvSpPr>
+          <p:nvPr/>
+        </p:nvSpPr>
+        <p:spPr>
+          <a:xfrm xmlns:a="http://schemas.openxmlformats.org/drawingml/2006/main">
+            <a:off x="0" y="0"/>
+            <a:ext cx="171450" cy="6858000"/>
+          </a:xfrm>
+          <a:prstGeom xmlns:a="http://schemas.openxmlformats.org/drawingml/2006/main" prst="rect">
+            <a:avLst/>
+          </a:prstGeom>
+          <a:solidFill xmlns:a="http://schemas.openxmlformats.org/drawingml/2006/main">
+            <a:srgbClr val="6657E8"/>
+          </a:solidFill>
+          <a:ln xmlns:a="http://schemas.openxmlformats.org/drawingml/2006/main" w="0">
+            <a:noFill/>
+            <a:prstDash val="solid"/>
+          </a:ln>
+        </p:spPr>
+      </p:sp>
+      <p:sp>
+        <p:nvSpPr>
+          <p:cNvPr id="2" name="">
+            <a:extLst xmlns:a="http://schemas.openxmlformats.org/drawingml/2006/main">
+              <a:ext uri="{FF2B5EF4-FFF2-40B4-BE49-F238E27FC236}">
+                <a16:creationId xmlns:a16="http://schemas.microsoft.com/office/drawing/2014/main" id="{C3A37D47-310C-46BB-8B3A-672CA934C14E}"/>
+              </a:ext>
+            </a:extLst>
+          </p:cNvPr>
+          <p:cNvSpPr>
+            <a:spLocks xmlns:a="http://schemas.openxmlformats.org/drawingml/2006/main" noGrp="1"/>
+          </p:cNvSpPr>
+          <p:nvPr/>
+        </p:nvSpPr>
+        <p:spPr>
+          <a:xfrm xmlns:a="http://schemas.openxmlformats.org/drawingml/2006/main">
+            <a:off x="647700" y="457200"/>
+            <a:ext cx="10096500" cy="552450"/>
+          </a:xfrm>
+          <a:prstGeom xmlns:a="http://schemas.openxmlformats.org/drawingml/2006/main" prst="rect">
+            <a:avLst/>
+          </a:prstGeom>
+          <a:noFill xmlns:a="http://schemas.openxmlformats.org/drawingml/2006/main"/>
+          <a:ln xmlns:a="http://schemas.openxmlformats.org/drawingml/2006/main" w="0">
+            <a:noFill/>
+            <a:prstDash val="solid"/>
+          </a:ln>
+        </p:spPr>
+        <p:txBody>
+          <a:bodyPr xmlns:a="http://schemas.openxmlformats.org/drawingml/2006/main"/>
+          <a:lstStyle xmlns:a="http://schemas.openxmlformats.org/drawingml/2006/main"/>
+          <a:p xmlns:a="http://schemas.openxmlformats.org/drawingml/2006/main">
+            <a:pPr>
+              <a:defRPr sz="2700" b="1">
+                <a:solidFill>
+                  <a:srgbClr val="182235"/>
+                </a:solidFill>
+              </a:defRPr>
+            </a:pPr>
+            <a:r>
+              <a:rPr sz="2700" b="1">
+                <a:solidFill>
+                  <a:srgbClr val="182235"/>
+                </a:solidFill>
+              </a:rPr>
+              <a:t>코드의 역할을 하나씩 연결해 보세요</a:t>
+            </a:r>
+          </a:p>
+        </p:txBody>
+      </p:sp>
+      <p:sp>
+        <p:nvSpPr>
+          <p:cNvPr id="3" name="">
+            <a:extLst xmlns:a="http://schemas.openxmlformats.org/drawingml/2006/main">
+              <a:ext uri="{FF2B5EF4-FFF2-40B4-BE49-F238E27FC236}">
+                <a16:creationId xmlns:a16="http://schemas.microsoft.com/office/drawing/2014/main" id="{952B59CA-12EF-4F1F-9DBF-2BF2B4BC9CE9}"/>
+              </a:ext>
+            </a:extLst>
+          </p:cNvPr>
+          <p:cNvSpPr>
+            <a:spLocks xmlns:a="http://schemas.openxmlformats.org/drawingml/2006/main" noGrp="1"/>
+          </p:cNvSpPr>
+          <p:nvPr/>
+        </p:nvSpPr>
+        <p:spPr>
+          <a:xfrm xmlns:a="http://schemas.openxmlformats.org/drawingml/2006/main">
+            <a:off x="666750" y="6419850"/>
+            <a:ext cx="10096500" cy="209550"/>
+          </a:xfrm>
+          <a:prstGeom xmlns:a="http://schemas.openxmlformats.org/drawingml/2006/main" prst="rect">
+            <a:avLst/>
+          </a:prstGeom>
+          <a:noFill xmlns:a="http://schemas.openxmlformats.org/drawingml/2006/main"/>
+          <a:ln xmlns:a="http://schemas.openxmlformats.org/drawingml/2006/main" w="0">
+            <a:noFill/>
+            <a:prstDash val="solid"/>
+          </a:ln>
+        </p:spPr>
+        <p:txBody>
+          <a:bodyPr xmlns:a="http://schemas.openxmlformats.org/drawingml/2006/main"/>
+          <a:lstStyle xmlns:a="http://schemas.openxmlformats.org/drawingml/2006/main"/>
+          <a:p xmlns:a="http://schemas.openxmlformats.org/drawingml/2006/main">
+            <a:pPr>
+              <a:defRPr sz="975">
+                <a:solidFill>
+                  <a:srgbClr val="657083"/>
+                </a:solidFill>
+              </a:defRPr>
+            </a:pPr>
+            <a:r>
+              <a:rPr sz="975">
+                <a:solidFill>
+                  <a:srgbClr val="657083"/>
+                </a:solidFill>
+              </a:rPr>
+              <a:t>EDU 웹개발 교육 플랫폼  ·  11</a:t>
+            </a:r>
+          </a:p>
+        </p:txBody>
+      </p:sp>
+      <p:sp>
+        <p:nvSpPr>
+          <p:cNvPr id="4" name="">
+            <a:extLst xmlns:a="http://schemas.openxmlformats.org/drawingml/2006/main">
+              <a:ext uri="{FF2B5EF4-FFF2-40B4-BE49-F238E27FC236}">
+                <a16:creationId xmlns:a16="http://schemas.microsoft.com/office/drawing/2014/main" id="{A7806815-F9AC-4C8C-8A7D-9C030A194E0F}"/>
+              </a:ext>
+            </a:extLst>
+          </p:cNvPr>
+          <p:cNvSpPr>
+            <a:spLocks xmlns:a="http://schemas.openxmlformats.org/drawingml/2006/main" noGrp="1"/>
+          </p:cNvSpPr>
+          <p:nvPr/>
+        </p:nvSpPr>
+        <p:spPr>
+          <a:xfrm xmlns:a="http://schemas.openxmlformats.org/drawingml/2006/main">
+            <a:off x="857250" y="1428750"/>
+            <a:ext cx="2381250" cy="400050"/>
+          </a:xfrm>
+          <a:prstGeom xmlns:a="http://schemas.openxmlformats.org/drawingml/2006/main" prst="rect">
+            <a:avLst/>
+          </a:prstGeom>
+          <a:noFill xmlns:a="http://schemas.openxmlformats.org/drawingml/2006/main"/>
+          <a:ln xmlns:a="http://schemas.openxmlformats.org/drawingml/2006/main" w="0">
+            <a:noFill/>
+            <a:prstDash val="solid"/>
+          </a:ln>
+        </p:spPr>
+        <p:txBody>
+          <a:bodyPr xmlns:a="http://schemas.openxmlformats.org/drawingml/2006/main"/>
+          <a:lstStyle xmlns:a="http://schemas.openxmlformats.org/drawingml/2006/main"/>
+          <a:p xmlns:a="http://schemas.openxmlformats.org/drawingml/2006/main">
+            <a:pPr>
+              <a:defRPr sz="1725" b="1">
+                <a:solidFill>
+                  <a:srgbClr val="6657E8"/>
+                </a:solidFill>
+              </a:defRPr>
+            </a:pPr>
+            <a:r>
+              <a:rPr sz="1725" b="1">
+                <a:solidFill>
+                  <a:srgbClr val="6657E8"/>
+                </a:solidFill>
+              </a:rPr>
+              <a:t>from</a:t>
+            </a:r>
+          </a:p>
+        </p:txBody>
+      </p:sp>
+      <p:sp>
+        <p:nvSpPr>
+          <p:cNvPr id="5" name="">
+            <a:extLst xmlns:a="http://schemas.openxmlformats.org/drawingml/2006/main">
+              <a:ext uri="{FF2B5EF4-FFF2-40B4-BE49-F238E27FC236}">
+                <a16:creationId xmlns:a16="http://schemas.microsoft.com/office/drawing/2014/main" id="{BA86818D-7C18-44AA-86EA-FF6913B866F9}"/>
+              </a:ext>
+            </a:extLst>
+          </p:cNvPr>
+          <p:cNvSpPr>
+            <a:spLocks xmlns:a="http://schemas.openxmlformats.org/drawingml/2006/main" noGrp="1"/>
+          </p:cNvSpPr>
+          <p:nvPr/>
+        </p:nvSpPr>
+        <p:spPr>
+          <a:xfrm xmlns:a="http://schemas.openxmlformats.org/drawingml/2006/main">
+            <a:off x="3429000" y="1428750"/>
+            <a:ext cx="7429500" cy="666750"/>
+          </a:xfrm>
+          <a:prstGeom xmlns:a="http://schemas.openxmlformats.org/drawingml/2006/main" prst="rect">
+            <a:avLst/>
+          </a:prstGeom>
+          <a:noFill xmlns:a="http://schemas.openxmlformats.org/drawingml/2006/main"/>
+          <a:ln xmlns:a="http://schemas.openxmlformats.org/drawingml/2006/main" w="0">
+            <a:noFill/>
+            <a:prstDash val="solid"/>
+          </a:ln>
+        </p:spPr>
+        <p:txBody>
+          <a:bodyPr xmlns:a="http://schemas.openxmlformats.org/drawingml/2006/main"/>
+          <a:lstStyle xmlns:a="http://schemas.openxmlformats.org/drawingml/2006/main"/>
+          <a:p xmlns:a="http://schemas.openxmlformats.org/drawingml/2006/main">
+            <a:pPr>
+              <a:defRPr sz="1650">
+                <a:solidFill>
+                  <a:srgbClr val="182235"/>
+                </a:solidFill>
+              </a:defRPr>
+            </a:pPr>
+            <a:r>
+              <a:rPr sz="1650">
+                <a:solidFill>
+                  <a:srgbClr val="182235"/>
+                </a:solidFill>
+              </a:rPr>
+              <a:t>작업할 테이블을 선택합니다.</a:t>
+            </a:r>
+          </a:p>
+        </p:txBody>
+      </p:sp>
+      <p:sp>
+        <p:nvSpPr>
+          <p:cNvPr id="6" name="">
+            <a:extLst xmlns:a="http://schemas.openxmlformats.org/drawingml/2006/main">
+              <a:ext uri="{FF2B5EF4-FFF2-40B4-BE49-F238E27FC236}">
+                <a16:creationId xmlns:a16="http://schemas.microsoft.com/office/drawing/2014/main" id="{940B33EF-3380-43B2-911C-AF083C1A16C1}"/>
+              </a:ext>
+            </a:extLst>
+          </p:cNvPr>
+          <p:cNvSpPr>
+            <a:spLocks xmlns:a="http://schemas.openxmlformats.org/drawingml/2006/main" noGrp="1"/>
+          </p:cNvSpPr>
+          <p:nvPr/>
+        </p:nvSpPr>
+        <p:spPr>
+          <a:xfrm xmlns:a="http://schemas.openxmlformats.org/drawingml/2006/main">
+            <a:off x="857250" y="2524125"/>
+            <a:ext cx="2381250" cy="400050"/>
+          </a:xfrm>
+          <a:prstGeom xmlns:a="http://schemas.openxmlformats.org/drawingml/2006/main" prst="rect">
+            <a:avLst/>
+          </a:prstGeom>
+          <a:noFill xmlns:a="http://schemas.openxmlformats.org/drawingml/2006/main"/>
+          <a:ln xmlns:a="http://schemas.openxmlformats.org/drawingml/2006/main" w="0">
+            <a:noFill/>
+            <a:prstDash val="solid"/>
+          </a:ln>
+        </p:spPr>
+        <p:txBody>
+          <a:bodyPr xmlns:a="http://schemas.openxmlformats.org/drawingml/2006/main"/>
+          <a:lstStyle xmlns:a="http://schemas.openxmlformats.org/drawingml/2006/main"/>
+          <a:p xmlns:a="http://schemas.openxmlformats.org/drawingml/2006/main">
+            <a:pPr>
+              <a:defRPr sz="1725" b="1">
+                <a:solidFill>
+                  <a:srgbClr val="6657E8"/>
+                </a:solidFill>
+              </a:defRPr>
+            </a:pPr>
+            <a:r>
+              <a:rPr sz="1725" b="1">
+                <a:solidFill>
+                  <a:srgbClr val="6657E8"/>
+                </a:solidFill>
+              </a:rPr>
+              <a:t>select</a:t>
+            </a:r>
+          </a:p>
+        </p:txBody>
+      </p:sp>
+      <p:sp>
+        <p:nvSpPr>
+          <p:cNvPr id="7" name="">
+            <a:extLst xmlns:a="http://schemas.openxmlformats.org/drawingml/2006/main">
+              <a:ext uri="{FF2B5EF4-FFF2-40B4-BE49-F238E27FC236}">
+                <a16:creationId xmlns:a16="http://schemas.microsoft.com/office/drawing/2014/main" id="{7D4BA279-D2FB-4EE3-B766-9A4461559A1C}"/>
+              </a:ext>
+            </a:extLst>
+          </p:cNvPr>
+          <p:cNvSpPr>
+            <a:spLocks xmlns:a="http://schemas.openxmlformats.org/drawingml/2006/main" noGrp="1"/>
+          </p:cNvSpPr>
+          <p:nvPr/>
+        </p:nvSpPr>
+        <p:spPr>
+          <a:xfrm xmlns:a="http://schemas.openxmlformats.org/drawingml/2006/main">
+            <a:off x="3429000" y="2524125"/>
+            <a:ext cx="7429500" cy="666750"/>
+          </a:xfrm>
+          <a:prstGeom xmlns:a="http://schemas.openxmlformats.org/drawingml/2006/main" prst="rect">
+            <a:avLst/>
+          </a:prstGeom>
+          <a:noFill xmlns:a="http://schemas.openxmlformats.org/drawingml/2006/main"/>
+          <a:ln xmlns:a="http://schemas.openxmlformats.org/drawingml/2006/main" w="0">
+            <a:noFill/>
+            <a:prstDash val="solid"/>
+          </a:ln>
+        </p:spPr>
+        <p:txBody>
+          <a:bodyPr xmlns:a="http://schemas.openxmlformats.org/drawingml/2006/main"/>
+          <a:lstStyle xmlns:a="http://schemas.openxmlformats.org/drawingml/2006/main"/>
+          <a:p xmlns:a="http://schemas.openxmlformats.org/drawingml/2006/main">
+            <a:pPr>
+              <a:defRPr sz="1650">
+                <a:solidFill>
+                  <a:srgbClr val="182235"/>
+                </a:solidFill>
+              </a:defRPr>
+            </a:pPr>
+            <a:r>
+              <a:rPr sz="1650">
+                <a:solidFill>
+                  <a:srgbClr val="182235"/>
+                </a:solidFill>
+              </a:rPr>
+              <a:t>저장된 행을 조회합니다.</a:t>
+            </a:r>
+          </a:p>
+        </p:txBody>
+      </p:sp>
+      <p:sp>
+        <p:nvSpPr>
+          <p:cNvPr id="8" name="">
+            <a:extLst xmlns:a="http://schemas.openxmlformats.org/drawingml/2006/main">
+              <a:ext uri="{FF2B5EF4-FFF2-40B4-BE49-F238E27FC236}">
+                <a16:creationId xmlns:a16="http://schemas.microsoft.com/office/drawing/2014/main" id="{B29CCBDF-8C79-44D8-9DF9-1A7C27E97FD8}"/>
+              </a:ext>
+            </a:extLst>
+          </p:cNvPr>
+          <p:cNvSpPr>
+            <a:spLocks xmlns:a="http://schemas.openxmlformats.org/drawingml/2006/main" noGrp="1"/>
+          </p:cNvSpPr>
+          <p:nvPr/>
+        </p:nvSpPr>
+        <p:spPr>
+          <a:xfrm xmlns:a="http://schemas.openxmlformats.org/drawingml/2006/main">
+            <a:off x="857250" y="3619500"/>
+            <a:ext cx="2381250" cy="400050"/>
+          </a:xfrm>
+          <a:prstGeom xmlns:a="http://schemas.openxmlformats.org/drawingml/2006/main" prst="rect">
+            <a:avLst/>
+          </a:prstGeom>
+          <a:noFill xmlns:a="http://schemas.openxmlformats.org/drawingml/2006/main"/>
+          <a:ln xmlns:a="http://schemas.openxmlformats.org/drawingml/2006/main" w="0">
+            <a:noFill/>
+            <a:prstDash val="solid"/>
+          </a:ln>
+        </p:spPr>
+        <p:txBody>
+          <a:bodyPr xmlns:a="http://schemas.openxmlformats.org/drawingml/2006/main"/>
+          <a:lstStyle xmlns:a="http://schemas.openxmlformats.org/drawingml/2006/main"/>
+          <a:p xmlns:a="http://schemas.openxmlformats.org/drawingml/2006/main">
+            <a:pPr>
+              <a:defRPr sz="1725" b="1">
+                <a:solidFill>
+                  <a:srgbClr val="6657E8"/>
+                </a:solidFill>
+              </a:defRPr>
+            </a:pPr>
+            <a:r>
+              <a:rPr sz="1725" b="1">
+                <a:solidFill>
+                  <a:srgbClr val="6657E8"/>
+                </a:solidFill>
+              </a:rPr>
+              <a:t>insert</a:t>
+            </a:r>
+          </a:p>
+        </p:txBody>
+      </p:sp>
+      <p:sp>
+        <p:nvSpPr>
+          <p:cNvPr id="9" name="">
+            <a:extLst xmlns:a="http://schemas.openxmlformats.org/drawingml/2006/main">
+              <a:ext uri="{FF2B5EF4-FFF2-40B4-BE49-F238E27FC236}">
+                <a16:creationId xmlns:a16="http://schemas.microsoft.com/office/drawing/2014/main" id="{19DAD282-50FA-4A67-819C-8CDFE9C85817}"/>
+              </a:ext>
+            </a:extLst>
+          </p:cNvPr>
+          <p:cNvSpPr>
+            <a:spLocks xmlns:a="http://schemas.openxmlformats.org/drawingml/2006/main" noGrp="1"/>
+          </p:cNvSpPr>
+          <p:nvPr/>
+        </p:nvSpPr>
+        <p:spPr>
+          <a:xfrm xmlns:a="http://schemas.openxmlformats.org/drawingml/2006/main">
+            <a:off x="3429000" y="3619500"/>
+            <a:ext cx="7429500" cy="666750"/>
+          </a:xfrm>
+          <a:prstGeom xmlns:a="http://schemas.openxmlformats.org/drawingml/2006/main" prst="rect">
+            <a:avLst/>
+          </a:prstGeom>
+          <a:noFill xmlns:a="http://schemas.openxmlformats.org/drawingml/2006/main"/>
+          <a:ln xmlns:a="http://schemas.openxmlformats.org/drawingml/2006/main" w="0">
+            <a:noFill/>
+            <a:prstDash val="solid"/>
+          </a:ln>
+        </p:spPr>
+        <p:txBody>
+          <a:bodyPr xmlns:a="http://schemas.openxmlformats.org/drawingml/2006/main"/>
+          <a:lstStyle xmlns:a="http://schemas.openxmlformats.org/drawingml/2006/main"/>
+          <a:p xmlns:a="http://schemas.openxmlformats.org/drawingml/2006/main">
+            <a:pPr>
+              <a:defRPr sz="1650">
+                <a:solidFill>
+                  <a:srgbClr val="182235"/>
+                </a:solidFill>
+              </a:defRPr>
+            </a:pPr>
+            <a:r>
+              <a:rPr sz="1650">
+                <a:solidFill>
+                  <a:srgbClr val="182235"/>
+                </a:solidFill>
+              </a:rPr>
+              <a:t>새 행을 추가합니다.</a:t>
+            </a:r>
+          </a:p>
+        </p:txBody>
+      </p:sp>
+      <p:sp>
+        <p:nvSpPr>
+          <p:cNvPr id="10" name="">
+            <a:extLst xmlns:a="http://schemas.openxmlformats.org/drawingml/2006/main">
+              <a:ext uri="{FF2B5EF4-FFF2-40B4-BE49-F238E27FC236}">
+                <a16:creationId xmlns:a16="http://schemas.microsoft.com/office/drawing/2014/main" id="{2D67337B-ECE8-451D-94D5-734DA311C0F6}"/>
+              </a:ext>
+            </a:extLst>
+          </p:cNvPr>
+          <p:cNvSpPr>
+            <a:spLocks xmlns:a="http://schemas.openxmlformats.org/drawingml/2006/main" noGrp="1"/>
+          </p:cNvSpPr>
+          <p:nvPr/>
+        </p:nvSpPr>
+        <p:spPr>
+          <a:xfrm xmlns:a="http://schemas.openxmlformats.org/drawingml/2006/main">
+            <a:off x="857250" y="4714875"/>
+            <a:ext cx="2381250" cy="400050"/>
+          </a:xfrm>
+          <a:prstGeom xmlns:a="http://schemas.openxmlformats.org/drawingml/2006/main" prst="rect">
+            <a:avLst/>
+          </a:prstGeom>
+          <a:noFill xmlns:a="http://schemas.openxmlformats.org/drawingml/2006/main"/>
+          <a:ln xmlns:a="http://schemas.openxmlformats.org/drawingml/2006/main" w="0">
+            <a:noFill/>
+            <a:prstDash val="solid"/>
+          </a:ln>
+        </p:spPr>
+        <p:txBody>
+          <a:bodyPr xmlns:a="http://schemas.openxmlformats.org/drawingml/2006/main"/>
+          <a:lstStyle xmlns:a="http://schemas.openxmlformats.org/drawingml/2006/main"/>
+          <a:p xmlns:a="http://schemas.openxmlformats.org/drawingml/2006/main">
+            <a:pPr>
+              <a:defRPr sz="1725" b="1">
+                <a:solidFill>
+                  <a:srgbClr val="6657E8"/>
+                </a:solidFill>
+              </a:defRPr>
+            </a:pPr>
+            <a:r>
+              <a:rPr sz="1725" b="1">
+                <a:solidFill>
+                  <a:srgbClr val="6657E8"/>
+                </a:solidFill>
+              </a:rPr>
+              <a:t>error</a:t>
+            </a:r>
+          </a:p>
+        </p:txBody>
+      </p:sp>
+      <p:sp>
+        <p:nvSpPr>
+          <p:cNvPr id="11" name="">
+            <a:extLst xmlns:a="http://schemas.openxmlformats.org/drawingml/2006/main">
+              <a:ext uri="{FF2B5EF4-FFF2-40B4-BE49-F238E27FC236}">
+                <a16:creationId xmlns:a16="http://schemas.microsoft.com/office/drawing/2014/main" id="{783AEFE1-0CE4-4FD5-84CA-83EC2220EFC0}"/>
+              </a:ext>
+            </a:extLst>
+          </p:cNvPr>
+          <p:cNvSpPr>
+            <a:spLocks xmlns:a="http://schemas.openxmlformats.org/drawingml/2006/main" noGrp="1"/>
+          </p:cNvSpPr>
+          <p:nvPr/>
+        </p:nvSpPr>
+        <p:spPr>
+          <a:xfrm xmlns:a="http://schemas.openxmlformats.org/drawingml/2006/main">
+            <a:off x="3429000" y="4714875"/>
+            <a:ext cx="7429500" cy="666750"/>
+          </a:xfrm>
+          <a:prstGeom xmlns:a="http://schemas.openxmlformats.org/drawingml/2006/main" prst="rect">
+            <a:avLst/>
+          </a:prstGeom>
+          <a:noFill xmlns:a="http://schemas.openxmlformats.org/drawingml/2006/main"/>
+          <a:ln xmlns:a="http://schemas.openxmlformats.org/drawingml/2006/main" w="0">
+            <a:noFill/>
+            <a:prstDash val="solid"/>
+          </a:ln>
+        </p:spPr>
+        <p:txBody>
+          <a:bodyPr xmlns:a="http://schemas.openxmlformats.org/drawingml/2006/main"/>
+          <a:lstStyle xmlns:a="http://schemas.openxmlformats.org/drawingml/2006/main"/>
+          <a:p xmlns:a="http://schemas.openxmlformats.org/drawingml/2006/main">
+            <a:pPr>
+              <a:defRPr sz="1650">
+                <a:solidFill>
+                  <a:srgbClr val="182235"/>
+                </a:solidFill>
+              </a:defRPr>
+            </a:pPr>
+            <a:r>
+              <a:rPr sz="1650">
+                <a:solidFill>
+                  <a:srgbClr val="182235"/>
+                </a:solidFill>
+              </a:rPr>
+              <a:t>요청 실패 이유를 담습니다.</a:t>
+            </a:r>
+          </a:p>
+        </p:txBody>
+      </p:sp>
+    </p:spTree>
+    <p:extLst>
+      <p:ext uri="{BB962C8B-B14F-4D97-AF65-F5344CB8AC3E}">
+        <p14:creationId xmlns:p14="http://schemas.microsoft.com/office/powerpoint/2010/main" val="1823699131"/>
+      </p:ext>
+    </p:extLst>
+  </p:cSld>
+</p:sld>
+</file>
+
+<file path=ppt/slides/slide12.xml><?xml version="1.0" encoding="utf-8"?>
+<p:sld xmlns:p="http://schemas.openxmlformats.org/presentationml/2006/main">
+  <p:cSld>
+    <p:bg>
+      <p:bgPr>
+        <a:solidFill xmlns:a="http://schemas.openxmlformats.org/drawingml/2006/main">
+          <a:srgbClr val="FFFCF8"/>
+        </a:solidFill>
+      </p:bgPr>
+    </p:bg>
+    <p:spTree>
+      <p:nvGrpSpPr>
+        <p:cNvPr id="1" name=""/>
+        <p:cNvGrpSpPr/>
+        <p:nvPr/>
+      </p:nvGrpSpPr>
+      <p:grpSpPr>
+        <a:xfrm xmlns:a="http://schemas.openxmlformats.org/drawingml/2006/main"/>
+      </p:grpSpPr>
+      <p:sp>
+        <p:nvSpPr>
+          <p:cNvPr id="13" name="">
+            <a:extLst xmlns:a="http://schemas.openxmlformats.org/drawingml/2006/main">
+              <a:ext uri="{FF2B5EF4-FFF2-40B4-BE49-F238E27FC236}">
+                <a16:creationId xmlns:a16="http://schemas.microsoft.com/office/drawing/2014/main" id="{A03A96FE-B539-4711-A908-752C44CAE9B0}"/>
+              </a:ext>
+            </a:extLst>
+          </p:cNvPr>
+          <p:cNvSpPr>
+            <a:spLocks xmlns:a="http://schemas.openxmlformats.org/drawingml/2006/main" noGrp="1"/>
+          </p:cNvSpPr>
+          <p:nvPr/>
+        </p:nvSpPr>
+        <p:spPr>
+          <a:xfrm xmlns:a="http://schemas.openxmlformats.org/drawingml/2006/main">
+            <a:off x="0" y="0"/>
+            <a:ext cx="171450" cy="6858000"/>
+          </a:xfrm>
+          <a:prstGeom xmlns:a="http://schemas.openxmlformats.org/drawingml/2006/main" prst="rect">
+            <a:avLst/>
+          </a:prstGeom>
+          <a:solidFill xmlns:a="http://schemas.openxmlformats.org/drawingml/2006/main">
+            <a:srgbClr val="6657E8"/>
+          </a:solidFill>
+          <a:ln xmlns:a="http://schemas.openxmlformats.org/drawingml/2006/main" w="0">
+            <a:noFill/>
+            <a:prstDash val="solid"/>
+          </a:ln>
+        </p:spPr>
+      </p:sp>
+      <p:sp>
+        <p:nvSpPr>
+          <p:cNvPr id="2" name="">
+            <a:extLst xmlns:a="http://schemas.openxmlformats.org/drawingml/2006/main">
+              <a:ext uri="{FF2B5EF4-FFF2-40B4-BE49-F238E27FC236}">
+                <a16:creationId xmlns:a16="http://schemas.microsoft.com/office/drawing/2014/main" id="{546995A1-7D6B-4C21-9346-9AEDE971DCBE}"/>
+              </a:ext>
+            </a:extLst>
+          </p:cNvPr>
+          <p:cNvSpPr>
+            <a:spLocks xmlns:a="http://schemas.openxmlformats.org/drawingml/2006/main" noGrp="1"/>
+          </p:cNvSpPr>
+          <p:nvPr/>
+        </p:nvSpPr>
+        <p:spPr>
+          <a:xfrm xmlns:a="http://schemas.openxmlformats.org/drawingml/2006/main">
+            <a:off x="647700" y="457200"/>
+            <a:ext cx="10096500" cy="552450"/>
+          </a:xfrm>
+          <a:prstGeom xmlns:a="http://schemas.openxmlformats.org/drawingml/2006/main" prst="rect">
+            <a:avLst/>
+          </a:prstGeom>
+          <a:noFill xmlns:a="http://schemas.openxmlformats.org/drawingml/2006/main"/>
+          <a:ln xmlns:a="http://schemas.openxmlformats.org/drawingml/2006/main" w="0">
+            <a:noFill/>
+            <a:prstDash val="solid"/>
+          </a:ln>
+        </p:spPr>
+        <p:txBody>
+          <a:bodyPr xmlns:a="http://schemas.openxmlformats.org/drawingml/2006/main"/>
+          <a:lstStyle xmlns:a="http://schemas.openxmlformats.org/drawingml/2006/main"/>
+          <a:p xmlns:a="http://schemas.openxmlformats.org/drawingml/2006/main">
+            <a:pPr>
+              <a:defRPr sz="2700" b="1">
+                <a:solidFill>
+                  <a:srgbClr val="182235"/>
+                </a:solidFill>
+              </a:defRPr>
+            </a:pPr>
+            <a:r>
+              <a:rPr sz="2700" b="1">
+                <a:solidFill>
+                  <a:srgbClr val="182235"/>
+                </a:solidFill>
+              </a:rPr>
+              <a:t>오류는 첫 문장부터 차례로 해결합니다</a:t>
+            </a:r>
+          </a:p>
+        </p:txBody>
+      </p:sp>
+      <p:sp>
+        <p:nvSpPr>
+          <p:cNvPr id="3" name="">
+            <a:extLst xmlns:a="http://schemas.openxmlformats.org/drawingml/2006/main">
+              <a:ext uri="{FF2B5EF4-FFF2-40B4-BE49-F238E27FC236}">
+                <a16:creationId xmlns:a16="http://schemas.microsoft.com/office/drawing/2014/main" id="{05029E8C-C937-4082-AE1E-AFC9A1B59193}"/>
+              </a:ext>
+            </a:extLst>
+          </p:cNvPr>
+          <p:cNvSpPr>
+            <a:spLocks xmlns:a="http://schemas.openxmlformats.org/drawingml/2006/main" noGrp="1"/>
+          </p:cNvSpPr>
+          <p:nvPr/>
+        </p:nvSpPr>
+        <p:spPr>
+          <a:xfrm xmlns:a="http://schemas.openxmlformats.org/drawingml/2006/main">
+            <a:off x="666750" y="6419850"/>
+            <a:ext cx="10096500" cy="209550"/>
+          </a:xfrm>
+          <a:prstGeom xmlns:a="http://schemas.openxmlformats.org/drawingml/2006/main" prst="rect">
+            <a:avLst/>
+          </a:prstGeom>
+          <a:noFill xmlns:a="http://schemas.openxmlformats.org/drawingml/2006/main"/>
+          <a:ln xmlns:a="http://schemas.openxmlformats.org/drawingml/2006/main" w="0">
+            <a:noFill/>
+            <a:prstDash val="solid"/>
+          </a:ln>
+        </p:spPr>
+        <p:txBody>
+          <a:bodyPr xmlns:a="http://schemas.openxmlformats.org/drawingml/2006/main"/>
+          <a:lstStyle xmlns:a="http://schemas.openxmlformats.org/drawingml/2006/main"/>
+          <a:p xmlns:a="http://schemas.openxmlformats.org/drawingml/2006/main">
+            <a:pPr>
+              <a:defRPr sz="975">
+                <a:solidFill>
+                  <a:srgbClr val="657083"/>
+                </a:solidFill>
+              </a:defRPr>
+            </a:pPr>
+            <a:r>
+              <a:rPr sz="975">
+                <a:solidFill>
+                  <a:srgbClr val="657083"/>
+                </a:solidFill>
+              </a:rPr>
+              <a:t>EDU 웹개발 교육 플랫폼  ·  12</a:t>
+            </a:r>
+          </a:p>
+        </p:txBody>
+      </p:sp>
+      <p:sp>
+        <p:nvSpPr>
+          <p:cNvPr id="4" name="">
+            <a:extLst xmlns:a="http://schemas.openxmlformats.org/drawingml/2006/main">
+              <a:ext uri="{FF2B5EF4-FFF2-40B4-BE49-F238E27FC236}">
+                <a16:creationId xmlns:a16="http://schemas.microsoft.com/office/drawing/2014/main" id="{57A934E4-243A-43FB-9FBF-56F4859C4421}"/>
+              </a:ext>
+            </a:extLst>
+          </p:cNvPr>
+          <p:cNvSpPr>
+            <a:spLocks xmlns:a="http://schemas.openxmlformats.org/drawingml/2006/main" noGrp="1"/>
+          </p:cNvSpPr>
+          <p:nvPr/>
+        </p:nvSpPr>
+        <p:spPr>
+          <a:xfrm xmlns:a="http://schemas.openxmlformats.org/drawingml/2006/main">
+            <a:off x="723900" y="1333500"/>
+            <a:ext cx="10744200" cy="1123950"/>
+          </a:xfrm>
+          <a:prstGeom xmlns:a="http://schemas.openxmlformats.org/drawingml/2006/main" prst="roundRect">
+            <a:avLst>
+              <a:gd name="adj" fmla="val 10169"/>
+            </a:avLst>
+          </a:prstGeom>
+          <a:solidFill xmlns:a="http://schemas.openxmlformats.org/drawingml/2006/main">
+            <a:srgbClr val="FFF0ED"/>
+          </a:solidFill>
+          <a:ln xmlns:a="http://schemas.openxmlformats.org/drawingml/2006/main" w="0">
+            <a:noFill/>
+            <a:prstDash val="solid"/>
+          </a:ln>
+        </p:spPr>
+      </p:sp>
+      <p:sp>
+        <p:nvSpPr>
+          <p:cNvPr id="5" name="">
+            <a:extLst xmlns:a="http://schemas.openxmlformats.org/drawingml/2006/main">
+              <a:ext uri="{FF2B5EF4-FFF2-40B4-BE49-F238E27FC236}">
+                <a16:creationId xmlns:a16="http://schemas.microsoft.com/office/drawing/2014/main" id="{198C4A7A-5649-4F31-A47F-3828ABFD9588}"/>
+              </a:ext>
+            </a:extLst>
+          </p:cNvPr>
+          <p:cNvSpPr>
+            <a:spLocks xmlns:a="http://schemas.openxmlformats.org/drawingml/2006/main" noGrp="1"/>
+          </p:cNvSpPr>
+          <p:nvPr/>
+        </p:nvSpPr>
+        <p:spPr>
+          <a:xfrm xmlns:a="http://schemas.openxmlformats.org/drawingml/2006/main">
+            <a:off x="1000125" y="1562100"/>
+            <a:ext cx="2857500" cy="361950"/>
+          </a:xfrm>
+          <a:prstGeom xmlns:a="http://schemas.openxmlformats.org/drawingml/2006/main" prst="rect">
+            <a:avLst/>
+          </a:prstGeom>
+          <a:noFill xmlns:a="http://schemas.openxmlformats.org/drawingml/2006/main"/>
+          <a:ln xmlns:a="http://schemas.openxmlformats.org/drawingml/2006/main" w="0">
+            <a:noFill/>
+            <a:prstDash val="solid"/>
+          </a:ln>
+        </p:spPr>
+        <p:txBody>
+          <a:bodyPr xmlns:a="http://schemas.openxmlformats.org/drawingml/2006/main"/>
+          <a:lstStyle xmlns:a="http://schemas.openxmlformats.org/drawingml/2006/main"/>
+          <a:p xmlns:a="http://schemas.openxmlformats.org/drawingml/2006/main">
+            <a:pPr>
+              <a:defRPr sz="1650" b="1">
+                <a:solidFill>
+                  <a:srgbClr val="A8493B"/>
+                </a:solidFill>
+              </a:defRPr>
+            </a:pPr>
+            <a:r>
+              <a:rPr sz="1650" b="1">
+                <a:solidFill>
+                  <a:srgbClr val="A8493B"/>
+                </a:solidFill>
+              </a:rPr>
+              <a:t>자료가 빈 목록이에요</a:t>
+            </a:r>
+          </a:p>
+        </p:txBody>
+      </p:sp>
+      <p:sp>
+        <p:nvSpPr>
+          <p:cNvPr id="6" name="">
+            <a:extLst xmlns:a="http://schemas.openxmlformats.org/drawingml/2006/main">
+              <a:ext uri="{FF2B5EF4-FFF2-40B4-BE49-F238E27FC236}">
+                <a16:creationId xmlns:a16="http://schemas.microsoft.com/office/drawing/2014/main" id="{D6C756C6-E7C0-49DE-B66E-9BF5D4952CCB}"/>
+              </a:ext>
+            </a:extLst>
+          </p:cNvPr>
+          <p:cNvSpPr>
+            <a:spLocks xmlns:a="http://schemas.openxmlformats.org/drawingml/2006/main" noGrp="1"/>
+          </p:cNvSpPr>
+          <p:nvPr/>
+        </p:nvSpPr>
+        <p:spPr>
+          <a:xfrm xmlns:a="http://schemas.openxmlformats.org/drawingml/2006/main">
+            <a:off x="4000500" y="1495425"/>
+            <a:ext cx="6953250" cy="619125"/>
+          </a:xfrm>
+          <a:prstGeom xmlns:a="http://schemas.openxmlformats.org/drawingml/2006/main" prst="rect">
+            <a:avLst/>
+          </a:prstGeom>
+          <a:noFill xmlns:a="http://schemas.openxmlformats.org/drawingml/2006/main"/>
+          <a:ln xmlns:a="http://schemas.openxmlformats.org/drawingml/2006/main" w="0">
+            <a:noFill/>
+            <a:prstDash val="solid"/>
+          </a:ln>
+        </p:spPr>
+        <p:txBody>
+          <a:bodyPr xmlns:a="http://schemas.openxmlformats.org/drawingml/2006/main"/>
+          <a:lstStyle xmlns:a="http://schemas.openxmlformats.org/drawingml/2006/main"/>
+          <a:p xmlns:a="http://schemas.openxmlformats.org/drawingml/2006/main">
+            <a:pPr>
+              <a:defRPr sz="1575">
+                <a:solidFill>
+                  <a:srgbClr val="182235"/>
+                </a:solidFill>
+              </a:defRPr>
+            </a:pPr>
+            <a:r>
+              <a:rPr sz="1575">
+                <a:solidFill>
+                  <a:srgbClr val="182235"/>
+                </a:solidFill>
+              </a:rPr>
+              <a:t>테이블 이름과 프로젝트 주소를 확인합니다.</a:t>
+            </a:r>
+          </a:p>
+        </p:txBody>
+      </p:sp>
+      <p:sp>
+        <p:nvSpPr>
+          <p:cNvPr id="7" name="">
+            <a:extLst xmlns:a="http://schemas.openxmlformats.org/drawingml/2006/main">
+              <a:ext uri="{FF2B5EF4-FFF2-40B4-BE49-F238E27FC236}">
+                <a16:creationId xmlns:a16="http://schemas.microsoft.com/office/drawing/2014/main" id="{8F179090-AA6E-48E2-B7C6-F094B903B9F7}"/>
+              </a:ext>
+            </a:extLst>
+          </p:cNvPr>
+          <p:cNvSpPr>
+            <a:spLocks xmlns:a="http://schemas.openxmlformats.org/drawingml/2006/main" noGrp="1"/>
+          </p:cNvSpPr>
+          <p:nvPr/>
+        </p:nvSpPr>
+        <p:spPr>
+          <a:xfrm xmlns:a="http://schemas.openxmlformats.org/drawingml/2006/main">
+            <a:off x="723900" y="2762250"/>
+            <a:ext cx="10744200" cy="1123950"/>
+          </a:xfrm>
+          <a:prstGeom xmlns:a="http://schemas.openxmlformats.org/drawingml/2006/main" prst="roundRect">
+            <a:avLst>
+              <a:gd name="adj" fmla="val 10169"/>
+            </a:avLst>
+          </a:prstGeom>
+          <a:solidFill xmlns:a="http://schemas.openxmlformats.org/drawingml/2006/main">
+            <a:srgbClr val="EAF8F3"/>
+          </a:solidFill>
+          <a:ln xmlns:a="http://schemas.openxmlformats.org/drawingml/2006/main" w="0">
+            <a:noFill/>
+            <a:prstDash val="solid"/>
+          </a:ln>
+        </p:spPr>
+      </p:sp>
+      <p:sp>
+        <p:nvSpPr>
+          <p:cNvPr id="8" name="">
+            <a:extLst xmlns:a="http://schemas.openxmlformats.org/drawingml/2006/main">
+              <a:ext uri="{FF2B5EF4-FFF2-40B4-BE49-F238E27FC236}">
+                <a16:creationId xmlns:a16="http://schemas.microsoft.com/office/drawing/2014/main" id="{828820C5-4237-42B6-A278-8D2D94CD8A59}"/>
+              </a:ext>
+            </a:extLst>
+          </p:cNvPr>
+          <p:cNvSpPr>
+            <a:spLocks xmlns:a="http://schemas.openxmlformats.org/drawingml/2006/main" noGrp="1"/>
+          </p:cNvSpPr>
+          <p:nvPr/>
+        </p:nvSpPr>
+        <p:spPr>
+          <a:xfrm xmlns:a="http://schemas.openxmlformats.org/drawingml/2006/main">
+            <a:off x="1000125" y="2990850"/>
+            <a:ext cx="2857500" cy="361950"/>
+          </a:xfrm>
+          <a:prstGeom xmlns:a="http://schemas.openxmlformats.org/drawingml/2006/main" prst="rect">
+            <a:avLst/>
+          </a:prstGeom>
+          <a:noFill xmlns:a="http://schemas.openxmlformats.org/drawingml/2006/main"/>
+          <a:ln xmlns:a="http://schemas.openxmlformats.org/drawingml/2006/main" w="0">
+            <a:noFill/>
+            <a:prstDash val="solid"/>
+          </a:ln>
+        </p:spPr>
+        <p:txBody>
+          <a:bodyPr xmlns:a="http://schemas.openxmlformats.org/drawingml/2006/main"/>
+          <a:lstStyle xmlns:a="http://schemas.openxmlformats.org/drawingml/2006/main"/>
+          <a:p xmlns:a="http://schemas.openxmlformats.org/drawingml/2006/main">
+            <a:pPr>
+              <a:defRPr sz="1650" b="1">
+                <a:solidFill>
+                  <a:srgbClr val="26755F"/>
+                </a:solidFill>
+              </a:defRPr>
+            </a:pPr>
+            <a:r>
+              <a:rPr sz="1650" b="1">
+                <a:solidFill>
+                  <a:srgbClr val="26755F"/>
+                </a:solidFill>
+              </a:rPr>
+              <a:t>RLS 오류가 나요</a:t>
+            </a:r>
+          </a:p>
+        </p:txBody>
+      </p:sp>
+      <p:sp>
+        <p:nvSpPr>
+          <p:cNvPr id="9" name="">
+            <a:extLst xmlns:a="http://schemas.openxmlformats.org/drawingml/2006/main">
+              <a:ext uri="{FF2B5EF4-FFF2-40B4-BE49-F238E27FC236}">
+                <a16:creationId xmlns:a16="http://schemas.microsoft.com/office/drawing/2014/main" id="{00E15D8C-607F-480E-B769-59B9314382C6}"/>
+              </a:ext>
+            </a:extLst>
+          </p:cNvPr>
+          <p:cNvSpPr>
+            <a:spLocks xmlns:a="http://schemas.openxmlformats.org/drawingml/2006/main" noGrp="1"/>
+          </p:cNvSpPr>
+          <p:nvPr/>
+        </p:nvSpPr>
+        <p:spPr>
+          <a:xfrm xmlns:a="http://schemas.openxmlformats.org/drawingml/2006/main">
+            <a:off x="4000500" y="2924175"/>
+            <a:ext cx="6953250" cy="619125"/>
+          </a:xfrm>
+          <a:prstGeom xmlns:a="http://schemas.openxmlformats.org/drawingml/2006/main" prst="rect">
+            <a:avLst/>
+          </a:prstGeom>
+          <a:noFill xmlns:a="http://schemas.openxmlformats.org/drawingml/2006/main"/>
+          <a:ln xmlns:a="http://schemas.openxmlformats.org/drawingml/2006/main" w="0">
+            <a:noFill/>
+            <a:prstDash val="solid"/>
+          </a:ln>
+        </p:spPr>
+        <p:txBody>
+          <a:bodyPr xmlns:a="http://schemas.openxmlformats.org/drawingml/2006/main"/>
+          <a:lstStyle xmlns:a="http://schemas.openxmlformats.org/drawingml/2006/main"/>
+          <a:p xmlns:a="http://schemas.openxmlformats.org/drawingml/2006/main">
+            <a:pPr>
+              <a:defRPr sz="1575">
+                <a:solidFill>
+                  <a:srgbClr val="182235"/>
+                </a:solidFill>
+              </a:defRPr>
+            </a:pPr>
+            <a:r>
+              <a:rPr sz="1575">
+                <a:solidFill>
+                  <a:srgbClr val="182235"/>
+                </a:solidFill>
+              </a:rPr>
+              <a:t>필요한 정책이 있는지 SQL Editor에서 봅니다.</a:t>
+            </a:r>
+          </a:p>
+        </p:txBody>
+      </p:sp>
+      <p:sp>
+        <p:nvSpPr>
+          <p:cNvPr id="10" name="">
+            <a:extLst xmlns:a="http://schemas.openxmlformats.org/drawingml/2006/main">
+              <a:ext uri="{FF2B5EF4-FFF2-40B4-BE49-F238E27FC236}">
+                <a16:creationId xmlns:a16="http://schemas.microsoft.com/office/drawing/2014/main" id="{4354B2AB-9FFF-4F79-8D76-B86CBA492111}"/>
+              </a:ext>
+            </a:extLst>
+          </p:cNvPr>
+          <p:cNvSpPr>
+            <a:spLocks xmlns:a="http://schemas.openxmlformats.org/drawingml/2006/main" noGrp="1"/>
+          </p:cNvSpPr>
+          <p:nvPr/>
+        </p:nvSpPr>
+        <p:spPr>
+          <a:xfrm xmlns:a="http://schemas.openxmlformats.org/drawingml/2006/main">
+            <a:off x="723900" y="4191000"/>
+            <a:ext cx="10744200" cy="1123950"/>
+          </a:xfrm>
+          <a:prstGeom xmlns:a="http://schemas.openxmlformats.org/drawingml/2006/main" prst="roundRect">
+            <a:avLst>
+              <a:gd name="adj" fmla="val 10169"/>
+            </a:avLst>
+          </a:prstGeom>
+          <a:solidFill xmlns:a="http://schemas.openxmlformats.org/drawingml/2006/main">
+            <a:srgbClr val="FFF0ED"/>
+          </a:solidFill>
+          <a:ln xmlns:a="http://schemas.openxmlformats.org/drawingml/2006/main" w="0">
+            <a:noFill/>
+            <a:prstDash val="solid"/>
+          </a:ln>
+        </p:spPr>
+      </p:sp>
+      <p:sp>
+        <p:nvSpPr>
+          <p:cNvPr id="11" name="">
+            <a:extLst xmlns:a="http://schemas.openxmlformats.org/drawingml/2006/main">
+              <a:ext uri="{FF2B5EF4-FFF2-40B4-BE49-F238E27FC236}">
+                <a16:creationId xmlns:a16="http://schemas.microsoft.com/office/drawing/2014/main" id="{B80A5688-4035-467A-8494-A9979320EDD4}"/>
+              </a:ext>
+            </a:extLst>
+          </p:cNvPr>
+          <p:cNvSpPr>
+            <a:spLocks xmlns:a="http://schemas.openxmlformats.org/drawingml/2006/main" noGrp="1"/>
+          </p:cNvSpPr>
+          <p:nvPr/>
+        </p:nvSpPr>
+        <p:spPr>
+          <a:xfrm xmlns:a="http://schemas.openxmlformats.org/drawingml/2006/main">
+            <a:off x="1000125" y="4419600"/>
+            <a:ext cx="2857500" cy="361950"/>
+          </a:xfrm>
+          <a:prstGeom xmlns:a="http://schemas.openxmlformats.org/drawingml/2006/main" prst="rect">
+            <a:avLst/>
+          </a:prstGeom>
+          <a:noFill xmlns:a="http://schemas.openxmlformats.org/drawingml/2006/main"/>
+          <a:ln xmlns:a="http://schemas.openxmlformats.org/drawingml/2006/main" w="0">
+            <a:noFill/>
+            <a:prstDash val="solid"/>
+          </a:ln>
+        </p:spPr>
+        <p:txBody>
+          <a:bodyPr xmlns:a="http://schemas.openxmlformats.org/drawingml/2006/main"/>
+          <a:lstStyle xmlns:a="http://schemas.openxmlformats.org/drawingml/2006/main"/>
+          <a:p xmlns:a="http://schemas.openxmlformats.org/drawingml/2006/main">
+            <a:pPr>
+              <a:defRPr sz="1650" b="1">
+                <a:solidFill>
+                  <a:srgbClr val="A8493B"/>
+                </a:solidFill>
+              </a:defRPr>
+            </a:pPr>
+            <a:r>
+              <a:rPr sz="1650" b="1">
+                <a:solidFill>
+                  <a:srgbClr val="A8493B"/>
+                </a:solidFill>
+              </a:rPr>
+              <a:t>새로고침하면 예전 자료예요</a:t>
+            </a:r>
+          </a:p>
+        </p:txBody>
+      </p:sp>
+      <p:sp>
+        <p:nvSpPr>
+          <p:cNvPr id="12" name="">
+            <a:extLst xmlns:a="http://schemas.openxmlformats.org/drawingml/2006/main">
+              <a:ext uri="{FF2B5EF4-FFF2-40B4-BE49-F238E27FC236}">
+                <a16:creationId xmlns:a16="http://schemas.microsoft.com/office/drawing/2014/main" id="{25B3129F-3F11-4253-9DC4-5C884EC37C0C}"/>
+              </a:ext>
+            </a:extLst>
+          </p:cNvPr>
+          <p:cNvSpPr>
+            <a:spLocks xmlns:a="http://schemas.openxmlformats.org/drawingml/2006/main" noGrp="1"/>
+          </p:cNvSpPr>
+          <p:nvPr/>
+        </p:nvSpPr>
+        <p:spPr>
+          <a:xfrm xmlns:a="http://schemas.openxmlformats.org/drawingml/2006/main">
+            <a:off x="4000500" y="4352925"/>
+            <a:ext cx="6953250" cy="619125"/>
+          </a:xfrm>
+          <a:prstGeom xmlns:a="http://schemas.openxmlformats.org/drawingml/2006/main" prst="rect">
+            <a:avLst/>
+          </a:prstGeom>
+          <a:noFill xmlns:a="http://schemas.openxmlformats.org/drawingml/2006/main"/>
+          <a:ln xmlns:a="http://schemas.openxmlformats.org/drawingml/2006/main" w="0">
+            <a:noFill/>
+            <a:prstDash val="solid"/>
+          </a:ln>
+        </p:spPr>
+        <p:txBody>
+          <a:bodyPr xmlns:a="http://schemas.openxmlformats.org/drawingml/2006/main"/>
+          <a:lstStyle xmlns:a="http://schemas.openxmlformats.org/drawingml/2006/main"/>
+          <a:p xmlns:a="http://schemas.openxmlformats.org/drawingml/2006/main">
+            <a:pPr>
+              <a:defRPr sz="1575">
+                <a:solidFill>
+                  <a:srgbClr val="182235"/>
+                </a:solidFill>
+              </a:defRPr>
+            </a:pPr>
+            <a:r>
+              <a:rPr sz="1575">
+                <a:solidFill>
+                  <a:srgbClr val="182235"/>
+                </a:solidFill>
+              </a:rPr>
+              <a:t>조회 완료 후 상태를 새 데이터로 바꾸는지 확인합니다.</a:t>
+            </a:r>
+          </a:p>
+        </p:txBody>
+      </p:sp>
+    </p:spTree>
+    <p:extLst>
+      <p:ext uri="{BB962C8B-B14F-4D97-AF65-F5344CB8AC3E}">
+        <p14:creationId xmlns:p14="http://schemas.microsoft.com/office/powerpoint/2010/main" val="1026718838"/>
+      </p:ext>
+    </p:extLst>
+  </p:cSld>
+</p:sld>
+</file>
+
+<file path=ppt/slides/slide13.xml><?xml version="1.0" encoding="utf-8"?>
+<p:sld xmlns:p="http://schemas.openxmlformats.org/presentationml/2006/main">
+  <p:cSld>
+    <p:bg>
+      <p:bgPr>
+        <a:solidFill xmlns:a="http://schemas.openxmlformats.org/drawingml/2006/main">
+          <a:srgbClr val="FFFCF8"/>
+        </a:solidFill>
+      </p:bgPr>
+    </p:bg>
+    <p:spTree>
+      <p:nvGrpSpPr>
+        <p:cNvPr id="1" name=""/>
+        <p:cNvGrpSpPr/>
+        <p:nvPr/>
+      </p:nvGrpSpPr>
+      <p:grpSpPr>
+        <a:xfrm xmlns:a="http://schemas.openxmlformats.org/drawingml/2006/main"/>
+      </p:grpSpPr>
+      <p:sp>
+        <p:nvSpPr>
+          <p:cNvPr id="13" name="">
+            <a:extLst xmlns:a="http://schemas.openxmlformats.org/drawingml/2006/main">
+              <a:ext uri="{FF2B5EF4-FFF2-40B4-BE49-F238E27FC236}">
+                <a16:creationId xmlns:a16="http://schemas.microsoft.com/office/drawing/2014/main" id="{762F2057-F3C7-4402-9A04-590DF4DF7810}"/>
+              </a:ext>
+            </a:extLst>
+          </p:cNvPr>
+          <p:cNvSpPr>
+            <a:spLocks xmlns:a="http://schemas.openxmlformats.org/drawingml/2006/main" noGrp="1"/>
+          </p:cNvSpPr>
+          <p:nvPr/>
+        </p:nvSpPr>
+        <p:spPr>
+          <a:xfrm xmlns:a="http://schemas.openxmlformats.org/drawingml/2006/main">
+            <a:off x="0" y="0"/>
+            <a:ext cx="171450" cy="6858000"/>
+          </a:xfrm>
+          <a:prstGeom xmlns:a="http://schemas.openxmlformats.org/drawingml/2006/main" prst="rect">
+            <a:avLst/>
+          </a:prstGeom>
+          <a:solidFill xmlns:a="http://schemas.openxmlformats.org/drawingml/2006/main">
+            <a:srgbClr val="6657E8"/>
+          </a:solidFill>
+          <a:ln xmlns:a="http://schemas.openxmlformats.org/drawingml/2006/main" w="0">
+            <a:noFill/>
+            <a:prstDash val="solid"/>
+          </a:ln>
+        </p:spPr>
+      </p:sp>
+      <p:sp>
+        <p:nvSpPr>
+          <p:cNvPr id="2" name="">
+            <a:extLst xmlns:a="http://schemas.openxmlformats.org/drawingml/2006/main">
+              <a:ext uri="{FF2B5EF4-FFF2-40B4-BE49-F238E27FC236}">
+                <a16:creationId xmlns:a16="http://schemas.microsoft.com/office/drawing/2014/main" id="{2836BBE1-5BE3-4DB6-BB7A-26FAFD12A926}"/>
+              </a:ext>
+            </a:extLst>
+          </p:cNvPr>
+          <p:cNvSpPr>
+            <a:spLocks xmlns:a="http://schemas.openxmlformats.org/drawingml/2006/main" noGrp="1"/>
+          </p:cNvSpPr>
+          <p:nvPr/>
+        </p:nvSpPr>
+        <p:spPr>
+          <a:xfrm xmlns:a="http://schemas.openxmlformats.org/drawingml/2006/main">
+            <a:off x="647700" y="457200"/>
+            <a:ext cx="10096500" cy="552450"/>
+          </a:xfrm>
+          <a:prstGeom xmlns:a="http://schemas.openxmlformats.org/drawingml/2006/main" prst="rect">
+            <a:avLst/>
+          </a:prstGeom>
+          <a:noFill xmlns:a="http://schemas.openxmlformats.org/drawingml/2006/main"/>
+          <a:ln xmlns:a="http://schemas.openxmlformats.org/drawingml/2006/main" w="0">
+            <a:noFill/>
+            <a:prstDash val="solid"/>
+          </a:ln>
+        </p:spPr>
+        <p:txBody>
+          <a:bodyPr xmlns:a="http://schemas.openxmlformats.org/drawingml/2006/main"/>
+          <a:lstStyle xmlns:a="http://schemas.openxmlformats.org/drawingml/2006/main"/>
+          <a:p xmlns:a="http://schemas.openxmlformats.org/drawingml/2006/main">
+            <a:pPr>
+              <a:defRPr sz="2700" b="1">
+                <a:solidFill>
+                  <a:srgbClr val="182235"/>
+                </a:solidFill>
+              </a:defRPr>
+            </a:pPr>
+            <a:r>
+              <a:rPr sz="2700" b="1">
+                <a:solidFill>
+                  <a:srgbClr val="182235"/>
+                </a:solidFill>
+              </a:rPr>
+              <a:t>상황에 맞는 Codex 요청문을 골라 쓰세요</a:t>
+            </a:r>
+          </a:p>
+        </p:txBody>
+      </p:sp>
+      <p:sp>
+        <p:nvSpPr>
+          <p:cNvPr id="3" name="">
+            <a:extLst xmlns:a="http://schemas.openxmlformats.org/drawingml/2006/main">
+              <a:ext uri="{FF2B5EF4-FFF2-40B4-BE49-F238E27FC236}">
+                <a16:creationId xmlns:a16="http://schemas.microsoft.com/office/drawing/2014/main" id="{C257F839-162A-4D72-9860-C124A1A22C54}"/>
+              </a:ext>
+            </a:extLst>
+          </p:cNvPr>
+          <p:cNvSpPr>
+            <a:spLocks xmlns:a="http://schemas.openxmlformats.org/drawingml/2006/main" noGrp="1"/>
+          </p:cNvSpPr>
+          <p:nvPr/>
+        </p:nvSpPr>
+        <p:spPr>
+          <a:xfrm xmlns:a="http://schemas.openxmlformats.org/drawingml/2006/main">
+            <a:off x="666750" y="6419850"/>
+            <a:ext cx="10096500" cy="209550"/>
+          </a:xfrm>
+          <a:prstGeom xmlns:a="http://schemas.openxmlformats.org/drawingml/2006/main" prst="rect">
+            <a:avLst/>
+          </a:prstGeom>
+          <a:noFill xmlns:a="http://schemas.openxmlformats.org/drawingml/2006/main"/>
+          <a:ln xmlns:a="http://schemas.openxmlformats.org/drawingml/2006/main" w="0">
+            <a:noFill/>
+            <a:prstDash val="solid"/>
+          </a:ln>
+        </p:spPr>
+        <p:txBody>
+          <a:bodyPr xmlns:a="http://schemas.openxmlformats.org/drawingml/2006/main"/>
+          <a:lstStyle xmlns:a="http://schemas.openxmlformats.org/drawingml/2006/main"/>
+          <a:p xmlns:a="http://schemas.openxmlformats.org/drawingml/2006/main">
+            <a:pPr>
+              <a:defRPr sz="975">
+                <a:solidFill>
+                  <a:srgbClr val="657083"/>
+                </a:solidFill>
+              </a:defRPr>
+            </a:pPr>
+            <a:r>
+              <a:rPr sz="975">
+                <a:solidFill>
+                  <a:srgbClr val="657083"/>
+                </a:solidFill>
+              </a:rPr>
+              <a:t>EDU 웹개발 교육 플랫폼  ·  13</a:t>
+            </a:r>
+          </a:p>
+        </p:txBody>
+      </p:sp>
+      <p:sp>
+        <p:nvSpPr>
+          <p:cNvPr id="4" name="">
+            <a:extLst xmlns:a="http://schemas.openxmlformats.org/drawingml/2006/main">
+              <a:ext uri="{FF2B5EF4-FFF2-40B4-BE49-F238E27FC236}">
+                <a16:creationId xmlns:a16="http://schemas.microsoft.com/office/drawing/2014/main" id="{F60ED4F7-EA0E-4F76-80EF-FAE1BD31DE49}"/>
+              </a:ext>
+            </a:extLst>
+          </p:cNvPr>
+          <p:cNvSpPr>
+            <a:spLocks xmlns:a="http://schemas.openxmlformats.org/drawingml/2006/main" noGrp="1"/>
+          </p:cNvSpPr>
+          <p:nvPr/>
+        </p:nvSpPr>
+        <p:spPr>
+          <a:xfrm xmlns:a="http://schemas.openxmlformats.org/drawingml/2006/main">
+            <a:off x="742950" y="1381125"/>
+            <a:ext cx="514350" cy="514350"/>
+          </a:xfrm>
+          <a:prstGeom xmlns:a="http://schemas.openxmlformats.org/drawingml/2006/main" prst="roundRect">
+            <a:avLst>
+              <a:gd name="adj" fmla="val 22222"/>
+            </a:avLst>
+          </a:prstGeom>
+          <a:solidFill xmlns:a="http://schemas.openxmlformats.org/drawingml/2006/main">
+            <a:srgbClr val="EEEAFE"/>
+          </a:solidFill>
+          <a:ln xmlns:a="http://schemas.openxmlformats.org/drawingml/2006/main" w="0">
+            <a:noFill/>
+            <a:prstDash val="solid"/>
+          </a:ln>
+        </p:spPr>
+      </p:sp>
+      <p:sp>
+        <p:nvSpPr>
+          <p:cNvPr id="5" name="">
+            <a:extLst xmlns:a="http://schemas.openxmlformats.org/drawingml/2006/main">
+              <a:ext uri="{FF2B5EF4-FFF2-40B4-BE49-F238E27FC236}">
+                <a16:creationId xmlns:a16="http://schemas.microsoft.com/office/drawing/2014/main" id="{4638CC53-510C-4C81-992C-FA4553DFC931}"/>
+              </a:ext>
+            </a:extLst>
+          </p:cNvPr>
+          <p:cNvSpPr>
+            <a:spLocks xmlns:a="http://schemas.openxmlformats.org/drawingml/2006/main" noGrp="1"/>
+          </p:cNvSpPr>
+          <p:nvPr/>
+        </p:nvSpPr>
+        <p:spPr>
+          <a:xfrm xmlns:a="http://schemas.openxmlformats.org/drawingml/2006/main">
+            <a:off x="742950" y="1476375"/>
+            <a:ext cx="514350" cy="304800"/>
+          </a:xfrm>
+          <a:prstGeom xmlns:a="http://schemas.openxmlformats.org/drawingml/2006/main" prst="rect">
+            <a:avLst/>
+          </a:prstGeom>
+          <a:noFill xmlns:a="http://schemas.openxmlformats.org/drawingml/2006/main"/>
+          <a:ln xmlns:a="http://schemas.openxmlformats.org/drawingml/2006/main" w="0">
+            <a:noFill/>
+            <a:prstDash val="solid"/>
+          </a:ln>
+        </p:spPr>
+        <p:txBody>
+          <a:bodyPr xmlns:a="http://schemas.openxmlformats.org/drawingml/2006/main"/>
+          <a:lstStyle xmlns:a="http://schemas.openxmlformats.org/drawingml/2006/main"/>
+          <a:p xmlns:a="http://schemas.openxmlformats.org/drawingml/2006/main">
+            <a:pPr algn="ctr">
+              <a:defRPr sz="1500" b="1">
+                <a:solidFill>
+                  <a:srgbClr val="6657E8"/>
+                </a:solidFill>
+              </a:defRPr>
+            </a:pPr>
+            <a:r>
+              <a:rPr sz="1500" b="1">
+                <a:solidFill>
+                  <a:srgbClr val="6657E8"/>
+                </a:solidFill>
+              </a:rPr>
+              <a:t>1</a:t>
+            </a:r>
+          </a:p>
+        </p:txBody>
+      </p:sp>
+      <p:sp>
+        <p:nvSpPr>
+          <p:cNvPr id="6" name="">
+            <a:extLst xmlns:a="http://schemas.openxmlformats.org/drawingml/2006/main">
+              <a:ext uri="{FF2B5EF4-FFF2-40B4-BE49-F238E27FC236}">
+                <a16:creationId xmlns:a16="http://schemas.microsoft.com/office/drawing/2014/main" id="{4B162CFE-3365-4A97-84BE-7E35AC4496A5}"/>
+              </a:ext>
+            </a:extLst>
+          </p:cNvPr>
+          <p:cNvSpPr>
+            <a:spLocks xmlns:a="http://schemas.openxmlformats.org/drawingml/2006/main" noGrp="1"/>
+          </p:cNvSpPr>
+          <p:nvPr/>
+        </p:nvSpPr>
+        <p:spPr>
+          <a:xfrm xmlns:a="http://schemas.openxmlformats.org/drawingml/2006/main">
+            <a:off x="1485900" y="1419225"/>
+            <a:ext cx="9239250" cy="619125"/>
+          </a:xfrm>
+          <a:prstGeom xmlns:a="http://schemas.openxmlformats.org/drawingml/2006/main" prst="rect">
+            <a:avLst/>
+          </a:prstGeom>
+          <a:noFill xmlns:a="http://schemas.openxmlformats.org/drawingml/2006/main"/>
+          <a:ln xmlns:a="http://schemas.openxmlformats.org/drawingml/2006/main" w="0">
+            <a:noFill/>
+            <a:prstDash val="solid"/>
+          </a:ln>
+        </p:spPr>
+        <p:txBody>
+          <a:bodyPr xmlns:a="http://schemas.openxmlformats.org/drawingml/2006/main"/>
+          <a:lstStyle xmlns:a="http://schemas.openxmlformats.org/drawingml/2006/main"/>
+          <a:p xmlns:a="http://schemas.openxmlformats.org/drawingml/2006/main">
+            <a:pPr>
+              <a:defRPr sz="1800">
+                <a:solidFill>
+                  <a:srgbClr val="182235"/>
+                </a:solidFill>
+              </a:defRPr>
+            </a:pPr>
+            <a:r>
+              <a:rPr sz="1800">
+                <a:solidFill>
+                  <a:srgbClr val="182235"/>
+                </a:solidFill>
+              </a:rPr>
+              <a:t>Supabase 조회 코드를 초보자용으로 한 줄씩 설명해줘.</a:t>
+            </a:r>
+          </a:p>
+        </p:txBody>
+      </p:sp>
+      <p:sp>
+        <p:nvSpPr>
+          <p:cNvPr id="7" name="">
+            <a:extLst xmlns:a="http://schemas.openxmlformats.org/drawingml/2006/main">
+              <a:ext uri="{FF2B5EF4-FFF2-40B4-BE49-F238E27FC236}">
+                <a16:creationId xmlns:a16="http://schemas.microsoft.com/office/drawing/2014/main" id="{691B184E-E4B6-4547-B911-EB09CF6C3B3A}"/>
+              </a:ext>
+            </a:extLst>
+          </p:cNvPr>
+          <p:cNvSpPr>
+            <a:spLocks xmlns:a="http://schemas.openxmlformats.org/drawingml/2006/main" noGrp="1"/>
+          </p:cNvSpPr>
+          <p:nvPr/>
+        </p:nvSpPr>
+        <p:spPr>
+          <a:xfrm xmlns:a="http://schemas.openxmlformats.org/drawingml/2006/main">
+            <a:off x="742950" y="2352675"/>
+            <a:ext cx="514350" cy="514350"/>
+          </a:xfrm>
+          <a:prstGeom xmlns:a="http://schemas.openxmlformats.org/drawingml/2006/main" prst="roundRect">
+            <a:avLst>
+              <a:gd name="adj" fmla="val 22222"/>
+            </a:avLst>
+          </a:prstGeom>
+          <a:solidFill xmlns:a="http://schemas.openxmlformats.org/drawingml/2006/main">
+            <a:srgbClr val="EAF8F3"/>
+          </a:solidFill>
+          <a:ln xmlns:a="http://schemas.openxmlformats.org/drawingml/2006/main" w="0">
+            <a:noFill/>
+            <a:prstDash val="solid"/>
+          </a:ln>
+        </p:spPr>
+      </p:sp>
+      <p:sp>
+        <p:nvSpPr>
+          <p:cNvPr id="8" name="">
+            <a:extLst xmlns:a="http://schemas.openxmlformats.org/drawingml/2006/main">
+              <a:ext uri="{FF2B5EF4-FFF2-40B4-BE49-F238E27FC236}">
+                <a16:creationId xmlns:a16="http://schemas.microsoft.com/office/drawing/2014/main" id="{105D1FDF-D6C8-4562-8813-8E00EF7CC00D}"/>
+              </a:ext>
+            </a:extLst>
+          </p:cNvPr>
+          <p:cNvSpPr>
+            <a:spLocks xmlns:a="http://schemas.openxmlformats.org/drawingml/2006/main" noGrp="1"/>
+          </p:cNvSpPr>
+          <p:nvPr/>
+        </p:nvSpPr>
+        <p:spPr>
+          <a:xfrm xmlns:a="http://schemas.openxmlformats.org/drawingml/2006/main">
+            <a:off x="742950" y="2447925"/>
+            <a:ext cx="514350" cy="304800"/>
+          </a:xfrm>
+          <a:prstGeom xmlns:a="http://schemas.openxmlformats.org/drawingml/2006/main" prst="rect">
+            <a:avLst/>
+          </a:prstGeom>
+          <a:noFill xmlns:a="http://schemas.openxmlformats.org/drawingml/2006/main"/>
+          <a:ln xmlns:a="http://schemas.openxmlformats.org/drawingml/2006/main" w="0">
+            <a:noFill/>
+            <a:prstDash val="solid"/>
+          </a:ln>
+        </p:spPr>
+        <p:txBody>
+          <a:bodyPr xmlns:a="http://schemas.openxmlformats.org/drawingml/2006/main"/>
+          <a:lstStyle xmlns:a="http://schemas.openxmlformats.org/drawingml/2006/main"/>
+          <a:p xmlns:a="http://schemas.openxmlformats.org/drawingml/2006/main">
+            <a:pPr algn="ctr">
+              <a:defRPr sz="1500" b="1">
+                <a:solidFill>
+                  <a:srgbClr val="6657E8"/>
+                </a:solidFill>
+              </a:defRPr>
+            </a:pPr>
+            <a:r>
+              <a:rPr sz="1500" b="1">
+                <a:solidFill>
+                  <a:srgbClr val="6657E8"/>
+                </a:solidFill>
+              </a:rPr>
+              <a:t>2</a:t>
+            </a:r>
+          </a:p>
+        </p:txBody>
+      </p:sp>
+      <p:sp>
+        <p:nvSpPr>
+          <p:cNvPr id="9" name="">
+            <a:extLst xmlns:a="http://schemas.openxmlformats.org/drawingml/2006/main">
+              <a:ext uri="{FF2B5EF4-FFF2-40B4-BE49-F238E27FC236}">
+                <a16:creationId xmlns:a16="http://schemas.microsoft.com/office/drawing/2014/main" id="{C917FC17-259F-4071-B967-532E4CC35F7D}"/>
+              </a:ext>
+            </a:extLst>
+          </p:cNvPr>
+          <p:cNvSpPr>
+            <a:spLocks xmlns:a="http://schemas.openxmlformats.org/drawingml/2006/main" noGrp="1"/>
+          </p:cNvSpPr>
+          <p:nvPr/>
+        </p:nvSpPr>
+        <p:spPr>
+          <a:xfrm xmlns:a="http://schemas.openxmlformats.org/drawingml/2006/main">
+            <a:off x="1485900" y="2390775"/>
+            <a:ext cx="9239250" cy="619125"/>
+          </a:xfrm>
+          <a:prstGeom xmlns:a="http://schemas.openxmlformats.org/drawingml/2006/main" prst="rect">
+            <a:avLst/>
+          </a:prstGeom>
+          <a:noFill xmlns:a="http://schemas.openxmlformats.org/drawingml/2006/main"/>
+          <a:ln xmlns:a="http://schemas.openxmlformats.org/drawingml/2006/main" w="0">
+            <a:noFill/>
+            <a:prstDash val="solid"/>
+          </a:ln>
+        </p:spPr>
+        <p:txBody>
+          <a:bodyPr xmlns:a="http://schemas.openxmlformats.org/drawingml/2006/main"/>
+          <a:lstStyle xmlns:a="http://schemas.openxmlformats.org/drawingml/2006/main"/>
+          <a:p xmlns:a="http://schemas.openxmlformats.org/drawingml/2006/main">
+            <a:pPr>
+              <a:defRPr sz="1800">
+                <a:solidFill>
+                  <a:srgbClr val="182235"/>
+                </a:solidFill>
+              </a:defRPr>
+            </a:pPr>
+            <a:r>
+              <a:rPr sz="1800">
+                <a:solidFill>
+                  <a:srgbClr val="182235"/>
+                </a:solidFill>
+              </a:rPr>
+              <a:t>edu_lessons에서 목록을 읽고 오류를 표시하는 함수를 만들어줘.</a:t>
+            </a:r>
+          </a:p>
+        </p:txBody>
+      </p:sp>
+      <p:sp>
+        <p:nvSpPr>
+          <p:cNvPr id="10" name="">
+            <a:extLst xmlns:a="http://schemas.openxmlformats.org/drawingml/2006/main">
+              <a:ext uri="{FF2B5EF4-FFF2-40B4-BE49-F238E27FC236}">
+                <a16:creationId xmlns:a16="http://schemas.microsoft.com/office/drawing/2014/main" id="{2A8E1A81-9E38-4177-B27A-88CED88DCD6A}"/>
+              </a:ext>
+            </a:extLst>
+          </p:cNvPr>
+          <p:cNvSpPr>
+            <a:spLocks xmlns:a="http://schemas.openxmlformats.org/drawingml/2006/main" noGrp="1"/>
+          </p:cNvSpPr>
+          <p:nvPr/>
+        </p:nvSpPr>
+        <p:spPr>
+          <a:xfrm xmlns:a="http://schemas.openxmlformats.org/drawingml/2006/main">
+            <a:off x="742950" y="3324225"/>
+            <a:ext cx="514350" cy="514350"/>
+          </a:xfrm>
+          <a:prstGeom xmlns:a="http://schemas.openxmlformats.org/drawingml/2006/main" prst="roundRect">
+            <a:avLst>
+              <a:gd name="adj" fmla="val 22222"/>
+            </a:avLst>
+          </a:prstGeom>
+          <a:solidFill xmlns:a="http://schemas.openxmlformats.org/drawingml/2006/main">
+            <a:srgbClr val="EEEAFE"/>
+          </a:solidFill>
+          <a:ln xmlns:a="http://schemas.openxmlformats.org/drawingml/2006/main" w="0">
+            <a:noFill/>
+            <a:prstDash val="solid"/>
+          </a:ln>
+        </p:spPr>
+      </p:sp>
+      <p:sp>
+        <p:nvSpPr>
+          <p:cNvPr id="11" name="">
+            <a:extLst xmlns:a="http://schemas.openxmlformats.org/drawingml/2006/main">
+              <a:ext uri="{FF2B5EF4-FFF2-40B4-BE49-F238E27FC236}">
+                <a16:creationId xmlns:a16="http://schemas.microsoft.com/office/drawing/2014/main" id="{587AF296-A85D-42C6-9D6D-131F55410D8C}"/>
+              </a:ext>
+            </a:extLst>
+          </p:cNvPr>
+          <p:cNvSpPr>
+            <a:spLocks xmlns:a="http://schemas.openxmlformats.org/drawingml/2006/main" noGrp="1"/>
+          </p:cNvSpPr>
+          <p:nvPr/>
+        </p:nvSpPr>
+        <p:spPr>
+          <a:xfrm xmlns:a="http://schemas.openxmlformats.org/drawingml/2006/main">
+            <a:off x="742950" y="3419475"/>
+            <a:ext cx="514350" cy="304800"/>
+          </a:xfrm>
+          <a:prstGeom xmlns:a="http://schemas.openxmlformats.org/drawingml/2006/main" prst="rect">
+            <a:avLst/>
+          </a:prstGeom>
+          <a:noFill xmlns:a="http://schemas.openxmlformats.org/drawingml/2006/main"/>
+          <a:ln xmlns:a="http://schemas.openxmlformats.org/drawingml/2006/main" w="0">
+            <a:noFill/>
+            <a:prstDash val="solid"/>
+          </a:ln>
+        </p:spPr>
+        <p:txBody>
+          <a:bodyPr xmlns:a="http://schemas.openxmlformats.org/drawingml/2006/main"/>
+          <a:lstStyle xmlns:a="http://schemas.openxmlformats.org/drawingml/2006/main"/>
+          <a:p xmlns:a="http://schemas.openxmlformats.org/drawingml/2006/main">
+            <a:pPr algn="ctr">
+              <a:defRPr sz="1500" b="1">
+                <a:solidFill>
+                  <a:srgbClr val="6657E8"/>
+                </a:solidFill>
+              </a:defRPr>
+            </a:pPr>
+            <a:r>
+              <a:rPr sz="1500" b="1">
+                <a:solidFill>
+                  <a:srgbClr val="6657E8"/>
+                </a:solidFill>
+              </a:rPr>
+              <a:t>3</a:t>
+            </a:r>
+          </a:p>
+        </p:txBody>
+      </p:sp>
+      <p:sp>
+        <p:nvSpPr>
+          <p:cNvPr id="12" name="">
+            <a:extLst xmlns:a="http://schemas.openxmlformats.org/drawingml/2006/main">
+              <a:ext uri="{FF2B5EF4-FFF2-40B4-BE49-F238E27FC236}">
+                <a16:creationId xmlns:a16="http://schemas.microsoft.com/office/drawing/2014/main" id="{5157A3F8-57F3-41CA-A286-840DAC155829}"/>
+              </a:ext>
+            </a:extLst>
+          </p:cNvPr>
+          <p:cNvSpPr>
+            <a:spLocks xmlns:a="http://schemas.openxmlformats.org/drawingml/2006/main" noGrp="1"/>
+          </p:cNvSpPr>
+          <p:nvPr/>
+        </p:nvSpPr>
+        <p:spPr>
+          <a:xfrm xmlns:a="http://schemas.openxmlformats.org/drawingml/2006/main">
+            <a:off x="1485900" y="3362325"/>
+            <a:ext cx="9239250" cy="619125"/>
+          </a:xfrm>
+          <a:prstGeom xmlns:a="http://schemas.openxmlformats.org/drawingml/2006/main" prst="rect">
+            <a:avLst/>
+          </a:prstGeom>
+          <a:noFill xmlns:a="http://schemas.openxmlformats.org/drawingml/2006/main"/>
+          <a:ln xmlns:a="http://schemas.openxmlformats.org/drawingml/2006/main" w="0">
+            <a:noFill/>
+            <a:prstDash val="solid"/>
+          </a:ln>
+        </p:spPr>
+        <p:txBody>
+          <a:bodyPr xmlns:a="http://schemas.openxmlformats.org/drawingml/2006/main"/>
+          <a:lstStyle xmlns:a="http://schemas.openxmlformats.org/drawingml/2006/main"/>
+          <a:p xmlns:a="http://schemas.openxmlformats.org/drawingml/2006/main">
+            <a:pPr>
+              <a:defRPr sz="1800">
+                <a:solidFill>
+                  <a:srgbClr val="182235"/>
+                </a:solidFill>
+              </a:defRPr>
+            </a:pPr>
+            <a:r>
+              <a:rPr sz="1800">
+                <a:solidFill>
+                  <a:srgbClr val="182235"/>
+                </a:solidFill>
+              </a:rPr>
+              <a:t>관리자만 insert할 수 있는 RLS인지 점검 순서를 알려줘.</a:t>
+            </a:r>
+          </a:p>
+        </p:txBody>
+      </p:sp>
+    </p:spTree>
+    <p:extLst>
+      <p:ext uri="{BB962C8B-B14F-4D97-AF65-F5344CB8AC3E}">
+        <p14:creationId xmlns:p14="http://schemas.microsoft.com/office/powerpoint/2010/main" val="675404531"/>
+      </p:ext>
+    </p:extLst>
+  </p:cSld>
+</p:sld>
+</file>
+
+<file path=ppt/slides/slide14.xml><?xml version="1.0" encoding="utf-8"?>
+<p:sld xmlns:p="http://schemas.openxmlformats.org/presentationml/2006/main">
+  <p:cSld>
+    <p:bg>
+      <p:bgPr>
+        <a:solidFill xmlns:a="http://schemas.openxmlformats.org/drawingml/2006/main">
+          <a:srgbClr val="FFFCF8"/>
+        </a:solidFill>
+      </p:bgPr>
+    </p:bg>
+    <p:spTree>
+      <p:nvGrpSpPr>
+        <p:cNvPr id="1" name=""/>
+        <p:cNvGrpSpPr/>
+        <p:nvPr/>
+      </p:nvGrpSpPr>
+      <p:grpSpPr>
+        <a:xfrm xmlns:a="http://schemas.openxmlformats.org/drawingml/2006/main"/>
+      </p:grpSpPr>
+      <p:sp>
+        <p:nvSpPr>
+          <p:cNvPr id="7" name="">
+            <a:extLst xmlns:a="http://schemas.openxmlformats.org/drawingml/2006/main">
+              <a:ext uri="{FF2B5EF4-FFF2-40B4-BE49-F238E27FC236}">
+                <a16:creationId xmlns:a16="http://schemas.microsoft.com/office/drawing/2014/main" id="{F80326C0-6DC6-47CA-9DFF-52F443CED182}"/>
+              </a:ext>
+            </a:extLst>
+          </p:cNvPr>
+          <p:cNvSpPr>
+            <a:spLocks xmlns:a="http://schemas.openxmlformats.org/drawingml/2006/main" noGrp="1"/>
+          </p:cNvSpPr>
+          <p:nvPr/>
+        </p:nvSpPr>
+        <p:spPr>
+          <a:xfrm xmlns:a="http://schemas.openxmlformats.org/drawingml/2006/main">
+            <a:off x="0" y="0"/>
+            <a:ext cx="171450" cy="6858000"/>
+          </a:xfrm>
+          <a:prstGeom xmlns:a="http://schemas.openxmlformats.org/drawingml/2006/main" prst="rect">
+            <a:avLst/>
+          </a:prstGeom>
+          <a:solidFill xmlns:a="http://schemas.openxmlformats.org/drawingml/2006/main">
+            <a:srgbClr val="6657E8"/>
+          </a:solidFill>
+          <a:ln xmlns:a="http://schemas.openxmlformats.org/drawingml/2006/main" w="0">
+            <a:noFill/>
+            <a:prstDash val="solid"/>
+          </a:ln>
+        </p:spPr>
+      </p:sp>
+      <p:sp>
+        <p:nvSpPr>
+          <p:cNvPr id="2" name="">
+            <a:extLst xmlns:a="http://schemas.openxmlformats.org/drawingml/2006/main">
+              <a:ext uri="{FF2B5EF4-FFF2-40B4-BE49-F238E27FC236}">
+                <a16:creationId xmlns:a16="http://schemas.microsoft.com/office/drawing/2014/main" id="{7FDFF1AE-5CEA-4380-82E6-F815B938B7B6}"/>
+              </a:ext>
+            </a:extLst>
+          </p:cNvPr>
+          <p:cNvSpPr>
+            <a:spLocks xmlns:a="http://schemas.openxmlformats.org/drawingml/2006/main" noGrp="1"/>
+          </p:cNvSpPr>
+          <p:nvPr/>
+        </p:nvSpPr>
+        <p:spPr>
+          <a:xfrm xmlns:a="http://schemas.openxmlformats.org/drawingml/2006/main">
+            <a:off x="647700" y="457200"/>
+            <a:ext cx="10096500" cy="552450"/>
+          </a:xfrm>
+          <a:prstGeom xmlns:a="http://schemas.openxmlformats.org/drawingml/2006/main" prst="rect">
+            <a:avLst/>
+          </a:prstGeom>
+          <a:noFill xmlns:a="http://schemas.openxmlformats.org/drawingml/2006/main"/>
+          <a:ln xmlns:a="http://schemas.openxmlformats.org/drawingml/2006/main" w="0">
+            <a:noFill/>
+            <a:prstDash val="solid"/>
+          </a:ln>
+        </p:spPr>
+        <p:txBody>
+          <a:bodyPr xmlns:a="http://schemas.openxmlformats.org/drawingml/2006/main"/>
+          <a:lstStyle xmlns:a="http://schemas.openxmlformats.org/drawingml/2006/main"/>
+          <a:p xmlns:a="http://schemas.openxmlformats.org/drawingml/2006/main">
+            <a:pPr>
+              <a:defRPr sz="2700" b="1">
+                <a:solidFill>
+                  <a:srgbClr val="182235"/>
+                </a:solidFill>
+              </a:defRPr>
+            </a:pPr>
+            <a:r>
+              <a:rPr sz="2700" b="1">
+                <a:solidFill>
+                  <a:srgbClr val="182235"/>
+                </a:solidFill>
+              </a:rPr>
+              <a:t>작은 응용이 내 실력으로 바뀌는 순간입니다</a:t>
+            </a:r>
+          </a:p>
+        </p:txBody>
+      </p:sp>
+      <p:sp>
+        <p:nvSpPr>
+          <p:cNvPr id="3" name="">
+            <a:extLst xmlns:a="http://schemas.openxmlformats.org/drawingml/2006/main">
+              <a:ext uri="{FF2B5EF4-FFF2-40B4-BE49-F238E27FC236}">
+                <a16:creationId xmlns:a16="http://schemas.microsoft.com/office/drawing/2014/main" id="{8565EC8A-ED9A-44E7-AE97-2D50222EA75C}"/>
+              </a:ext>
+            </a:extLst>
+          </p:cNvPr>
+          <p:cNvSpPr>
+            <a:spLocks xmlns:a="http://schemas.openxmlformats.org/drawingml/2006/main" noGrp="1"/>
+          </p:cNvSpPr>
+          <p:nvPr/>
+        </p:nvSpPr>
+        <p:spPr>
+          <a:xfrm xmlns:a="http://schemas.openxmlformats.org/drawingml/2006/main">
+            <a:off x="666750" y="6419850"/>
+            <a:ext cx="10096500" cy="209550"/>
+          </a:xfrm>
+          <a:prstGeom xmlns:a="http://schemas.openxmlformats.org/drawingml/2006/main" prst="rect">
+            <a:avLst/>
+          </a:prstGeom>
+          <a:noFill xmlns:a="http://schemas.openxmlformats.org/drawingml/2006/main"/>
+          <a:ln xmlns:a="http://schemas.openxmlformats.org/drawingml/2006/main" w="0">
+            <a:noFill/>
+            <a:prstDash val="solid"/>
+          </a:ln>
+        </p:spPr>
+        <p:txBody>
+          <a:bodyPr xmlns:a="http://schemas.openxmlformats.org/drawingml/2006/main"/>
+          <a:lstStyle xmlns:a="http://schemas.openxmlformats.org/drawingml/2006/main"/>
+          <a:p xmlns:a="http://schemas.openxmlformats.org/drawingml/2006/main">
+            <a:pPr>
+              <a:defRPr sz="975">
+                <a:solidFill>
+                  <a:srgbClr val="657083"/>
+                </a:solidFill>
+              </a:defRPr>
+            </a:pPr>
+            <a:r>
+              <a:rPr sz="975">
+                <a:solidFill>
+                  <a:srgbClr val="657083"/>
+                </a:solidFill>
+              </a:rPr>
+              <a:t>EDU 웹개발 교육 플랫폼  ·  14</a:t>
+            </a:r>
+          </a:p>
+        </p:txBody>
+      </p:sp>
+      <p:sp>
+        <p:nvSpPr>
+          <p:cNvPr id="4" name="">
+            <a:extLst xmlns:a="http://schemas.openxmlformats.org/drawingml/2006/main">
+              <a:ext uri="{FF2B5EF4-FFF2-40B4-BE49-F238E27FC236}">
+                <a16:creationId xmlns:a16="http://schemas.microsoft.com/office/drawing/2014/main" id="{101E2F09-9AEB-4F21-9043-0C89A06656EC}"/>
+              </a:ext>
+            </a:extLst>
+          </p:cNvPr>
+          <p:cNvSpPr>
+            <a:spLocks xmlns:a="http://schemas.openxmlformats.org/drawingml/2006/main" noGrp="1"/>
+          </p:cNvSpPr>
+          <p:nvPr/>
+        </p:nvSpPr>
+        <p:spPr>
+          <a:xfrm xmlns:a="http://schemas.openxmlformats.org/drawingml/2006/main">
+            <a:off x="685800" y="1524000"/>
+            <a:ext cx="10820400" cy="2381250"/>
+          </a:xfrm>
+          <a:prstGeom xmlns:a="http://schemas.openxmlformats.org/drawingml/2006/main" prst="roundRect">
+            <a:avLst>
+              <a:gd name="adj" fmla="val 4800"/>
+            </a:avLst>
+          </a:prstGeom>
+          <a:solidFill xmlns:a="http://schemas.openxmlformats.org/drawingml/2006/main">
+            <a:srgbClr val="EAF8F3"/>
+          </a:solidFill>
+          <a:ln xmlns:a="http://schemas.openxmlformats.org/drawingml/2006/main" w="0">
+            <a:noFill/>
+            <a:prstDash val="solid"/>
+          </a:ln>
+        </p:spPr>
+      </p:sp>
+      <p:sp>
+        <p:nvSpPr>
+          <p:cNvPr id="5" name="">
+            <a:extLst xmlns:a="http://schemas.openxmlformats.org/drawingml/2006/main">
+              <a:ext uri="{FF2B5EF4-FFF2-40B4-BE49-F238E27FC236}">
+                <a16:creationId xmlns:a16="http://schemas.microsoft.com/office/drawing/2014/main" id="{626EB545-73C7-410A-966D-876ED80FAB49}"/>
+              </a:ext>
+            </a:extLst>
+          </p:cNvPr>
+          <p:cNvSpPr>
+            <a:spLocks xmlns:a="http://schemas.openxmlformats.org/drawingml/2006/main" noGrp="1"/>
+          </p:cNvSpPr>
+          <p:nvPr/>
+        </p:nvSpPr>
+        <p:spPr>
+          <a:xfrm xmlns:a="http://schemas.openxmlformats.org/drawingml/2006/main">
+            <a:off x="1123950" y="2076450"/>
+            <a:ext cx="9944100" cy="1238250"/>
+          </a:xfrm>
+          <a:prstGeom xmlns:a="http://schemas.openxmlformats.org/drawingml/2006/main" prst="rect">
+            <a:avLst/>
+          </a:prstGeom>
+          <a:noFill xmlns:a="http://schemas.openxmlformats.org/drawingml/2006/main"/>
+          <a:ln xmlns:a="http://schemas.openxmlformats.org/drawingml/2006/main" w="0">
+            <a:noFill/>
+            <a:prstDash val="solid"/>
+          </a:ln>
+        </p:spPr>
+        <p:txBody>
+          <a:bodyPr xmlns:a="http://schemas.openxmlformats.org/drawingml/2006/main"/>
+          <a:lstStyle xmlns:a="http://schemas.openxmlformats.org/drawingml/2006/main"/>
+          <a:p xmlns:a="http://schemas.openxmlformats.org/drawingml/2006/main">
+            <a:pPr>
+              <a:defRPr sz="2175" b="1">
+                <a:solidFill>
+                  <a:srgbClr val="182235"/>
+                </a:solidFill>
+              </a:defRPr>
+            </a:pPr>
+            <a:r>
+              <a:rPr sz="2175" b="1">
+                <a:solidFill>
+                  <a:srgbClr val="182235"/>
+                </a:solidFill>
+              </a:rPr>
+              <a:t>제목으로 한 자료만 찾는 eq 조건을 추가하고 결과가 없을 때 안내를 표시하세요.</a:t>
+            </a:r>
+          </a:p>
+        </p:txBody>
+      </p:sp>
+      <p:sp>
+        <p:nvSpPr>
+          <p:cNvPr id="6" name="">
+            <a:extLst xmlns:a="http://schemas.openxmlformats.org/drawingml/2006/main">
+              <a:ext uri="{FF2B5EF4-FFF2-40B4-BE49-F238E27FC236}">
+                <a16:creationId xmlns:a16="http://schemas.microsoft.com/office/drawing/2014/main" id="{DE961D37-68DD-454D-8A7B-A1B6B14A0F97}"/>
+              </a:ext>
+            </a:extLst>
+          </p:cNvPr>
+          <p:cNvSpPr>
+            <a:spLocks xmlns:a="http://schemas.openxmlformats.org/drawingml/2006/main" noGrp="1"/>
+          </p:cNvSpPr>
+          <p:nvPr/>
+        </p:nvSpPr>
+        <p:spPr>
+          <a:xfrm xmlns:a="http://schemas.openxmlformats.org/drawingml/2006/main">
+            <a:off x="1143000" y="4524375"/>
+            <a:ext cx="9525000" cy="571500"/>
+          </a:xfrm>
+          <a:prstGeom xmlns:a="http://schemas.openxmlformats.org/drawingml/2006/main" prst="rect">
+            <a:avLst/>
+          </a:prstGeom>
+          <a:noFill xmlns:a="http://schemas.openxmlformats.org/drawingml/2006/main"/>
+          <a:ln xmlns:a="http://schemas.openxmlformats.org/drawingml/2006/main" w="0">
+            <a:noFill/>
+            <a:prstDash val="solid"/>
+          </a:ln>
+        </p:spPr>
+        <p:txBody>
+          <a:bodyPr xmlns:a="http://schemas.openxmlformats.org/drawingml/2006/main"/>
+          <a:lstStyle xmlns:a="http://schemas.openxmlformats.org/drawingml/2006/main"/>
+          <a:p xmlns:a="http://schemas.openxmlformats.org/drawingml/2006/main">
+            <a:pPr>
+              <a:defRPr sz="1650">
+                <a:solidFill>
+                  <a:srgbClr val="657083"/>
+                </a:solidFill>
+              </a:defRPr>
+            </a:pPr>
+            <a:r>
+              <a:rPr sz="1650">
+                <a:solidFill>
+                  <a:srgbClr val="657083"/>
+                </a:solidFill>
+              </a:rPr>
+              <a:t>완성한 뒤 원래 결과와 무엇이 달라졌는지 한 문장으로 설명해 보세요.</a:t>
+            </a:r>
+          </a:p>
+        </p:txBody>
+      </p:sp>
+    </p:spTree>
+    <p:extLst>
+      <p:ext uri="{BB962C8B-B14F-4D97-AF65-F5344CB8AC3E}">
+        <p14:creationId xmlns:p14="http://schemas.microsoft.com/office/powerpoint/2010/main" val="798161781"/>
+      </p:ext>
+    </p:extLst>
+  </p:cSld>
+</p:sld>
+</file>
+
+<file path=ppt/slides/slide15.xml><?xml version="1.0" encoding="utf-8"?>
+<p:sld xmlns:p="http://schemas.openxmlformats.org/presentationml/2006/main">
+  <p:cSld>
+    <p:bg>
+      <p:bgPr>
+        <a:solidFill xmlns:a="http://schemas.openxmlformats.org/drawingml/2006/main">
+          <a:srgbClr val="FFFCF8"/>
+        </a:solidFill>
+      </p:bgPr>
+    </p:bg>
+    <p:spTree>
+      <p:nvGrpSpPr>
+        <p:cNvPr id="1" name=""/>
+        <p:cNvGrpSpPr/>
+        <p:nvPr/>
+      </p:nvGrpSpPr>
+      <p:grpSpPr>
+        <a:xfrm xmlns:a="http://schemas.openxmlformats.org/drawingml/2006/main"/>
+      </p:grpSpPr>
+      <p:sp>
+        <p:nvSpPr>
+          <p:cNvPr id="10" name="">
+            <a:extLst xmlns:a="http://schemas.openxmlformats.org/drawingml/2006/main">
+              <a:ext uri="{FF2B5EF4-FFF2-40B4-BE49-F238E27FC236}">
+                <a16:creationId xmlns:a16="http://schemas.microsoft.com/office/drawing/2014/main" id="{4E579E79-EAB9-4296-9B0C-C68C321E82AF}"/>
+              </a:ext>
+            </a:extLst>
+          </p:cNvPr>
+          <p:cNvSpPr>
+            <a:spLocks xmlns:a="http://schemas.openxmlformats.org/drawingml/2006/main" noGrp="1"/>
+          </p:cNvSpPr>
+          <p:nvPr/>
+        </p:nvSpPr>
+        <p:spPr>
+          <a:xfrm xmlns:a="http://schemas.openxmlformats.org/drawingml/2006/main">
+            <a:off x="0" y="0"/>
+            <a:ext cx="171450" cy="6858000"/>
+          </a:xfrm>
+          <a:prstGeom xmlns:a="http://schemas.openxmlformats.org/drawingml/2006/main" prst="rect">
+            <a:avLst/>
+          </a:prstGeom>
+          <a:solidFill xmlns:a="http://schemas.openxmlformats.org/drawingml/2006/main">
+            <a:srgbClr val="6657E8"/>
+          </a:solidFill>
+          <a:ln xmlns:a="http://schemas.openxmlformats.org/drawingml/2006/main" w="0">
+            <a:noFill/>
+            <a:prstDash val="solid"/>
+          </a:ln>
+        </p:spPr>
+      </p:sp>
+      <p:sp>
+        <p:nvSpPr>
+          <p:cNvPr id="2" name="">
+            <a:extLst xmlns:a="http://schemas.openxmlformats.org/drawingml/2006/main">
+              <a:ext uri="{FF2B5EF4-FFF2-40B4-BE49-F238E27FC236}">
+                <a16:creationId xmlns:a16="http://schemas.microsoft.com/office/drawing/2014/main" id="{4B0B31C4-674C-4FB0-9D54-D75EFF7BB136}"/>
+              </a:ext>
+            </a:extLst>
+          </p:cNvPr>
+          <p:cNvSpPr>
+            <a:spLocks xmlns:a="http://schemas.openxmlformats.org/drawingml/2006/main" noGrp="1"/>
+          </p:cNvSpPr>
+          <p:nvPr/>
+        </p:nvSpPr>
+        <p:spPr>
+          <a:xfrm xmlns:a="http://schemas.openxmlformats.org/drawingml/2006/main">
+            <a:off x="647700" y="457200"/>
+            <a:ext cx="10096500" cy="552450"/>
+          </a:xfrm>
+          <a:prstGeom xmlns:a="http://schemas.openxmlformats.org/drawingml/2006/main" prst="rect">
+            <a:avLst/>
+          </a:prstGeom>
+          <a:noFill xmlns:a="http://schemas.openxmlformats.org/drawingml/2006/main"/>
+          <a:ln xmlns:a="http://schemas.openxmlformats.org/drawingml/2006/main" w="0">
+            <a:noFill/>
+            <a:prstDash val="solid"/>
+          </a:ln>
+        </p:spPr>
+        <p:txBody>
+          <a:bodyPr xmlns:a="http://schemas.openxmlformats.org/drawingml/2006/main"/>
+          <a:lstStyle xmlns:a="http://schemas.openxmlformats.org/drawingml/2006/main"/>
+          <a:p xmlns:a="http://schemas.openxmlformats.org/drawingml/2006/main">
+            <a:pPr>
+              <a:defRPr sz="2700" b="1">
+                <a:solidFill>
+                  <a:srgbClr val="182235"/>
+                </a:solidFill>
+              </a:defRPr>
+            </a:pPr>
+            <a:r>
+              <a:rPr sz="2700" b="1">
+                <a:solidFill>
+                  <a:srgbClr val="182235"/>
+                </a:solidFill>
+              </a:rPr>
+              <a:t>다섯 문제로 오늘 배운 내용을 확인하세요</a:t>
+            </a:r>
+          </a:p>
+        </p:txBody>
+      </p:sp>
+      <p:sp>
+        <p:nvSpPr>
+          <p:cNvPr id="3" name="">
+            <a:extLst xmlns:a="http://schemas.openxmlformats.org/drawingml/2006/main">
+              <a:ext uri="{FF2B5EF4-FFF2-40B4-BE49-F238E27FC236}">
+                <a16:creationId xmlns:a16="http://schemas.microsoft.com/office/drawing/2014/main" id="{351CC83B-4399-4A8C-838A-F1E33831715A}"/>
+              </a:ext>
+            </a:extLst>
+          </p:cNvPr>
+          <p:cNvSpPr>
+            <a:spLocks xmlns:a="http://schemas.openxmlformats.org/drawingml/2006/main" noGrp="1"/>
+          </p:cNvSpPr>
+          <p:nvPr/>
+        </p:nvSpPr>
+        <p:spPr>
+          <a:xfrm xmlns:a="http://schemas.openxmlformats.org/drawingml/2006/main">
+            <a:off x="666750" y="6419850"/>
+            <a:ext cx="10096500" cy="209550"/>
+          </a:xfrm>
+          <a:prstGeom xmlns:a="http://schemas.openxmlformats.org/drawingml/2006/main" prst="rect">
+            <a:avLst/>
+          </a:prstGeom>
+          <a:noFill xmlns:a="http://schemas.openxmlformats.org/drawingml/2006/main"/>
+          <a:ln xmlns:a="http://schemas.openxmlformats.org/drawingml/2006/main" w="0">
+            <a:noFill/>
+            <a:prstDash val="solid"/>
+          </a:ln>
+        </p:spPr>
+        <p:txBody>
+          <a:bodyPr xmlns:a="http://schemas.openxmlformats.org/drawingml/2006/main"/>
+          <a:lstStyle xmlns:a="http://schemas.openxmlformats.org/drawingml/2006/main"/>
+          <a:p xmlns:a="http://schemas.openxmlformats.org/drawingml/2006/main">
+            <a:pPr>
+              <a:defRPr sz="975">
+                <a:solidFill>
+                  <a:srgbClr val="657083"/>
+                </a:solidFill>
+              </a:defRPr>
+            </a:pPr>
+            <a:r>
+              <a:rPr sz="975">
+                <a:solidFill>
+                  <a:srgbClr val="657083"/>
+                </a:solidFill>
+              </a:rPr>
+              <a:t>EDU 웹개발 교육 플랫폼  ·  15</a:t>
+            </a:r>
+          </a:p>
+        </p:txBody>
+      </p:sp>
+      <p:sp>
+        <p:nvSpPr>
+          <p:cNvPr id="4" name="">
+            <a:extLst xmlns:a="http://schemas.openxmlformats.org/drawingml/2006/main">
+              <a:ext uri="{FF2B5EF4-FFF2-40B4-BE49-F238E27FC236}">
+                <a16:creationId xmlns:a16="http://schemas.microsoft.com/office/drawing/2014/main" id="{16C1C246-9186-42FF-98DB-12664FAFF3FE}"/>
+              </a:ext>
+            </a:extLst>
+          </p:cNvPr>
+          <p:cNvSpPr>
+            <a:spLocks xmlns:a="http://schemas.openxmlformats.org/drawingml/2006/main" noGrp="1"/>
+          </p:cNvSpPr>
+          <p:nvPr/>
+        </p:nvSpPr>
+        <p:spPr>
+          <a:xfrm xmlns:a="http://schemas.openxmlformats.org/drawingml/2006/main">
+            <a:off x="857250" y="1285875"/>
+            <a:ext cx="10287000" cy="552450"/>
+          </a:xfrm>
+          <a:prstGeom xmlns:a="http://schemas.openxmlformats.org/drawingml/2006/main" prst="rect">
+            <a:avLst/>
+          </a:prstGeom>
+          <a:noFill xmlns:a="http://schemas.openxmlformats.org/drawingml/2006/main"/>
+          <a:ln xmlns:a="http://schemas.openxmlformats.org/drawingml/2006/main" w="0">
+            <a:noFill/>
+            <a:prstDash val="solid"/>
+          </a:ln>
+        </p:spPr>
+        <p:txBody>
+          <a:bodyPr xmlns:a="http://schemas.openxmlformats.org/drawingml/2006/main"/>
+          <a:lstStyle xmlns:a="http://schemas.openxmlformats.org/drawingml/2006/main"/>
+          <a:p xmlns:a="http://schemas.openxmlformats.org/drawingml/2006/main">
+            <a:pPr>
+              <a:defRPr sz="1650" b="0">
+                <a:solidFill>
+                  <a:srgbClr val="182235"/>
+                </a:solidFill>
+              </a:defRPr>
+            </a:pPr>
+            <a:r>
+              <a:rPr sz="1650" b="0">
+                <a:solidFill>
+                  <a:srgbClr val="182235"/>
+                </a:solidFill>
+              </a:rPr>
+              <a:t>1. CRUD의 네 기능은?</a:t>
+            </a:r>
+          </a:p>
+        </p:txBody>
+      </p:sp>
+      <p:sp>
+        <p:nvSpPr>
+          <p:cNvPr id="5" name="">
+            <a:extLst xmlns:a="http://schemas.openxmlformats.org/drawingml/2006/main">
+              <a:ext uri="{FF2B5EF4-FFF2-40B4-BE49-F238E27FC236}">
+                <a16:creationId xmlns:a16="http://schemas.microsoft.com/office/drawing/2014/main" id="{8B8634A8-D7FD-4BB7-8939-E4BAE60E97D1}"/>
+              </a:ext>
+            </a:extLst>
+          </p:cNvPr>
+          <p:cNvSpPr>
+            <a:spLocks xmlns:a="http://schemas.openxmlformats.org/drawingml/2006/main" noGrp="1"/>
+          </p:cNvSpPr>
+          <p:nvPr/>
+        </p:nvSpPr>
+        <p:spPr>
+          <a:xfrm xmlns:a="http://schemas.openxmlformats.org/drawingml/2006/main">
+            <a:off x="857250" y="2162175"/>
+            <a:ext cx="10287000" cy="552450"/>
+          </a:xfrm>
+          <a:prstGeom xmlns:a="http://schemas.openxmlformats.org/drawingml/2006/main" prst="rect">
+            <a:avLst/>
+          </a:prstGeom>
+          <a:noFill xmlns:a="http://schemas.openxmlformats.org/drawingml/2006/main"/>
+          <a:ln xmlns:a="http://schemas.openxmlformats.org/drawingml/2006/main" w="0">
+            <a:noFill/>
+            <a:prstDash val="solid"/>
+          </a:ln>
+        </p:spPr>
+        <p:txBody>
+          <a:bodyPr xmlns:a="http://schemas.openxmlformats.org/drawingml/2006/main"/>
+          <a:lstStyle xmlns:a="http://schemas.openxmlformats.org/drawingml/2006/main"/>
+          <a:p xmlns:a="http://schemas.openxmlformats.org/drawingml/2006/main">
+            <a:pPr>
+              <a:defRPr sz="1650" b="0">
+                <a:solidFill>
+                  <a:srgbClr val="182235"/>
+                </a:solidFill>
+              </a:defRPr>
+            </a:pPr>
+            <a:r>
+              <a:rPr sz="1650" b="0">
+                <a:solidFill>
+                  <a:srgbClr val="182235"/>
+                </a:solidFill>
+              </a:rPr>
+              <a:t>2. publishable key를 브라우저에서 쓸 수 있는 이유는?</a:t>
+            </a:r>
+          </a:p>
+        </p:txBody>
+      </p:sp>
+      <p:sp>
+        <p:nvSpPr>
+          <p:cNvPr id="6" name="">
+            <a:extLst xmlns:a="http://schemas.openxmlformats.org/drawingml/2006/main">
+              <a:ext uri="{FF2B5EF4-FFF2-40B4-BE49-F238E27FC236}">
+                <a16:creationId xmlns:a16="http://schemas.microsoft.com/office/drawing/2014/main" id="{907B4CEB-2F7F-4FE8-9D83-7A35D4CA7AC4}"/>
+              </a:ext>
+            </a:extLst>
+          </p:cNvPr>
+          <p:cNvSpPr>
+            <a:spLocks xmlns:a="http://schemas.openxmlformats.org/drawingml/2006/main" noGrp="1"/>
+          </p:cNvSpPr>
+          <p:nvPr/>
+        </p:nvSpPr>
+        <p:spPr>
+          <a:xfrm xmlns:a="http://schemas.openxmlformats.org/drawingml/2006/main">
+            <a:off x="857250" y="3038475"/>
+            <a:ext cx="10287000" cy="552450"/>
+          </a:xfrm>
+          <a:prstGeom xmlns:a="http://schemas.openxmlformats.org/drawingml/2006/main" prst="rect">
+            <a:avLst/>
+          </a:prstGeom>
+          <a:noFill xmlns:a="http://schemas.openxmlformats.org/drawingml/2006/main"/>
+          <a:ln xmlns:a="http://schemas.openxmlformats.org/drawingml/2006/main" w="0">
+            <a:noFill/>
+            <a:prstDash val="solid"/>
+          </a:ln>
+        </p:spPr>
+        <p:txBody>
+          <a:bodyPr xmlns:a="http://schemas.openxmlformats.org/drawingml/2006/main"/>
+          <a:lstStyle xmlns:a="http://schemas.openxmlformats.org/drawingml/2006/main"/>
+          <a:p xmlns:a="http://schemas.openxmlformats.org/drawingml/2006/main">
+            <a:pPr>
+              <a:defRPr sz="1650" b="0">
+                <a:solidFill>
+                  <a:srgbClr val="182235"/>
+                </a:solidFill>
+              </a:defRPr>
+            </a:pPr>
+            <a:r>
+              <a:rPr sz="1650" b="0">
+                <a:solidFill>
+                  <a:srgbClr val="182235"/>
+                </a:solidFill>
+              </a:rPr>
+              <a:t>3. service role key를 브라우저에 넣어도 되나요?</a:t>
+            </a:r>
+          </a:p>
+        </p:txBody>
+      </p:sp>
+      <p:sp>
+        <p:nvSpPr>
+          <p:cNvPr id="7" name="">
+            <a:extLst xmlns:a="http://schemas.openxmlformats.org/drawingml/2006/main">
+              <a:ext uri="{FF2B5EF4-FFF2-40B4-BE49-F238E27FC236}">
+                <a16:creationId xmlns:a16="http://schemas.microsoft.com/office/drawing/2014/main" id="{C0CF6F52-6FE5-4B70-9259-81F33C1A8743}"/>
+              </a:ext>
+            </a:extLst>
+          </p:cNvPr>
+          <p:cNvSpPr>
+            <a:spLocks xmlns:a="http://schemas.openxmlformats.org/drawingml/2006/main" noGrp="1"/>
+          </p:cNvSpPr>
+          <p:nvPr/>
+        </p:nvSpPr>
+        <p:spPr>
+          <a:xfrm xmlns:a="http://schemas.openxmlformats.org/drawingml/2006/main">
+            <a:off x="857250" y="3914775"/>
+            <a:ext cx="10287000" cy="552450"/>
+          </a:xfrm>
+          <a:prstGeom xmlns:a="http://schemas.openxmlformats.org/drawingml/2006/main" prst="rect">
+            <a:avLst/>
+          </a:prstGeom>
+          <a:noFill xmlns:a="http://schemas.openxmlformats.org/drawingml/2006/main"/>
+          <a:ln xmlns:a="http://schemas.openxmlformats.org/drawingml/2006/main" w="0">
+            <a:noFill/>
+            <a:prstDash val="solid"/>
+          </a:ln>
+        </p:spPr>
+        <p:txBody>
+          <a:bodyPr xmlns:a="http://schemas.openxmlformats.org/drawingml/2006/main"/>
+          <a:lstStyle xmlns:a="http://schemas.openxmlformats.org/drawingml/2006/main"/>
+          <a:p xmlns:a="http://schemas.openxmlformats.org/drawingml/2006/main">
+            <a:pPr>
+              <a:defRPr sz="1650" b="0">
+                <a:solidFill>
+                  <a:srgbClr val="182235"/>
+                </a:solidFill>
+              </a:defRPr>
+            </a:pPr>
+            <a:r>
+              <a:rPr sz="1650" b="0">
+                <a:solidFill>
+                  <a:srgbClr val="182235"/>
+                </a:solidFill>
+              </a:rPr>
+              <a:t>4. error를 확인해야 하는 이유는?</a:t>
+            </a:r>
+          </a:p>
+        </p:txBody>
+      </p:sp>
+      <p:sp>
+        <p:nvSpPr>
+          <p:cNvPr id="8" name="">
+            <a:extLst xmlns:a="http://schemas.openxmlformats.org/drawingml/2006/main">
+              <a:ext uri="{FF2B5EF4-FFF2-40B4-BE49-F238E27FC236}">
+                <a16:creationId xmlns:a16="http://schemas.microsoft.com/office/drawing/2014/main" id="{1200E9A2-8941-4297-8778-341E543B882E}"/>
+              </a:ext>
+            </a:extLst>
+          </p:cNvPr>
+          <p:cNvSpPr>
+            <a:spLocks xmlns:a="http://schemas.openxmlformats.org/drawingml/2006/main" noGrp="1"/>
+          </p:cNvSpPr>
+          <p:nvPr/>
+        </p:nvSpPr>
+        <p:spPr>
+          <a:xfrm xmlns:a="http://schemas.openxmlformats.org/drawingml/2006/main">
+            <a:off x="857250" y="4791075"/>
+            <a:ext cx="10287000" cy="552450"/>
+          </a:xfrm>
+          <a:prstGeom xmlns:a="http://schemas.openxmlformats.org/drawingml/2006/main" prst="rect">
+            <a:avLst/>
+          </a:prstGeom>
+          <a:noFill xmlns:a="http://schemas.openxmlformats.org/drawingml/2006/main"/>
+          <a:ln xmlns:a="http://schemas.openxmlformats.org/drawingml/2006/main" w="0">
+            <a:noFill/>
+            <a:prstDash val="solid"/>
+          </a:ln>
+        </p:spPr>
+        <p:txBody>
+          <a:bodyPr xmlns:a="http://schemas.openxmlformats.org/drawingml/2006/main"/>
+          <a:lstStyle xmlns:a="http://schemas.openxmlformats.org/drawingml/2006/main"/>
+          <a:p xmlns:a="http://schemas.openxmlformats.org/drawingml/2006/main">
+            <a:pPr>
+              <a:defRPr sz="1650" b="1">
+                <a:solidFill>
+                  <a:srgbClr val="182235"/>
+                </a:solidFill>
+              </a:defRPr>
+            </a:pPr>
+            <a:r>
+              <a:rPr sz="1650" b="1">
+                <a:solidFill>
+                  <a:srgbClr val="182235"/>
+                </a:solidFill>
+              </a:rPr>
+              <a:t>5. 완료 기준은?</a:t>
+            </a:r>
+          </a:p>
+        </p:txBody>
+      </p:sp>
+      <p:sp>
+        <p:nvSpPr>
+          <p:cNvPr id="9" name="">
+            <a:extLst xmlns:a="http://schemas.openxmlformats.org/drawingml/2006/main">
+              <a:ext uri="{FF2B5EF4-FFF2-40B4-BE49-F238E27FC236}">
+                <a16:creationId xmlns:a16="http://schemas.microsoft.com/office/drawing/2014/main" id="{C1863B5D-B7EE-429F-A8A3-1869924ADBEC}"/>
+              </a:ext>
+            </a:extLst>
+          </p:cNvPr>
+          <p:cNvSpPr>
+            <a:spLocks xmlns:a="http://schemas.openxmlformats.org/drawingml/2006/main" noGrp="1"/>
+          </p:cNvSpPr>
+          <p:nvPr/>
+        </p:nvSpPr>
+        <p:spPr>
+          <a:xfrm xmlns:a="http://schemas.openxmlformats.org/drawingml/2006/main">
+            <a:off x="857250" y="5857875"/>
+            <a:ext cx="10001250" cy="304800"/>
+          </a:xfrm>
+          <a:prstGeom xmlns:a="http://schemas.openxmlformats.org/drawingml/2006/main" prst="rect">
+            <a:avLst/>
+          </a:prstGeom>
+          <a:noFill xmlns:a="http://schemas.openxmlformats.org/drawingml/2006/main"/>
+          <a:ln xmlns:a="http://schemas.openxmlformats.org/drawingml/2006/main" w="0">
+            <a:noFill/>
+            <a:prstDash val="solid"/>
+          </a:ln>
+        </p:spPr>
+        <p:txBody>
+          <a:bodyPr xmlns:a="http://schemas.openxmlformats.org/drawingml/2006/main"/>
+          <a:lstStyle xmlns:a="http://schemas.openxmlformats.org/drawingml/2006/main"/>
+          <a:p xmlns:a="http://schemas.openxmlformats.org/drawingml/2006/main">
+            <a:pPr>
+              <a:defRPr sz="1350" b="1">
+                <a:solidFill>
+                  <a:srgbClr val="6657E8"/>
+                </a:solidFill>
+              </a:defRPr>
+            </a:pPr>
+            <a:r>
+              <a:rPr sz="1350" b="1">
+                <a:solidFill>
+                  <a:srgbClr val="6657E8"/>
+                </a:solidFill>
+              </a:rPr>
+              <a:t>정답과 해설은 EDU 홈페이지 상세 자료에서 확인할 수 있습니다.</a:t>
+            </a:r>
+          </a:p>
+        </p:txBody>
+      </p:sp>
+    </p:spTree>
+    <p:extLst>
+      <p:ext uri="{BB962C8B-B14F-4D97-AF65-F5344CB8AC3E}">
+        <p14:creationId xmlns:p14="http://schemas.microsoft.com/office/powerpoint/2010/main" val="1592831409"/>
       </p:ext>
     </p:extLst>
   </p:cSld>
@@ -1896,7 +5488,7 @@
           <p:cNvPr id="12" name="">
             <a:extLst xmlns:a="http://schemas.openxmlformats.org/drawingml/2006/main">
               <a:ext uri="{FF2B5EF4-FFF2-40B4-BE49-F238E27FC236}">
-                <a16:creationId xmlns:a16="http://schemas.microsoft.com/office/drawing/2014/main" id="{852EA650-05FF-4D58-BBA6-0B1AFF3DB9BF}"/>
+                <a16:creationId xmlns:a16="http://schemas.microsoft.com/office/drawing/2014/main" id="{4721BA23-FE32-46E1-8D0D-8981A7E00B56}"/>
               </a:ext>
             </a:extLst>
           </p:cNvPr>
@@ -1927,7 +5519,7 @@
           <p:cNvPr id="2" name="">
             <a:extLst xmlns:a="http://schemas.openxmlformats.org/drawingml/2006/main">
               <a:ext uri="{FF2B5EF4-FFF2-40B4-BE49-F238E27FC236}">
-                <a16:creationId xmlns:a16="http://schemas.microsoft.com/office/drawing/2014/main" id="{D3566FAD-9885-48A9-8596-58BEA3DB9E19}"/>
+                <a16:creationId xmlns:a16="http://schemas.microsoft.com/office/drawing/2014/main" id="{4F8CA66B-FD74-44C1-BCF9-D1004E530263}"/>
               </a:ext>
             </a:extLst>
           </p:cNvPr>
@@ -1977,7 +5569,7 @@
           <p:cNvPr id="3" name="">
             <a:extLst xmlns:a="http://schemas.openxmlformats.org/drawingml/2006/main">
               <a:ext uri="{FF2B5EF4-FFF2-40B4-BE49-F238E27FC236}">
-                <a16:creationId xmlns:a16="http://schemas.microsoft.com/office/drawing/2014/main" id="{F3A645E3-D635-4DE9-ACE4-4D35D3042237}"/>
+                <a16:creationId xmlns:a16="http://schemas.microsoft.com/office/drawing/2014/main" id="{2EEFB2F5-FD07-4614-BA06-CB9DD3F7DFE3}"/>
               </a:ext>
             </a:extLst>
           </p:cNvPr>
@@ -2027,7 +5619,7 @@
           <p:cNvPr id="4" name="">
             <a:extLst xmlns:a="http://schemas.openxmlformats.org/drawingml/2006/main">
               <a:ext uri="{FF2B5EF4-FFF2-40B4-BE49-F238E27FC236}">
-                <a16:creationId xmlns:a16="http://schemas.microsoft.com/office/drawing/2014/main" id="{7E7FF1F5-DD18-4595-A071-6EB254E89B27}"/>
+                <a16:creationId xmlns:a16="http://schemas.microsoft.com/office/drawing/2014/main" id="{63A075DE-A533-4C9A-86A0-7EC1CE3A14C0}"/>
               </a:ext>
             </a:extLst>
           </p:cNvPr>
@@ -2060,7 +5652,7 @@
           <p:cNvPr id="5" name="">
             <a:extLst xmlns:a="http://schemas.openxmlformats.org/drawingml/2006/main">
               <a:ext uri="{FF2B5EF4-FFF2-40B4-BE49-F238E27FC236}">
-                <a16:creationId xmlns:a16="http://schemas.microsoft.com/office/drawing/2014/main" id="{531FF9C6-20A9-4C7E-AEA1-AECA512F9117}"/>
+                <a16:creationId xmlns:a16="http://schemas.microsoft.com/office/drawing/2014/main" id="{1789D269-630C-432A-9508-AE14ECCEB027}"/>
               </a:ext>
             </a:extLst>
           </p:cNvPr>
@@ -2110,7 +5702,7 @@
           <p:cNvPr id="6" name="">
             <a:extLst xmlns:a="http://schemas.openxmlformats.org/drawingml/2006/main">
               <a:ext uri="{FF2B5EF4-FFF2-40B4-BE49-F238E27FC236}">
-                <a16:creationId xmlns:a16="http://schemas.microsoft.com/office/drawing/2014/main" id="{55BCD21F-9046-45EA-B639-46F38D1F7592}"/>
+                <a16:creationId xmlns:a16="http://schemas.microsoft.com/office/drawing/2014/main" id="{07AD7F87-1D51-4F2D-8926-3A27FB3F3354}"/>
               </a:ext>
             </a:extLst>
           </p:cNvPr>
@@ -2160,7 +5752,7 @@
           <p:cNvPr id="7" name="">
             <a:extLst xmlns:a="http://schemas.openxmlformats.org/drawingml/2006/main">
               <a:ext uri="{FF2B5EF4-FFF2-40B4-BE49-F238E27FC236}">
-                <a16:creationId xmlns:a16="http://schemas.microsoft.com/office/drawing/2014/main" id="{33091765-1813-40AC-AF9D-A7B6464C576B}"/>
+                <a16:creationId xmlns:a16="http://schemas.microsoft.com/office/drawing/2014/main" id="{D14B7B00-9569-4F33-B464-8DB3CBF78EFB}"/>
               </a:ext>
             </a:extLst>
           </p:cNvPr>
@@ -2193,7 +5785,7 @@
           <p:cNvPr id="8" name="">
             <a:extLst xmlns:a="http://schemas.openxmlformats.org/drawingml/2006/main">
               <a:ext uri="{FF2B5EF4-FFF2-40B4-BE49-F238E27FC236}">
-                <a16:creationId xmlns:a16="http://schemas.microsoft.com/office/drawing/2014/main" id="{33E3D5B5-5A04-4E3C-8AEE-85CDEFD4272F}"/>
+                <a16:creationId xmlns:a16="http://schemas.microsoft.com/office/drawing/2014/main" id="{86AA35CA-8E43-4990-BF91-B51BAE65998D}"/>
               </a:ext>
             </a:extLst>
           </p:cNvPr>
@@ -2243,7 +5835,7 @@
           <p:cNvPr id="9" name="">
             <a:extLst xmlns:a="http://schemas.openxmlformats.org/drawingml/2006/main">
               <a:ext uri="{FF2B5EF4-FFF2-40B4-BE49-F238E27FC236}">
-                <a16:creationId xmlns:a16="http://schemas.microsoft.com/office/drawing/2014/main" id="{CD3A97F0-A8DB-42AC-9DBF-658E62C4D8E9}"/>
+                <a16:creationId xmlns:a16="http://schemas.microsoft.com/office/drawing/2014/main" id="{C29CAD63-7800-419C-A8E2-0BC623EE0A46}"/>
               </a:ext>
             </a:extLst>
           </p:cNvPr>
@@ -2293,7 +5885,7 @@
           <p:cNvPr id="10" name="">
             <a:extLst xmlns:a="http://schemas.openxmlformats.org/drawingml/2006/main">
               <a:ext uri="{FF2B5EF4-FFF2-40B4-BE49-F238E27FC236}">
-                <a16:creationId xmlns:a16="http://schemas.microsoft.com/office/drawing/2014/main" id="{B42C38D9-C933-41FC-AA47-5BE2BFD12E13}"/>
+                <a16:creationId xmlns:a16="http://schemas.microsoft.com/office/drawing/2014/main" id="{C0DE4F92-6651-4582-809D-E734A55FB4C2}"/>
               </a:ext>
             </a:extLst>
           </p:cNvPr>
@@ -2326,7 +5918,7 @@
           <p:cNvPr id="11" name="">
             <a:extLst xmlns:a="http://schemas.openxmlformats.org/drawingml/2006/main">
               <a:ext uri="{FF2B5EF4-FFF2-40B4-BE49-F238E27FC236}">
-                <a16:creationId xmlns:a16="http://schemas.microsoft.com/office/drawing/2014/main" id="{17696B19-D3DE-418E-B9AB-B33AA0C6E6BE}"/>
+                <a16:creationId xmlns:a16="http://schemas.microsoft.com/office/drawing/2014/main" id="{DCF68504-9D13-4579-9BC2-FBAD78D7779F}"/>
               </a:ext>
             </a:extLst>
           </p:cNvPr>
@@ -2391,7 +5983,7 @@
     </p:spTree>
     <p:extLst>
       <p:ext uri="{BB962C8B-B14F-4D97-AF65-F5344CB8AC3E}">
-        <p14:creationId xmlns:p14="http://schemas.microsoft.com/office/powerpoint/2010/main" val="2073300407"/>
+        <p14:creationId xmlns:p14="http://schemas.microsoft.com/office/powerpoint/2010/main" val="1719222568"/>
       </p:ext>
     </p:extLst>
   </p:cSld>
@@ -2422,7 +6014,7 @@
           <p:cNvPr id="8" name="">
             <a:extLst xmlns:a="http://schemas.openxmlformats.org/drawingml/2006/main">
               <a:ext uri="{FF2B5EF4-FFF2-40B4-BE49-F238E27FC236}">
-                <a16:creationId xmlns:a16="http://schemas.microsoft.com/office/drawing/2014/main" id="{AFE3707C-A65B-426E-894B-A5F22FCB7992}"/>
+                <a16:creationId xmlns:a16="http://schemas.microsoft.com/office/drawing/2014/main" id="{A96E8944-3F33-4610-A3C5-2B2672A0A06B}"/>
               </a:ext>
             </a:extLst>
           </p:cNvPr>
@@ -2453,7 +6045,7 @@
           <p:cNvPr id="2" name="">
             <a:extLst xmlns:a="http://schemas.openxmlformats.org/drawingml/2006/main">
               <a:ext uri="{FF2B5EF4-FFF2-40B4-BE49-F238E27FC236}">
-                <a16:creationId xmlns:a16="http://schemas.microsoft.com/office/drawing/2014/main" id="{50026389-1FA2-4069-BCD2-326FDA53A4DD}"/>
+                <a16:creationId xmlns:a16="http://schemas.microsoft.com/office/drawing/2014/main" id="{1EA81C08-0D5D-486D-889B-0903BC5DAE06}"/>
               </a:ext>
             </a:extLst>
           </p:cNvPr>
@@ -2503,7 +6095,7 @@
           <p:cNvPr id="3" name="">
             <a:extLst xmlns:a="http://schemas.openxmlformats.org/drawingml/2006/main">
               <a:ext uri="{FF2B5EF4-FFF2-40B4-BE49-F238E27FC236}">
-                <a16:creationId xmlns:a16="http://schemas.microsoft.com/office/drawing/2014/main" id="{83C8BB5E-2F00-4D18-98A9-D5C8B9EB9861}"/>
+                <a16:creationId xmlns:a16="http://schemas.microsoft.com/office/drawing/2014/main" id="{004236BF-71A2-44F5-8D59-1D4122F6D148}"/>
               </a:ext>
             </a:extLst>
           </p:cNvPr>
@@ -2553,7 +6145,7 @@
           <p:cNvPr id="4" name="">
             <a:extLst xmlns:a="http://schemas.openxmlformats.org/drawingml/2006/main">
               <a:ext uri="{FF2B5EF4-FFF2-40B4-BE49-F238E27FC236}">
-                <a16:creationId xmlns:a16="http://schemas.microsoft.com/office/drawing/2014/main" id="{4154F595-63A1-4DC7-8455-02150A5E1707}"/>
+                <a16:creationId xmlns:a16="http://schemas.microsoft.com/office/drawing/2014/main" id="{4DD3B37C-9E29-4C19-B540-D140BED8B060}"/>
               </a:ext>
             </a:extLst>
           </p:cNvPr>
@@ -2586,7 +6178,7 @@
           <p:cNvPr id="5" name="">
             <a:extLst xmlns:a="http://schemas.openxmlformats.org/drawingml/2006/main">
               <a:ext uri="{FF2B5EF4-FFF2-40B4-BE49-F238E27FC236}">
-                <a16:creationId xmlns:a16="http://schemas.microsoft.com/office/drawing/2014/main" id="{0EA6DD93-218E-4836-A890-23429FFB9E62}"/>
+                <a16:creationId xmlns:a16="http://schemas.microsoft.com/office/drawing/2014/main" id="{8435BCBC-BE9F-478A-8C2A-9940784BDE57}"/>
               </a:ext>
             </a:extLst>
           </p:cNvPr>
@@ -2636,7 +6228,7 @@
           <p:cNvPr id="6" name="">
             <a:extLst xmlns:a="http://schemas.openxmlformats.org/drawingml/2006/main">
               <a:ext uri="{FF2B5EF4-FFF2-40B4-BE49-F238E27FC236}">
-                <a16:creationId xmlns:a16="http://schemas.microsoft.com/office/drawing/2014/main" id="{32C37EF1-DD7C-49AD-BC76-22338CCC3069}"/>
+                <a16:creationId xmlns:a16="http://schemas.microsoft.com/office/drawing/2014/main" id="{3292DFE2-301A-4ABC-8A8B-25DAA965CFD3}"/>
               </a:ext>
             </a:extLst>
           </p:cNvPr>
@@ -2686,7 +6278,7 @@
           <p:cNvPr id="7" name="">
             <a:extLst xmlns:a="http://schemas.openxmlformats.org/drawingml/2006/main">
               <a:ext uri="{FF2B5EF4-FFF2-40B4-BE49-F238E27FC236}">
-                <a16:creationId xmlns:a16="http://schemas.microsoft.com/office/drawing/2014/main" id="{4D8926F6-2A57-40D6-BDF0-03B78846A102}"/>
+                <a16:creationId xmlns:a16="http://schemas.microsoft.com/office/drawing/2014/main" id="{2EC9FF34-8DFD-463F-BC08-CDE535411A15}"/>
               </a:ext>
             </a:extLst>
           </p:cNvPr>
@@ -2734,7 +6326,7 @@
     </p:spTree>
     <p:extLst>
       <p:ext uri="{BB962C8B-B14F-4D97-AF65-F5344CB8AC3E}">
-        <p14:creationId xmlns:p14="http://schemas.microsoft.com/office/powerpoint/2010/main" val="1509233598"/>
+        <p14:creationId xmlns:p14="http://schemas.microsoft.com/office/powerpoint/2010/main" val="1811383209"/>
       </p:ext>
     </p:extLst>
   </p:cSld>
@@ -2765,7 +6357,7 @@
           <p:cNvPr id="16" name="">
             <a:extLst xmlns:a="http://schemas.openxmlformats.org/drawingml/2006/main">
               <a:ext uri="{FF2B5EF4-FFF2-40B4-BE49-F238E27FC236}">
-                <a16:creationId xmlns:a16="http://schemas.microsoft.com/office/drawing/2014/main" id="{33EEA2CA-47A6-4283-8DD0-D5D2F820AB61}"/>
+                <a16:creationId xmlns:a16="http://schemas.microsoft.com/office/drawing/2014/main" id="{354AD9B7-F2E1-411E-BEF3-A78D74C5EFA0}"/>
               </a:ext>
             </a:extLst>
           </p:cNvPr>
@@ -2796,7 +6388,7 @@
           <p:cNvPr id="2" name="">
             <a:extLst xmlns:a="http://schemas.openxmlformats.org/drawingml/2006/main">
               <a:ext uri="{FF2B5EF4-FFF2-40B4-BE49-F238E27FC236}">
-                <a16:creationId xmlns:a16="http://schemas.microsoft.com/office/drawing/2014/main" id="{22F9411A-AEBC-42DC-93F2-466BF221B755}"/>
+                <a16:creationId xmlns:a16="http://schemas.microsoft.com/office/drawing/2014/main" id="{DFE3E450-06A5-4CBE-8E52-8096D880F8E8}"/>
               </a:ext>
             </a:extLst>
           </p:cNvPr>
@@ -2846,7 +6438,7 @@
           <p:cNvPr id="3" name="">
             <a:extLst xmlns:a="http://schemas.openxmlformats.org/drawingml/2006/main">
               <a:ext uri="{FF2B5EF4-FFF2-40B4-BE49-F238E27FC236}">
-                <a16:creationId xmlns:a16="http://schemas.microsoft.com/office/drawing/2014/main" id="{EA6C21A0-927D-4FBD-88E7-028387764347}"/>
+                <a16:creationId xmlns:a16="http://schemas.microsoft.com/office/drawing/2014/main" id="{05D18DA2-2232-4A0D-B99C-1FD22930F2EE}"/>
               </a:ext>
             </a:extLst>
           </p:cNvPr>
@@ -2896,7 +6488,7 @@
           <p:cNvPr id="4" name="">
             <a:extLst xmlns:a="http://schemas.openxmlformats.org/drawingml/2006/main">
               <a:ext uri="{FF2B5EF4-FFF2-40B4-BE49-F238E27FC236}">
-                <a16:creationId xmlns:a16="http://schemas.microsoft.com/office/drawing/2014/main" id="{A3526583-EF49-4333-9CA2-6F5B82D36F11}"/>
+                <a16:creationId xmlns:a16="http://schemas.microsoft.com/office/drawing/2014/main" id="{6307A0C0-4CB7-452F-9311-D1A2D927DF2D}"/>
               </a:ext>
             </a:extLst>
           </p:cNvPr>
@@ -2929,7 +6521,7 @@
           <p:cNvPr id="5" name="">
             <a:extLst xmlns:a="http://schemas.openxmlformats.org/drawingml/2006/main">
               <a:ext uri="{FF2B5EF4-FFF2-40B4-BE49-F238E27FC236}">
-                <a16:creationId xmlns:a16="http://schemas.microsoft.com/office/drawing/2014/main" id="{852BE1CE-8BE1-4790-BE8B-0E5E2AAE9BA5}"/>
+                <a16:creationId xmlns:a16="http://schemas.microsoft.com/office/drawing/2014/main" id="{A295E4AF-C4E9-4779-B61C-7C5101DAB7FC}"/>
               </a:ext>
             </a:extLst>
           </p:cNvPr>
@@ -2979,7 +6571,7 @@
           <p:cNvPr id="6" name="">
             <a:extLst xmlns:a="http://schemas.openxmlformats.org/drawingml/2006/main">
               <a:ext uri="{FF2B5EF4-FFF2-40B4-BE49-F238E27FC236}">
-                <a16:creationId xmlns:a16="http://schemas.microsoft.com/office/drawing/2014/main" id="{724171FB-4635-4E6B-B23C-4B84B6D860EB}"/>
+                <a16:creationId xmlns:a16="http://schemas.microsoft.com/office/drawing/2014/main" id="{86214D67-E261-40B6-871D-85D09A6E4A2D}"/>
               </a:ext>
             </a:extLst>
           </p:cNvPr>
@@ -3029,7 +6621,7 @@
           <p:cNvPr id="7" name="">
             <a:extLst xmlns:a="http://schemas.openxmlformats.org/drawingml/2006/main">
               <a:ext uri="{FF2B5EF4-FFF2-40B4-BE49-F238E27FC236}">
-                <a16:creationId xmlns:a16="http://schemas.microsoft.com/office/drawing/2014/main" id="{2B1CA214-D724-4206-A52F-464CB00A2BE8}"/>
+                <a16:creationId xmlns:a16="http://schemas.microsoft.com/office/drawing/2014/main" id="{CA0B044D-0518-449F-A1FB-0F594608ED6F}"/>
               </a:ext>
             </a:extLst>
           </p:cNvPr>
@@ -3062,7 +6654,7 @@
           <p:cNvPr id="8" name="">
             <a:extLst xmlns:a="http://schemas.openxmlformats.org/drawingml/2006/main">
               <a:ext uri="{FF2B5EF4-FFF2-40B4-BE49-F238E27FC236}">
-                <a16:creationId xmlns:a16="http://schemas.microsoft.com/office/drawing/2014/main" id="{952F573A-B46E-492B-9E3C-866FCA6140A3}"/>
+                <a16:creationId xmlns:a16="http://schemas.microsoft.com/office/drawing/2014/main" id="{5C8377B2-F9E5-4DCA-8388-53006D3EB498}"/>
               </a:ext>
             </a:extLst>
           </p:cNvPr>
@@ -3112,7 +6704,7 @@
           <p:cNvPr id="9" name="">
             <a:extLst xmlns:a="http://schemas.openxmlformats.org/drawingml/2006/main">
               <a:ext uri="{FF2B5EF4-FFF2-40B4-BE49-F238E27FC236}">
-                <a16:creationId xmlns:a16="http://schemas.microsoft.com/office/drawing/2014/main" id="{8E58EBA3-B8CD-4BC8-A45F-8898288FBF21}"/>
+                <a16:creationId xmlns:a16="http://schemas.microsoft.com/office/drawing/2014/main" id="{12BD7DCA-26FC-4D53-9092-76C370B91A40}"/>
               </a:ext>
             </a:extLst>
           </p:cNvPr>
@@ -3162,7 +6754,7 @@
           <p:cNvPr id="10" name="">
             <a:extLst xmlns:a="http://schemas.openxmlformats.org/drawingml/2006/main">
               <a:ext uri="{FF2B5EF4-FFF2-40B4-BE49-F238E27FC236}">
-                <a16:creationId xmlns:a16="http://schemas.microsoft.com/office/drawing/2014/main" id="{E635C6EB-25CD-47B8-ADE1-F2D18A2673ED}"/>
+                <a16:creationId xmlns:a16="http://schemas.microsoft.com/office/drawing/2014/main" id="{E11F15F8-D6BB-4419-8FD2-87E8228F449C}"/>
               </a:ext>
             </a:extLst>
           </p:cNvPr>
@@ -3195,7 +6787,7 @@
           <p:cNvPr id="11" name="">
             <a:extLst xmlns:a="http://schemas.openxmlformats.org/drawingml/2006/main">
               <a:ext uri="{FF2B5EF4-FFF2-40B4-BE49-F238E27FC236}">
-                <a16:creationId xmlns:a16="http://schemas.microsoft.com/office/drawing/2014/main" id="{3014DD6F-F0A0-475C-A53C-D2E29B95C894}"/>
+                <a16:creationId xmlns:a16="http://schemas.microsoft.com/office/drawing/2014/main" id="{7D9099A4-1392-4583-82D8-E1CF64519057}"/>
               </a:ext>
             </a:extLst>
           </p:cNvPr>
@@ -3245,7 +6837,7 @@
           <p:cNvPr id="12" name="">
             <a:extLst xmlns:a="http://schemas.openxmlformats.org/drawingml/2006/main">
               <a:ext uri="{FF2B5EF4-FFF2-40B4-BE49-F238E27FC236}">
-                <a16:creationId xmlns:a16="http://schemas.microsoft.com/office/drawing/2014/main" id="{840150D5-4DD9-49E5-B21E-3BA9DE91D7C2}"/>
+                <a16:creationId xmlns:a16="http://schemas.microsoft.com/office/drawing/2014/main" id="{03E4DFB9-9061-4B17-82B8-63196C6EC303}"/>
               </a:ext>
             </a:extLst>
           </p:cNvPr>
@@ -3295,7 +6887,7 @@
           <p:cNvPr id="13" name="">
             <a:extLst xmlns:a="http://schemas.openxmlformats.org/drawingml/2006/main">
               <a:ext uri="{FF2B5EF4-FFF2-40B4-BE49-F238E27FC236}">
-                <a16:creationId xmlns:a16="http://schemas.microsoft.com/office/drawing/2014/main" id="{1FFC5BF1-CB43-4CA7-8A38-F64767D2671A}"/>
+                <a16:creationId xmlns:a16="http://schemas.microsoft.com/office/drawing/2014/main" id="{FEE9E4B7-3689-4A30-A9E6-C106887846B2}"/>
               </a:ext>
             </a:extLst>
           </p:cNvPr>
@@ -3328,7 +6920,7 @@
           <p:cNvPr id="14" name="">
             <a:extLst xmlns:a="http://schemas.openxmlformats.org/drawingml/2006/main">
               <a:ext uri="{FF2B5EF4-FFF2-40B4-BE49-F238E27FC236}">
-                <a16:creationId xmlns:a16="http://schemas.microsoft.com/office/drawing/2014/main" id="{6F975300-1DEE-41BD-8188-925277E6C10E}"/>
+                <a16:creationId xmlns:a16="http://schemas.microsoft.com/office/drawing/2014/main" id="{A1C87003-C184-451E-BE66-1A8184888497}"/>
               </a:ext>
             </a:extLst>
           </p:cNvPr>
@@ -3378,7 +6970,7 @@
           <p:cNvPr id="15" name="">
             <a:extLst xmlns:a="http://schemas.openxmlformats.org/drawingml/2006/main">
               <a:ext uri="{FF2B5EF4-FFF2-40B4-BE49-F238E27FC236}">
-                <a16:creationId xmlns:a16="http://schemas.microsoft.com/office/drawing/2014/main" id="{9E2457EA-0CFC-4F84-A454-0382D4F9E11C}"/>
+                <a16:creationId xmlns:a16="http://schemas.microsoft.com/office/drawing/2014/main" id="{60A9A2D6-8092-4F75-9E3A-A77E360748E7}"/>
               </a:ext>
             </a:extLst>
           </p:cNvPr>
@@ -3426,7 +7018,7 @@
     </p:spTree>
     <p:extLst>
       <p:ext uri="{BB962C8B-B14F-4D97-AF65-F5344CB8AC3E}">
-        <p14:creationId xmlns:p14="http://schemas.microsoft.com/office/powerpoint/2010/main" val="806889764"/>
+        <p14:creationId xmlns:p14="http://schemas.microsoft.com/office/powerpoint/2010/main" val="836659832"/>
       </p:ext>
     </p:extLst>
   </p:cSld>
@@ -3457,7 +7049,7 @@
           <p:cNvPr id="8" name="">
             <a:extLst xmlns:a="http://schemas.openxmlformats.org/drawingml/2006/main">
               <a:ext uri="{FF2B5EF4-FFF2-40B4-BE49-F238E27FC236}">
-                <a16:creationId xmlns:a16="http://schemas.microsoft.com/office/drawing/2014/main" id="{ACE2BEED-2187-4F4D-8438-33CC24BE6902}"/>
+                <a16:creationId xmlns:a16="http://schemas.microsoft.com/office/drawing/2014/main" id="{B0A7B1C3-E839-4C7B-A858-695E58AF5804}"/>
               </a:ext>
             </a:extLst>
           </p:cNvPr>
@@ -3488,7 +7080,7 @@
           <p:cNvPr id="2" name="">
             <a:extLst xmlns:a="http://schemas.openxmlformats.org/drawingml/2006/main">
               <a:ext uri="{FF2B5EF4-FFF2-40B4-BE49-F238E27FC236}">
-                <a16:creationId xmlns:a16="http://schemas.microsoft.com/office/drawing/2014/main" id="{C25FD698-6073-46E3-8117-2B3C84B1BA02}"/>
+                <a16:creationId xmlns:a16="http://schemas.microsoft.com/office/drawing/2014/main" id="{425E890E-50F9-461E-B3A6-5B8F1073C4EB}"/>
               </a:ext>
             </a:extLst>
           </p:cNvPr>
@@ -3538,7 +7130,7 @@
           <p:cNvPr id="3" name="">
             <a:extLst xmlns:a="http://schemas.openxmlformats.org/drawingml/2006/main">
               <a:ext uri="{FF2B5EF4-FFF2-40B4-BE49-F238E27FC236}">
-                <a16:creationId xmlns:a16="http://schemas.microsoft.com/office/drawing/2014/main" id="{07FF3B6A-8AF2-41BB-8D64-5FD641193432}"/>
+                <a16:creationId xmlns:a16="http://schemas.microsoft.com/office/drawing/2014/main" id="{7B08D80A-6FA0-4E71-BEF3-F624D7EACE81}"/>
               </a:ext>
             </a:extLst>
           </p:cNvPr>
@@ -3588,7 +7180,7 @@
           <p:cNvPr id="4" name="">
             <a:extLst xmlns:a="http://schemas.openxmlformats.org/drawingml/2006/main">
               <a:ext uri="{FF2B5EF4-FFF2-40B4-BE49-F238E27FC236}">
-                <a16:creationId xmlns:a16="http://schemas.microsoft.com/office/drawing/2014/main" id="{E3FAF4AC-8238-4FB7-95F7-A6C5481E88BA}"/>
+                <a16:creationId xmlns:a16="http://schemas.microsoft.com/office/drawing/2014/main" id="{0A84C817-55FD-47B6-B8FA-6B505A75455F}"/>
               </a:ext>
             </a:extLst>
           </p:cNvPr>
@@ -3623,7 +7215,7 @@
           <p:cNvPr id="5" name="">
             <a:extLst xmlns:a="http://schemas.openxmlformats.org/drawingml/2006/main">
               <a:ext uri="{FF2B5EF4-FFF2-40B4-BE49-F238E27FC236}">
-                <a16:creationId xmlns:a16="http://schemas.microsoft.com/office/drawing/2014/main" id="{81D91928-C63C-4D47-9BEF-939FD2C65068}"/>
+                <a16:creationId xmlns:a16="http://schemas.microsoft.com/office/drawing/2014/main" id="{B9AE7E2C-E920-40DA-83C8-A3765D0AC362}"/>
               </a:ext>
             </a:extLst>
           </p:cNvPr>
@@ -3673,7 +7265,7 @@
           <p:cNvPr id="6" name="">
             <a:extLst xmlns:a="http://schemas.openxmlformats.org/drawingml/2006/main">
               <a:ext uri="{FF2B5EF4-FFF2-40B4-BE49-F238E27FC236}">
-                <a16:creationId xmlns:a16="http://schemas.microsoft.com/office/drawing/2014/main" id="{A389DFEC-5276-4034-898A-9F5921BD8079}"/>
+                <a16:creationId xmlns:a16="http://schemas.microsoft.com/office/drawing/2014/main" id="{F399F776-411B-4871-84D9-A53EE4500465}"/>
               </a:ext>
             </a:extLst>
           </p:cNvPr>
@@ -3740,7 +7332,7 @@
           <p:cNvPr id="7" name="">
             <a:extLst xmlns:a="http://schemas.openxmlformats.org/drawingml/2006/main">
               <a:ext uri="{FF2B5EF4-FFF2-40B4-BE49-F238E27FC236}">
-                <a16:creationId xmlns:a16="http://schemas.microsoft.com/office/drawing/2014/main" id="{04B4F4B3-49EC-4569-9A46-2EBD38E98D80}"/>
+                <a16:creationId xmlns:a16="http://schemas.microsoft.com/office/drawing/2014/main" id="{3EEA9D65-7A3A-43DC-BCC6-7800771189BC}"/>
               </a:ext>
             </a:extLst>
           </p:cNvPr>
@@ -3788,7 +7380,7 @@
     </p:spTree>
     <p:extLst>
       <p:ext uri="{BB962C8B-B14F-4D97-AF65-F5344CB8AC3E}">
-        <p14:creationId xmlns:p14="http://schemas.microsoft.com/office/powerpoint/2010/main" val="556917905"/>
+        <p14:creationId xmlns:p14="http://schemas.microsoft.com/office/powerpoint/2010/main" val="2027643460"/>
       </p:ext>
     </p:extLst>
   </p:cSld>
@@ -3819,7 +7411,7 @@
           <p:cNvPr id="18" name="">
             <a:extLst xmlns:a="http://schemas.openxmlformats.org/drawingml/2006/main">
               <a:ext uri="{FF2B5EF4-FFF2-40B4-BE49-F238E27FC236}">
-                <a16:creationId xmlns:a16="http://schemas.microsoft.com/office/drawing/2014/main" id="{8E26351C-104F-4021-BF48-29C350A0AD06}"/>
+                <a16:creationId xmlns:a16="http://schemas.microsoft.com/office/drawing/2014/main" id="{65BDFD66-C4CC-4014-AE80-0532CD5B969B}"/>
               </a:ext>
             </a:extLst>
           </p:cNvPr>
@@ -3850,7 +7442,7 @@
           <p:cNvPr id="2" name="">
             <a:extLst xmlns:a="http://schemas.openxmlformats.org/drawingml/2006/main">
               <a:ext uri="{FF2B5EF4-FFF2-40B4-BE49-F238E27FC236}">
-                <a16:creationId xmlns:a16="http://schemas.microsoft.com/office/drawing/2014/main" id="{013D5499-8570-4CF8-A257-89994FB46C70}"/>
+                <a16:creationId xmlns:a16="http://schemas.microsoft.com/office/drawing/2014/main" id="{39FDA9C7-DBF5-4528-9FBE-A4A7CA898D77}"/>
               </a:ext>
             </a:extLst>
           </p:cNvPr>
@@ -3900,7 +7492,7 @@
           <p:cNvPr id="3" name="">
             <a:extLst xmlns:a="http://schemas.openxmlformats.org/drawingml/2006/main">
               <a:ext uri="{FF2B5EF4-FFF2-40B4-BE49-F238E27FC236}">
-                <a16:creationId xmlns:a16="http://schemas.microsoft.com/office/drawing/2014/main" id="{F7525A51-41C9-415B-9F2D-456BA447F276}"/>
+                <a16:creationId xmlns:a16="http://schemas.microsoft.com/office/drawing/2014/main" id="{F5CE9BA9-DC0E-44B9-9FCA-42EA29D638E6}"/>
               </a:ext>
             </a:extLst>
           </p:cNvPr>
@@ -3950,7 +7542,7 @@
           <p:cNvPr id="4" name="">
             <a:extLst xmlns:a="http://schemas.openxmlformats.org/drawingml/2006/main">
               <a:ext uri="{FF2B5EF4-FFF2-40B4-BE49-F238E27FC236}">
-                <a16:creationId xmlns:a16="http://schemas.microsoft.com/office/drawing/2014/main" id="{D480974A-68CF-4649-A5DD-E8317B7EB87D}"/>
+                <a16:creationId xmlns:a16="http://schemas.microsoft.com/office/drawing/2014/main" id="{F2D1F672-3D5E-41CD-AE47-1E7EC8DBB16B}"/>
               </a:ext>
             </a:extLst>
           </p:cNvPr>
@@ -3983,7 +7575,7 @@
           <p:cNvPr id="5" name="">
             <a:extLst xmlns:a="http://schemas.openxmlformats.org/drawingml/2006/main">
               <a:ext uri="{FF2B5EF4-FFF2-40B4-BE49-F238E27FC236}">
-                <a16:creationId xmlns:a16="http://schemas.microsoft.com/office/drawing/2014/main" id="{CEF3A757-3751-400F-BFCD-5B6C6692F087}"/>
+                <a16:creationId xmlns:a16="http://schemas.microsoft.com/office/drawing/2014/main" id="{DA349602-6EDB-41FC-A957-187A9C0B07C6}"/>
               </a:ext>
             </a:extLst>
           </p:cNvPr>
@@ -4033,7 +7625,7 @@
           <p:cNvPr id="6" name="">
             <a:extLst xmlns:a="http://schemas.openxmlformats.org/drawingml/2006/main">
               <a:ext uri="{FF2B5EF4-FFF2-40B4-BE49-F238E27FC236}">
-                <a16:creationId xmlns:a16="http://schemas.microsoft.com/office/drawing/2014/main" id="{46D2BC7A-FAD5-4802-B250-0C9D3FEAA88D}"/>
+                <a16:creationId xmlns:a16="http://schemas.microsoft.com/office/drawing/2014/main" id="{FC669F5B-1526-4F9A-B845-F9EA7C345F02}"/>
               </a:ext>
             </a:extLst>
           </p:cNvPr>
@@ -4083,7 +7675,7 @@
           <p:cNvPr id="7" name="">
             <a:extLst xmlns:a="http://schemas.openxmlformats.org/drawingml/2006/main">
               <a:ext uri="{FF2B5EF4-FFF2-40B4-BE49-F238E27FC236}">
-                <a16:creationId xmlns:a16="http://schemas.microsoft.com/office/drawing/2014/main" id="{39113964-9129-4AAC-B26B-C866300D4C3D}"/>
+                <a16:creationId xmlns:a16="http://schemas.microsoft.com/office/drawing/2014/main" id="{70512526-4C96-4007-9FC5-BBBB8E0C059F}"/>
               </a:ext>
             </a:extLst>
           </p:cNvPr>
@@ -4116,7 +7708,7 @@
           <p:cNvPr id="8" name="">
             <a:extLst xmlns:a="http://schemas.openxmlformats.org/drawingml/2006/main">
               <a:ext uri="{FF2B5EF4-FFF2-40B4-BE49-F238E27FC236}">
-                <a16:creationId xmlns:a16="http://schemas.microsoft.com/office/drawing/2014/main" id="{12BADD92-564E-4643-A91A-DC55853EFCBB}"/>
+                <a16:creationId xmlns:a16="http://schemas.microsoft.com/office/drawing/2014/main" id="{2E4C5FE1-7913-4618-9A8C-09A379A10441}"/>
               </a:ext>
             </a:extLst>
           </p:cNvPr>
@@ -4166,7 +7758,7 @@
           <p:cNvPr id="9" name="">
             <a:extLst xmlns:a="http://schemas.openxmlformats.org/drawingml/2006/main">
               <a:ext uri="{FF2B5EF4-FFF2-40B4-BE49-F238E27FC236}">
-                <a16:creationId xmlns:a16="http://schemas.microsoft.com/office/drawing/2014/main" id="{32BC04A5-A5A9-4C0E-894C-0881916054A3}"/>
+                <a16:creationId xmlns:a16="http://schemas.microsoft.com/office/drawing/2014/main" id="{00410E3D-29E2-4E94-B795-27E35C7F6182}"/>
               </a:ext>
             </a:extLst>
           </p:cNvPr>
@@ -4216,7 +7808,7 @@
           <p:cNvPr id="10" name="">
             <a:extLst xmlns:a="http://schemas.openxmlformats.org/drawingml/2006/main">
               <a:ext uri="{FF2B5EF4-FFF2-40B4-BE49-F238E27FC236}">
-                <a16:creationId xmlns:a16="http://schemas.microsoft.com/office/drawing/2014/main" id="{3FAE5D4F-60BA-4C86-A00C-FE697DB13E3B}"/>
+                <a16:creationId xmlns:a16="http://schemas.microsoft.com/office/drawing/2014/main" id="{4FC8D39D-4336-48A5-BD74-E7BFB6438E19}"/>
               </a:ext>
             </a:extLst>
           </p:cNvPr>
@@ -4249,7 +7841,7 @@
           <p:cNvPr id="11" name="">
             <a:extLst xmlns:a="http://schemas.openxmlformats.org/drawingml/2006/main">
               <a:ext uri="{FF2B5EF4-FFF2-40B4-BE49-F238E27FC236}">
-                <a16:creationId xmlns:a16="http://schemas.microsoft.com/office/drawing/2014/main" id="{21CF897B-711B-41F8-8C9C-894AA2D3BE5B}"/>
+                <a16:creationId xmlns:a16="http://schemas.microsoft.com/office/drawing/2014/main" id="{D6D8FFEE-4E8B-4D69-9622-ADF9CE5C8844}"/>
               </a:ext>
             </a:extLst>
           </p:cNvPr>
@@ -4299,7 +7891,7 @@
           <p:cNvPr id="12" name="">
             <a:extLst xmlns:a="http://schemas.openxmlformats.org/drawingml/2006/main">
               <a:ext uri="{FF2B5EF4-FFF2-40B4-BE49-F238E27FC236}">
-                <a16:creationId xmlns:a16="http://schemas.microsoft.com/office/drawing/2014/main" id="{9C0B8806-A833-4845-9628-75C01C8C1B72}"/>
+                <a16:creationId xmlns:a16="http://schemas.microsoft.com/office/drawing/2014/main" id="{1E4E09B0-630F-4D8A-A132-50D1B7909D96}"/>
               </a:ext>
             </a:extLst>
           </p:cNvPr>
@@ -4349,7 +7941,7 @@
           <p:cNvPr id="13" name="">
             <a:extLst xmlns:a="http://schemas.openxmlformats.org/drawingml/2006/main">
               <a:ext uri="{FF2B5EF4-FFF2-40B4-BE49-F238E27FC236}">
-                <a16:creationId xmlns:a16="http://schemas.microsoft.com/office/drawing/2014/main" id="{28DE1DE2-5BE5-45F6-9934-86A8588D52C4}"/>
+                <a16:creationId xmlns:a16="http://schemas.microsoft.com/office/drawing/2014/main" id="{DDFE6676-FC37-4F7A-8A22-31AD45355938}"/>
               </a:ext>
             </a:extLst>
           </p:cNvPr>
@@ -4382,7 +7974,7 @@
           <p:cNvPr id="14" name="">
             <a:extLst xmlns:a="http://schemas.openxmlformats.org/drawingml/2006/main">
               <a:ext uri="{FF2B5EF4-FFF2-40B4-BE49-F238E27FC236}">
-                <a16:creationId xmlns:a16="http://schemas.microsoft.com/office/drawing/2014/main" id="{096C96A9-B5F3-4C66-ACA0-9DF3FCB24E9B}"/>
+                <a16:creationId xmlns:a16="http://schemas.microsoft.com/office/drawing/2014/main" id="{EDF2F734-91D2-4BE0-8DF2-7A92D63730EF}"/>
               </a:ext>
             </a:extLst>
           </p:cNvPr>
@@ -4432,7 +8024,7 @@
           <p:cNvPr id="15" name="">
             <a:extLst xmlns:a="http://schemas.openxmlformats.org/drawingml/2006/main">
               <a:ext uri="{FF2B5EF4-FFF2-40B4-BE49-F238E27FC236}">
-                <a16:creationId xmlns:a16="http://schemas.microsoft.com/office/drawing/2014/main" id="{B70B54E1-6147-4912-AE00-743F4A107661}"/>
+                <a16:creationId xmlns:a16="http://schemas.microsoft.com/office/drawing/2014/main" id="{BD0A24DD-EA92-4485-B621-0633781A04CF}"/>
               </a:ext>
             </a:extLst>
           </p:cNvPr>
@@ -4482,7 +8074,7 @@
           <p:cNvPr id="16" name="">
             <a:extLst xmlns:a="http://schemas.openxmlformats.org/drawingml/2006/main">
               <a:ext uri="{FF2B5EF4-FFF2-40B4-BE49-F238E27FC236}">
-                <a16:creationId xmlns:a16="http://schemas.microsoft.com/office/drawing/2014/main" id="{3B86347D-E49F-474C-802D-DB28D915A6C0}"/>
+                <a16:creationId xmlns:a16="http://schemas.microsoft.com/office/drawing/2014/main" id="{F2EC6944-1975-4923-9C8F-6B2136DA5B76}"/>
               </a:ext>
             </a:extLst>
           </p:cNvPr>
@@ -4515,7 +8107,7 @@
           <p:cNvPr id="17" name="">
             <a:extLst xmlns:a="http://schemas.openxmlformats.org/drawingml/2006/main">
               <a:ext uri="{FF2B5EF4-FFF2-40B4-BE49-F238E27FC236}">
-                <a16:creationId xmlns:a16="http://schemas.microsoft.com/office/drawing/2014/main" id="{E15C0657-503B-4881-9896-DD6F3EA7F97F}"/>
+                <a16:creationId xmlns:a16="http://schemas.microsoft.com/office/drawing/2014/main" id="{6A894ABD-5D46-4F2D-82A6-9B252E1A9D54}"/>
               </a:ext>
             </a:extLst>
           </p:cNvPr>
@@ -4563,7 +8155,7 @@
     </p:spTree>
     <p:extLst>
       <p:ext uri="{BB962C8B-B14F-4D97-AF65-F5344CB8AC3E}">
-        <p14:creationId xmlns:p14="http://schemas.microsoft.com/office/powerpoint/2010/main" val="176627511"/>
+        <p14:creationId xmlns:p14="http://schemas.microsoft.com/office/powerpoint/2010/main" val="1439612984"/>
       </p:ext>
     </p:extLst>
   </p:cSld>
@@ -4594,7 +8186,7 @@
           <p:cNvPr id="8" name="">
             <a:extLst xmlns:a="http://schemas.openxmlformats.org/drawingml/2006/main">
               <a:ext uri="{FF2B5EF4-FFF2-40B4-BE49-F238E27FC236}">
-                <a16:creationId xmlns:a16="http://schemas.microsoft.com/office/drawing/2014/main" id="{CE274C78-5872-4689-BD12-4D1AD60D2525}"/>
+                <a16:creationId xmlns:a16="http://schemas.microsoft.com/office/drawing/2014/main" id="{60E3EE35-4FD9-49F8-89A2-AB7ACADCC522}"/>
               </a:ext>
             </a:extLst>
           </p:cNvPr>
@@ -4625,7 +8217,7 @@
           <p:cNvPr id="2" name="">
             <a:extLst xmlns:a="http://schemas.openxmlformats.org/drawingml/2006/main">
               <a:ext uri="{FF2B5EF4-FFF2-40B4-BE49-F238E27FC236}">
-                <a16:creationId xmlns:a16="http://schemas.microsoft.com/office/drawing/2014/main" id="{A54660D8-4FB9-4946-B7F4-E9B54BF696E3}"/>
+                <a16:creationId xmlns:a16="http://schemas.microsoft.com/office/drawing/2014/main" id="{CC7FC865-EBBE-4590-B2B3-AE17730196B0}"/>
               </a:ext>
             </a:extLst>
           </p:cNvPr>
@@ -4675,7 +8267,7 @@
           <p:cNvPr id="3" name="">
             <a:extLst xmlns:a="http://schemas.openxmlformats.org/drawingml/2006/main">
               <a:ext uri="{FF2B5EF4-FFF2-40B4-BE49-F238E27FC236}">
-                <a16:creationId xmlns:a16="http://schemas.microsoft.com/office/drawing/2014/main" id="{97B43BF9-BD06-41BB-8B3C-7FCAECC744EC}"/>
+                <a16:creationId xmlns:a16="http://schemas.microsoft.com/office/drawing/2014/main" id="{D356C3F3-F2A1-4F96-BE57-04ABD392623A}"/>
               </a:ext>
             </a:extLst>
           </p:cNvPr>
@@ -4725,7 +8317,7 @@
           <p:cNvPr id="4" name="">
             <a:extLst xmlns:a="http://schemas.openxmlformats.org/drawingml/2006/main">
               <a:ext uri="{FF2B5EF4-FFF2-40B4-BE49-F238E27FC236}">
-                <a16:creationId xmlns:a16="http://schemas.microsoft.com/office/drawing/2014/main" id="{1B211877-C163-47A8-8F4E-504A8E1F8CCC}"/>
+                <a16:creationId xmlns:a16="http://schemas.microsoft.com/office/drawing/2014/main" id="{756D611C-8E68-4596-BAD9-11A0C90F044C}"/>
               </a:ext>
             </a:extLst>
           </p:cNvPr>
@@ -4758,7 +8350,7 @@
           <p:cNvPr id="5" name="">
             <a:extLst xmlns:a="http://schemas.openxmlformats.org/drawingml/2006/main">
               <a:ext uri="{FF2B5EF4-FFF2-40B4-BE49-F238E27FC236}">
-                <a16:creationId xmlns:a16="http://schemas.microsoft.com/office/drawing/2014/main" id="{AE6F3921-249E-4319-B3AC-D4F8825CDB27}"/>
+                <a16:creationId xmlns:a16="http://schemas.microsoft.com/office/drawing/2014/main" id="{E5E41D4D-5B8F-41B8-A27B-CA5305AEDCEA}"/>
               </a:ext>
             </a:extLst>
           </p:cNvPr>
@@ -4808,7 +8400,7 @@
           <p:cNvPr id="6" name="">
             <a:extLst xmlns:a="http://schemas.openxmlformats.org/drawingml/2006/main">
               <a:ext uri="{FF2B5EF4-FFF2-40B4-BE49-F238E27FC236}">
-                <a16:creationId xmlns:a16="http://schemas.microsoft.com/office/drawing/2014/main" id="{E5ECB8B6-7AC3-4BD0-B0DB-5F5BD7394101}"/>
+                <a16:creationId xmlns:a16="http://schemas.microsoft.com/office/drawing/2014/main" id="{AECE7170-286C-45CE-B876-CE0741FDEF6D}"/>
               </a:ext>
             </a:extLst>
           </p:cNvPr>
@@ -4858,7 +8450,7 @@
           <p:cNvPr id="7" name="">
             <a:extLst xmlns:a="http://schemas.openxmlformats.org/drawingml/2006/main">
               <a:ext uri="{FF2B5EF4-FFF2-40B4-BE49-F238E27FC236}">
-                <a16:creationId xmlns:a16="http://schemas.microsoft.com/office/drawing/2014/main" id="{BE2E23CD-E43C-47D7-9E97-BA5E8B36210D}"/>
+                <a16:creationId xmlns:a16="http://schemas.microsoft.com/office/drawing/2014/main" id="{7DA43EBF-1313-4123-98E6-A54FF7EFDE46}"/>
               </a:ext>
             </a:extLst>
           </p:cNvPr>
@@ -4906,7 +8498,7 @@
     </p:spTree>
     <p:extLst>
       <p:ext uri="{BB962C8B-B14F-4D97-AF65-F5344CB8AC3E}">
-        <p14:creationId xmlns:p14="http://schemas.microsoft.com/office/powerpoint/2010/main" val="1992581817"/>
+        <p14:creationId xmlns:p14="http://schemas.microsoft.com/office/powerpoint/2010/main" val="803479045"/>
       </p:ext>
     </p:extLst>
   </p:cSld>
@@ -4937,7 +8529,7 @@
           <p:cNvPr id="14" name="">
             <a:extLst xmlns:a="http://schemas.openxmlformats.org/drawingml/2006/main">
               <a:ext uri="{FF2B5EF4-FFF2-40B4-BE49-F238E27FC236}">
-                <a16:creationId xmlns:a16="http://schemas.microsoft.com/office/drawing/2014/main" id="{D26F842B-B35F-4C5E-97E6-83F4A0BBE4FE}"/>
+                <a16:creationId xmlns:a16="http://schemas.microsoft.com/office/drawing/2014/main" id="{2EDA4232-CAC9-48C8-95B8-D9065A3B3394}"/>
               </a:ext>
             </a:extLst>
           </p:cNvPr>
@@ -4968,7 +8560,7 @@
           <p:cNvPr id="2" name="">
             <a:extLst xmlns:a="http://schemas.openxmlformats.org/drawingml/2006/main">
               <a:ext uri="{FF2B5EF4-FFF2-40B4-BE49-F238E27FC236}">
-                <a16:creationId xmlns:a16="http://schemas.microsoft.com/office/drawing/2014/main" id="{1082A673-B478-446A-B851-690EABB385A1}"/>
+                <a16:creationId xmlns:a16="http://schemas.microsoft.com/office/drawing/2014/main" id="{957C4402-B64D-4DEF-B29D-E617DA748884}"/>
               </a:ext>
             </a:extLst>
           </p:cNvPr>
@@ -5018,7 +8610,7 @@
           <p:cNvPr id="3" name="">
             <a:extLst xmlns:a="http://schemas.openxmlformats.org/drawingml/2006/main">
               <a:ext uri="{FF2B5EF4-FFF2-40B4-BE49-F238E27FC236}">
-                <a16:creationId xmlns:a16="http://schemas.microsoft.com/office/drawing/2014/main" id="{C82B9F58-FE0C-4543-B478-C4DC19BA1940}"/>
+                <a16:creationId xmlns:a16="http://schemas.microsoft.com/office/drawing/2014/main" id="{1380E41A-270B-4015-9F9F-C4A7A50B7687}"/>
               </a:ext>
             </a:extLst>
           </p:cNvPr>
@@ -5068,7 +8660,7 @@
           <p:cNvPr id="4" name="">
             <a:extLst xmlns:a="http://schemas.openxmlformats.org/drawingml/2006/main">
               <a:ext uri="{FF2B5EF4-FFF2-40B4-BE49-F238E27FC236}">
-                <a16:creationId xmlns:a16="http://schemas.microsoft.com/office/drawing/2014/main" id="{AA4A992E-B137-430E-BB8C-4908F3670962}"/>
+                <a16:creationId xmlns:a16="http://schemas.microsoft.com/office/drawing/2014/main" id="{E820FBDC-4678-462C-8BBC-B4B47055A6A4}"/>
               </a:ext>
             </a:extLst>
           </p:cNvPr>
@@ -5101,7 +8693,7 @@
           <p:cNvPr id="5" name="">
             <a:extLst xmlns:a="http://schemas.openxmlformats.org/drawingml/2006/main">
               <a:ext uri="{FF2B5EF4-FFF2-40B4-BE49-F238E27FC236}">
-                <a16:creationId xmlns:a16="http://schemas.microsoft.com/office/drawing/2014/main" id="{9AAD6AE5-146A-47E5-999A-382A8C476140}"/>
+                <a16:creationId xmlns:a16="http://schemas.microsoft.com/office/drawing/2014/main" id="{94D1F752-586C-4782-A3F5-D7BD7E02F139}"/>
               </a:ext>
             </a:extLst>
           </p:cNvPr>
@@ -5151,7 +8743,7 @@
           <p:cNvPr id="6" name="">
             <a:extLst xmlns:a="http://schemas.openxmlformats.org/drawingml/2006/main">
               <a:ext uri="{FF2B5EF4-FFF2-40B4-BE49-F238E27FC236}">
-                <a16:creationId xmlns:a16="http://schemas.microsoft.com/office/drawing/2014/main" id="{AA0A858C-3824-4E1A-B660-A6F9E1BDDC43}"/>
+                <a16:creationId xmlns:a16="http://schemas.microsoft.com/office/drawing/2014/main" id="{5EA8A88F-041E-4D04-B2D3-C00C3826029D}"/>
               </a:ext>
             </a:extLst>
           </p:cNvPr>
@@ -5201,7 +8793,7 @@
           <p:cNvPr id="7" name="">
             <a:extLst xmlns:a="http://schemas.openxmlformats.org/drawingml/2006/main">
               <a:ext uri="{FF2B5EF4-FFF2-40B4-BE49-F238E27FC236}">
-                <a16:creationId xmlns:a16="http://schemas.microsoft.com/office/drawing/2014/main" id="{FC23877A-8EE1-41D2-B19B-B2C8D84CCB99}"/>
+                <a16:creationId xmlns:a16="http://schemas.microsoft.com/office/drawing/2014/main" id="{C0BAA359-F8D9-4BE1-916E-2A8DFB72D0A8}"/>
               </a:ext>
             </a:extLst>
           </p:cNvPr>
@@ -5234,7 +8826,7 @@
           <p:cNvPr id="8" name="">
             <a:extLst xmlns:a="http://schemas.openxmlformats.org/drawingml/2006/main">
               <a:ext uri="{FF2B5EF4-FFF2-40B4-BE49-F238E27FC236}">
-                <a16:creationId xmlns:a16="http://schemas.microsoft.com/office/drawing/2014/main" id="{C20679EE-54D4-40BE-AF37-8B560614C5B1}"/>
+                <a16:creationId xmlns:a16="http://schemas.microsoft.com/office/drawing/2014/main" id="{E264F686-2E7C-4A35-97CC-8C936A1BEF5C}"/>
               </a:ext>
             </a:extLst>
           </p:cNvPr>
@@ -5284,7 +8876,7 @@
           <p:cNvPr id="9" name="">
             <a:extLst xmlns:a="http://schemas.openxmlformats.org/drawingml/2006/main">
               <a:ext uri="{FF2B5EF4-FFF2-40B4-BE49-F238E27FC236}">
-                <a16:creationId xmlns:a16="http://schemas.microsoft.com/office/drawing/2014/main" id="{4D2B29B7-E210-4723-8E14-6EE2B4BE801D}"/>
+                <a16:creationId xmlns:a16="http://schemas.microsoft.com/office/drawing/2014/main" id="{ABEC7923-F82E-41A8-ACF1-9AB38090C9CE}"/>
               </a:ext>
             </a:extLst>
           </p:cNvPr>
@@ -5334,7 +8926,7 @@
           <p:cNvPr id="10" name="">
             <a:extLst xmlns:a="http://schemas.openxmlformats.org/drawingml/2006/main">
               <a:ext uri="{FF2B5EF4-FFF2-40B4-BE49-F238E27FC236}">
-                <a16:creationId xmlns:a16="http://schemas.microsoft.com/office/drawing/2014/main" id="{20436D7B-D05A-4391-81D3-F3718BC228A6}"/>
+                <a16:creationId xmlns:a16="http://schemas.microsoft.com/office/drawing/2014/main" id="{6DEA21CB-14F7-4E59-AEEE-772386F5FBB4}"/>
               </a:ext>
             </a:extLst>
           </p:cNvPr>
@@ -5367,7 +8959,7 @@
           <p:cNvPr id="11" name="">
             <a:extLst xmlns:a="http://schemas.openxmlformats.org/drawingml/2006/main">
               <a:ext uri="{FF2B5EF4-FFF2-40B4-BE49-F238E27FC236}">
-                <a16:creationId xmlns:a16="http://schemas.microsoft.com/office/drawing/2014/main" id="{C1EEB091-CE39-4C5F-81E4-15562F479818}"/>
+                <a16:creationId xmlns:a16="http://schemas.microsoft.com/office/drawing/2014/main" id="{DCB658A2-7345-45A3-A4B2-701C2DF4F3BB}"/>
               </a:ext>
             </a:extLst>
           </p:cNvPr>
@@ -5417,7 +9009,7 @@
           <p:cNvPr id="12" name="">
             <a:extLst xmlns:a="http://schemas.openxmlformats.org/drawingml/2006/main">
               <a:ext uri="{FF2B5EF4-FFF2-40B4-BE49-F238E27FC236}">
-                <a16:creationId xmlns:a16="http://schemas.microsoft.com/office/drawing/2014/main" id="{14D4AC82-0B44-4A87-A653-7494CB022F96}"/>
+                <a16:creationId xmlns:a16="http://schemas.microsoft.com/office/drawing/2014/main" id="{086697BC-83FE-4B5B-AE67-4FD48EFD9A72}"/>
               </a:ext>
             </a:extLst>
           </p:cNvPr>
@@ -5467,7 +9059,7 @@
           <p:cNvPr id="13" name="">
             <a:extLst xmlns:a="http://schemas.openxmlformats.org/drawingml/2006/main">
               <a:ext uri="{FF2B5EF4-FFF2-40B4-BE49-F238E27FC236}">
-                <a16:creationId xmlns:a16="http://schemas.microsoft.com/office/drawing/2014/main" id="{1C36A4A8-BF10-4391-8972-FA44930F0437}"/>
+                <a16:creationId xmlns:a16="http://schemas.microsoft.com/office/drawing/2014/main" id="{5C425FB1-F485-4DF4-9FBC-EE5B9009E6D6}"/>
               </a:ext>
             </a:extLst>
           </p:cNvPr>
@@ -5515,7 +9107,350 @@
     </p:spTree>
     <p:extLst>
       <p:ext uri="{BB962C8B-B14F-4D97-AF65-F5344CB8AC3E}">
-        <p14:creationId xmlns:p14="http://schemas.microsoft.com/office/powerpoint/2010/main" val="1468216662"/>
+        <p14:creationId xmlns:p14="http://schemas.microsoft.com/office/powerpoint/2010/main" val="1806446114"/>
+      </p:ext>
+    </p:extLst>
+  </p:cSld>
+</p:sld>
+</file>
+
+<file path=ppt/slides/slide9.xml><?xml version="1.0" encoding="utf-8"?>
+<p:sld xmlns:p="http://schemas.openxmlformats.org/presentationml/2006/main">
+  <p:cSld>
+    <p:bg>
+      <p:bgPr>
+        <a:solidFill xmlns:a="http://schemas.openxmlformats.org/drawingml/2006/main">
+          <a:srgbClr val="FFFCF8"/>
+        </a:solidFill>
+      </p:bgPr>
+    </p:bg>
+    <p:spTree>
+      <p:nvGrpSpPr>
+        <p:cNvPr id="1" name=""/>
+        <p:cNvGrpSpPr/>
+        <p:nvPr/>
+      </p:nvGrpSpPr>
+      <p:grpSpPr>
+        <a:xfrm xmlns:a="http://schemas.openxmlformats.org/drawingml/2006/main"/>
+      </p:grpSpPr>
+      <p:sp>
+        <p:nvSpPr>
+          <p:cNvPr id="8" name="">
+            <a:extLst xmlns:a="http://schemas.openxmlformats.org/drawingml/2006/main">
+              <a:ext uri="{FF2B5EF4-FFF2-40B4-BE49-F238E27FC236}">
+                <a16:creationId xmlns:a16="http://schemas.microsoft.com/office/drawing/2014/main" id="{5EFAAC22-8F1B-4528-BBDC-D337A3BA6616}"/>
+              </a:ext>
+            </a:extLst>
+          </p:cNvPr>
+          <p:cNvSpPr>
+            <a:spLocks xmlns:a="http://schemas.openxmlformats.org/drawingml/2006/main" noGrp="1"/>
+          </p:cNvSpPr>
+          <p:nvPr/>
+        </p:nvSpPr>
+        <p:spPr>
+          <a:xfrm xmlns:a="http://schemas.openxmlformats.org/drawingml/2006/main">
+            <a:off x="0" y="0"/>
+            <a:ext cx="171450" cy="6858000"/>
+          </a:xfrm>
+          <a:prstGeom xmlns:a="http://schemas.openxmlformats.org/drawingml/2006/main" prst="rect">
+            <a:avLst/>
+          </a:prstGeom>
+          <a:solidFill xmlns:a="http://schemas.openxmlformats.org/drawingml/2006/main">
+            <a:srgbClr val="6657E8"/>
+          </a:solidFill>
+          <a:ln xmlns:a="http://schemas.openxmlformats.org/drawingml/2006/main" w="0">
+            <a:noFill/>
+            <a:prstDash val="solid"/>
+          </a:ln>
+        </p:spPr>
+      </p:sp>
+      <p:sp>
+        <p:nvSpPr>
+          <p:cNvPr id="2" name="">
+            <a:extLst xmlns:a="http://schemas.openxmlformats.org/drawingml/2006/main">
+              <a:ext uri="{FF2B5EF4-FFF2-40B4-BE49-F238E27FC236}">
+                <a16:creationId xmlns:a16="http://schemas.microsoft.com/office/drawing/2014/main" id="{52057D7B-9A6E-42E5-99A7-EC2A7915E543}"/>
+              </a:ext>
+            </a:extLst>
+          </p:cNvPr>
+          <p:cNvSpPr>
+            <a:spLocks xmlns:a="http://schemas.openxmlformats.org/drawingml/2006/main" noGrp="1"/>
+          </p:cNvSpPr>
+          <p:nvPr/>
+        </p:nvSpPr>
+        <p:spPr>
+          <a:xfrm xmlns:a="http://schemas.openxmlformats.org/drawingml/2006/main">
+            <a:off x="647700" y="457200"/>
+            <a:ext cx="10096500" cy="552450"/>
+          </a:xfrm>
+          <a:prstGeom xmlns:a="http://schemas.openxmlformats.org/drawingml/2006/main" prst="rect">
+            <a:avLst/>
+          </a:prstGeom>
+          <a:noFill xmlns:a="http://schemas.openxmlformats.org/drawingml/2006/main"/>
+          <a:ln xmlns:a="http://schemas.openxmlformats.org/drawingml/2006/main" w="0">
+            <a:noFill/>
+            <a:prstDash val="solid"/>
+          </a:ln>
+        </p:spPr>
+        <p:txBody>
+          <a:bodyPr xmlns:a="http://schemas.openxmlformats.org/drawingml/2006/main"/>
+          <a:lstStyle xmlns:a="http://schemas.openxmlformats.org/drawingml/2006/main"/>
+          <a:p xmlns:a="http://schemas.openxmlformats.org/drawingml/2006/main">
+            <a:pPr>
+              <a:defRPr sz="2700" b="1">
+                <a:solidFill>
+                  <a:srgbClr val="182235"/>
+                </a:solidFill>
+              </a:defRPr>
+            </a:pPr>
+            <a:r>
+              <a:rPr sz="2700" b="1">
+                <a:solidFill>
+                  <a:srgbClr val="182235"/>
+                </a:solidFill>
+              </a:rPr>
+              <a:t>왜 배우는지 알면 실습 방향이 보입니다</a:t>
+            </a:r>
+          </a:p>
+        </p:txBody>
+      </p:sp>
+      <p:sp>
+        <p:nvSpPr>
+          <p:cNvPr id="3" name="">
+            <a:extLst xmlns:a="http://schemas.openxmlformats.org/drawingml/2006/main">
+              <a:ext uri="{FF2B5EF4-FFF2-40B4-BE49-F238E27FC236}">
+                <a16:creationId xmlns:a16="http://schemas.microsoft.com/office/drawing/2014/main" id="{23C64D21-B772-4131-BF29-27C3852D077D}"/>
+              </a:ext>
+            </a:extLst>
+          </p:cNvPr>
+          <p:cNvSpPr>
+            <a:spLocks xmlns:a="http://schemas.openxmlformats.org/drawingml/2006/main" noGrp="1"/>
+          </p:cNvSpPr>
+          <p:nvPr/>
+        </p:nvSpPr>
+        <p:spPr>
+          <a:xfrm xmlns:a="http://schemas.openxmlformats.org/drawingml/2006/main">
+            <a:off x="666750" y="6419850"/>
+            <a:ext cx="10096500" cy="209550"/>
+          </a:xfrm>
+          <a:prstGeom xmlns:a="http://schemas.openxmlformats.org/drawingml/2006/main" prst="rect">
+            <a:avLst/>
+          </a:prstGeom>
+          <a:noFill xmlns:a="http://schemas.openxmlformats.org/drawingml/2006/main"/>
+          <a:ln xmlns:a="http://schemas.openxmlformats.org/drawingml/2006/main" w="0">
+            <a:noFill/>
+            <a:prstDash val="solid"/>
+          </a:ln>
+        </p:spPr>
+        <p:txBody>
+          <a:bodyPr xmlns:a="http://schemas.openxmlformats.org/drawingml/2006/main"/>
+          <a:lstStyle xmlns:a="http://schemas.openxmlformats.org/drawingml/2006/main"/>
+          <a:p xmlns:a="http://schemas.openxmlformats.org/drawingml/2006/main">
+            <a:pPr>
+              <a:defRPr sz="975">
+                <a:solidFill>
+                  <a:srgbClr val="657083"/>
+                </a:solidFill>
+              </a:defRPr>
+            </a:pPr>
+            <a:r>
+              <a:rPr sz="975">
+                <a:solidFill>
+                  <a:srgbClr val="657083"/>
+                </a:solidFill>
+              </a:rPr>
+              <a:t>EDU 웹개발 교육 플랫폼  ·  09</a:t>
+            </a:r>
+          </a:p>
+        </p:txBody>
+      </p:sp>
+      <p:sp>
+        <p:nvSpPr>
+          <p:cNvPr id="4" name="">
+            <a:extLst xmlns:a="http://schemas.openxmlformats.org/drawingml/2006/main">
+              <a:ext uri="{FF2B5EF4-FFF2-40B4-BE49-F238E27FC236}">
+                <a16:creationId xmlns:a16="http://schemas.microsoft.com/office/drawing/2014/main" id="{52D6D79A-9F53-4353-AEA3-D8259F175A36}"/>
+              </a:ext>
+            </a:extLst>
+          </p:cNvPr>
+          <p:cNvSpPr>
+            <a:spLocks xmlns:a="http://schemas.openxmlformats.org/drawingml/2006/main" noGrp="1"/>
+          </p:cNvSpPr>
+          <p:nvPr/>
+        </p:nvSpPr>
+        <p:spPr>
+          <a:xfrm xmlns:a="http://schemas.openxmlformats.org/drawingml/2006/main">
+            <a:off x="685800" y="1381125"/>
+            <a:ext cx="10820400" cy="1809750"/>
+          </a:xfrm>
+          <a:prstGeom xmlns:a="http://schemas.openxmlformats.org/drawingml/2006/main" prst="roundRect">
+            <a:avLst>
+              <a:gd name="adj" fmla="val 6316"/>
+            </a:avLst>
+          </a:prstGeom>
+          <a:solidFill xmlns:a="http://schemas.openxmlformats.org/drawingml/2006/main">
+            <a:srgbClr val="EEEAFE"/>
+          </a:solidFill>
+          <a:ln xmlns:a="http://schemas.openxmlformats.org/drawingml/2006/main" w="0">
+            <a:noFill/>
+            <a:prstDash val="solid"/>
+          </a:ln>
+        </p:spPr>
+      </p:sp>
+      <p:sp>
+        <p:nvSpPr>
+          <p:cNvPr id="5" name="">
+            <a:extLst xmlns:a="http://schemas.openxmlformats.org/drawingml/2006/main">
+              <a:ext uri="{FF2B5EF4-FFF2-40B4-BE49-F238E27FC236}">
+                <a16:creationId xmlns:a16="http://schemas.microsoft.com/office/drawing/2014/main" id="{D710ED04-D4BF-4D38-8AD4-3EC7BEB0E4BB}"/>
+              </a:ext>
+            </a:extLst>
+          </p:cNvPr>
+          <p:cNvSpPr>
+            <a:spLocks xmlns:a="http://schemas.openxmlformats.org/drawingml/2006/main" noGrp="1"/>
+          </p:cNvSpPr>
+          <p:nvPr/>
+        </p:nvSpPr>
+        <p:spPr>
+          <a:xfrm xmlns:a="http://schemas.openxmlformats.org/drawingml/2006/main">
+            <a:off x="1066800" y="1762125"/>
+            <a:ext cx="10058400" cy="1143000"/>
+          </a:xfrm>
+          <a:prstGeom xmlns:a="http://schemas.openxmlformats.org/drawingml/2006/main" prst="rect">
+            <a:avLst/>
+          </a:prstGeom>
+          <a:noFill xmlns:a="http://schemas.openxmlformats.org/drawingml/2006/main"/>
+          <a:ln xmlns:a="http://schemas.openxmlformats.org/drawingml/2006/main" w="0">
+            <a:noFill/>
+            <a:prstDash val="solid"/>
+          </a:ln>
+        </p:spPr>
+        <p:txBody>
+          <a:bodyPr xmlns:a="http://schemas.openxmlformats.org/drawingml/2006/main"/>
+          <a:lstStyle xmlns:a="http://schemas.openxmlformats.org/drawingml/2006/main"/>
+          <a:p xmlns:a="http://schemas.openxmlformats.org/drawingml/2006/main">
+            <a:pPr>
+              <a:defRPr sz="1875">
+                <a:solidFill>
+                  <a:srgbClr val="182235"/>
+                </a:solidFill>
+              </a:defRPr>
+            </a:pPr>
+            <a:r>
+              <a:rPr sz="1875">
+                <a:solidFill>
+                  <a:srgbClr val="182235"/>
+                </a:solidFill>
+              </a:rPr>
+              <a:t>브라우저 저장은 한 기기에서만 보입니다. Supabase에 저장하면 허용된 사용자가 여러 기기에서 같은 자료를 볼 수 있습니다.</a:t>
+            </a:r>
+          </a:p>
+        </p:txBody>
+      </p:sp>
+      <p:sp>
+        <p:nvSpPr>
+          <p:cNvPr id="6" name="">
+            <a:extLst xmlns:a="http://schemas.openxmlformats.org/drawingml/2006/main">
+              <a:ext uri="{FF2B5EF4-FFF2-40B4-BE49-F238E27FC236}">
+                <a16:creationId xmlns:a16="http://schemas.microsoft.com/office/drawing/2014/main" id="{ABB9AF6D-7924-4505-98F6-DBCD87493EC3}"/>
+              </a:ext>
+            </a:extLst>
+          </p:cNvPr>
+          <p:cNvSpPr>
+            <a:spLocks xmlns:a="http://schemas.openxmlformats.org/drawingml/2006/main" noGrp="1"/>
+          </p:cNvSpPr>
+          <p:nvPr/>
+        </p:nvSpPr>
+        <p:spPr>
+          <a:xfrm xmlns:a="http://schemas.openxmlformats.org/drawingml/2006/main">
+            <a:off x="838200" y="3714750"/>
+            <a:ext cx="2476500" cy="323850"/>
+          </a:xfrm>
+          <a:prstGeom xmlns:a="http://schemas.openxmlformats.org/drawingml/2006/main" prst="rect">
+            <a:avLst/>
+          </a:prstGeom>
+          <a:noFill xmlns:a="http://schemas.openxmlformats.org/drawingml/2006/main"/>
+          <a:ln xmlns:a="http://schemas.openxmlformats.org/drawingml/2006/main" w="0">
+            <a:noFill/>
+            <a:prstDash val="solid"/>
+          </a:ln>
+        </p:spPr>
+        <p:txBody>
+          <a:bodyPr xmlns:a="http://schemas.openxmlformats.org/drawingml/2006/main"/>
+          <a:lstStyle xmlns:a="http://schemas.openxmlformats.org/drawingml/2006/main"/>
+          <a:p xmlns:a="http://schemas.openxmlformats.org/drawingml/2006/main">
+            <a:pPr>
+              <a:defRPr sz="1575" b="1">
+                <a:solidFill>
+                  <a:srgbClr val="6657E8"/>
+                </a:solidFill>
+              </a:defRPr>
+            </a:pPr>
+            <a:r>
+              <a:rPr sz="1575" b="1">
+                <a:solidFill>
+                  <a:srgbClr val="6657E8"/>
+                </a:solidFill>
+              </a:rPr>
+              <a:t>오늘 완성할 결과</a:t>
+            </a:r>
+          </a:p>
+        </p:txBody>
+      </p:sp>
+      <p:sp>
+        <p:nvSpPr>
+          <p:cNvPr id="7" name="">
+            <a:extLst xmlns:a="http://schemas.openxmlformats.org/drawingml/2006/main">
+              <a:ext uri="{FF2B5EF4-FFF2-40B4-BE49-F238E27FC236}">
+                <a16:creationId xmlns:a16="http://schemas.microsoft.com/office/drawing/2014/main" id="{CDB178D0-ABE6-4F6C-B881-AC3FE522D74F}"/>
+              </a:ext>
+            </a:extLst>
+          </p:cNvPr>
+          <p:cNvSpPr>
+            <a:spLocks xmlns:a="http://schemas.openxmlformats.org/drawingml/2006/main" noGrp="1"/>
+          </p:cNvSpPr>
+          <p:nvPr/>
+        </p:nvSpPr>
+        <p:spPr>
+          <a:xfrm xmlns:a="http://schemas.openxmlformats.org/drawingml/2006/main">
+            <a:off x="838200" y="4191000"/>
+            <a:ext cx="10096500" cy="857250"/>
+          </a:xfrm>
+          <a:prstGeom xmlns:a="http://schemas.openxmlformats.org/drawingml/2006/main" prst="rect">
+            <a:avLst/>
+          </a:prstGeom>
+          <a:noFill xmlns:a="http://schemas.openxmlformats.org/drawingml/2006/main"/>
+          <a:ln xmlns:a="http://schemas.openxmlformats.org/drawingml/2006/main" w="0">
+            <a:noFill/>
+            <a:prstDash val="solid"/>
+          </a:ln>
+        </p:spPr>
+        <p:txBody>
+          <a:bodyPr xmlns:a="http://schemas.openxmlformats.org/drawingml/2006/main"/>
+          <a:lstStyle xmlns:a="http://schemas.openxmlformats.org/drawingml/2006/main"/>
+          <a:p xmlns:a="http://schemas.openxmlformats.org/drawingml/2006/main">
+            <a:pPr>
+              <a:defRPr sz="2025" b="1">
+                <a:solidFill>
+                  <a:srgbClr val="182235"/>
+                </a:solidFill>
+              </a:defRPr>
+            </a:pPr>
+            <a:r>
+              <a:rPr sz="2025" b="1">
+                <a:solidFill>
+                  <a:srgbClr val="182235"/>
+                </a:solidFill>
+              </a:rPr>
+              <a:t>교육자료 목록을 조회하고 연습 자료 한 건을 추가한 뒤 다시 확인합니다.</a:t>
+            </a:r>
+          </a:p>
+        </p:txBody>
+      </p:sp>
+    </p:spTree>
+    <p:extLst>
+      <p:ext uri="{BB962C8B-B14F-4D97-AF65-F5344CB8AC3E}">
+        <p14:creationId xmlns:p14="http://schemas.microsoft.com/office/powerpoint/2010/main" val="1476621879"/>
       </p:ext>
     </p:extLst>
   </p:cSld>
